--- a/reference_content/Slides/pytorch_data.pptx
+++ b/reference_content/Slides/pytorch_data.pptx
@@ -5,19 +5,37 @@
     <p:sldMasterId id="2147483660" r:id="rId1"/>
   </p:sldMasterIdLst>
   <p:sldIdLst>
-    <p:sldId id="256" r:id="rId2"/>
-    <p:sldId id="257" r:id="rId3"/>
-    <p:sldId id="258" r:id="rId4"/>
-    <p:sldId id="259" r:id="rId5"/>
-    <p:sldId id="260" r:id="rId6"/>
-    <p:sldId id="261" r:id="rId7"/>
-    <p:sldId id="262" r:id="rId8"/>
-    <p:sldId id="263" r:id="rId9"/>
-    <p:sldId id="264" r:id="rId10"/>
-    <p:sldId id="265" r:id="rId11"/>
-    <p:sldId id="266" r:id="rId12"/>
-    <p:sldId id="267" r:id="rId13"/>
-    <p:sldId id="268" r:id="rId14"/>
+    <p:sldId id="269" r:id="rId2"/>
+    <p:sldId id="275" r:id="rId3"/>
+    <p:sldId id="256" r:id="rId4"/>
+    <p:sldId id="279" r:id="rId5"/>
+    <p:sldId id="280" r:id="rId6"/>
+    <p:sldId id="281" r:id="rId7"/>
+    <p:sldId id="282" r:id="rId8"/>
+    <p:sldId id="283" r:id="rId9"/>
+    <p:sldId id="285" r:id="rId10"/>
+    <p:sldId id="287" r:id="rId11"/>
+    <p:sldId id="277" r:id="rId12"/>
+    <p:sldId id="257" r:id="rId13"/>
+    <p:sldId id="258" r:id="rId14"/>
+    <p:sldId id="273" r:id="rId15"/>
+    <p:sldId id="259" r:id="rId16"/>
+    <p:sldId id="284" r:id="rId17"/>
+    <p:sldId id="260" r:id="rId18"/>
+    <p:sldId id="263" r:id="rId19"/>
+    <p:sldId id="276" r:id="rId20"/>
+    <p:sldId id="261" r:id="rId21"/>
+    <p:sldId id="271" r:id="rId22"/>
+    <p:sldId id="272" r:id="rId23"/>
+    <p:sldId id="262" r:id="rId24"/>
+    <p:sldId id="278" r:id="rId25"/>
+    <p:sldId id="286" r:id="rId26"/>
+    <p:sldId id="270" r:id="rId27"/>
+    <p:sldId id="264" r:id="rId28"/>
+    <p:sldId id="265" r:id="rId29"/>
+    <p:sldId id="266" r:id="rId30"/>
+    <p:sldId id="267" r:id="rId31"/>
+    <p:sldId id="268" r:id="rId32"/>
   </p:sldIdLst>
   <p:sldSz cx="12192000" cy="6858000"/>
   <p:notesSz cx="6858000" cy="9144000"/>
@@ -263,7 +281,7 @@
           <a:p>
             <a:fld id="{ACA5B2FB-9CAA-CB48-9913-D3769F3986D0}" type="datetimeFigureOut">
               <a:rPr lang="en-US" smtClean="0"/>
-              <a:t>1/6/26</a:t>
+              <a:t>3/8/26</a:t>
             </a:fld>
             <a:endParaRPr lang="en-US"/>
           </a:p>
@@ -474,7 +492,7 @@
           <a:p>
             <a:fld id="{ACA5B2FB-9CAA-CB48-9913-D3769F3986D0}" type="datetimeFigureOut">
               <a:rPr lang="en-US" smtClean="0"/>
-              <a:t>1/6/26</a:t>
+              <a:t>3/8/26</a:t>
             </a:fld>
             <a:endParaRPr lang="en-US"/>
           </a:p>
@@ -689,7 +707,7 @@
           <a:p>
             <a:fld id="{ACA5B2FB-9CAA-CB48-9913-D3769F3986D0}" type="datetimeFigureOut">
               <a:rPr lang="en-US" smtClean="0"/>
-              <a:t>1/6/26</a:t>
+              <a:t>3/8/26</a:t>
             </a:fld>
             <a:endParaRPr lang="en-US"/>
           </a:p>
@@ -890,7 +908,7 @@
           <a:p>
             <a:fld id="{ACA5B2FB-9CAA-CB48-9913-D3769F3986D0}" type="datetimeFigureOut">
               <a:rPr lang="en-US" smtClean="0"/>
-              <a:t>1/6/26</a:t>
+              <a:t>3/8/26</a:t>
             </a:fld>
             <a:endParaRPr lang="en-US"/>
           </a:p>
@@ -1169,7 +1187,7 @@
           <a:p>
             <a:fld id="{ACA5B2FB-9CAA-CB48-9913-D3769F3986D0}" type="datetimeFigureOut">
               <a:rPr lang="en-US" smtClean="0"/>
-              <a:t>1/6/26</a:t>
+              <a:t>3/8/26</a:t>
             </a:fld>
             <a:endParaRPr lang="en-US"/>
           </a:p>
@@ -1437,7 +1455,7 @@
           <a:p>
             <a:fld id="{ACA5B2FB-9CAA-CB48-9913-D3769F3986D0}" type="datetimeFigureOut">
               <a:rPr lang="en-US" smtClean="0"/>
-              <a:t>1/6/26</a:t>
+              <a:t>3/8/26</a:t>
             </a:fld>
             <a:endParaRPr lang="en-US"/>
           </a:p>
@@ -1853,7 +1871,7 @@
           <a:p>
             <a:fld id="{ACA5B2FB-9CAA-CB48-9913-D3769F3986D0}" type="datetimeFigureOut">
               <a:rPr lang="en-US" smtClean="0"/>
-              <a:t>1/6/26</a:t>
+              <a:t>3/8/26</a:t>
             </a:fld>
             <a:endParaRPr lang="en-US"/>
           </a:p>
@@ -2002,7 +2020,7 @@
           <a:p>
             <a:fld id="{ACA5B2FB-9CAA-CB48-9913-D3769F3986D0}" type="datetimeFigureOut">
               <a:rPr lang="en-US" smtClean="0"/>
-              <a:t>1/6/26</a:t>
+              <a:t>3/8/26</a:t>
             </a:fld>
             <a:endParaRPr lang="en-US"/>
           </a:p>
@@ -2128,7 +2146,7 @@
           <a:p>
             <a:fld id="{ACA5B2FB-9CAA-CB48-9913-D3769F3986D0}" type="datetimeFigureOut">
               <a:rPr lang="en-US" smtClean="0"/>
-              <a:t>1/6/26</a:t>
+              <a:t>3/8/26</a:t>
             </a:fld>
             <a:endParaRPr lang="en-US"/>
           </a:p>
@@ -2379,7 +2397,7 @@
           <a:p>
             <a:fld id="{ACA5B2FB-9CAA-CB48-9913-D3769F3986D0}" type="datetimeFigureOut">
               <a:rPr lang="en-US" smtClean="0"/>
-              <a:t>1/6/26</a:t>
+              <a:t>3/8/26</a:t>
             </a:fld>
             <a:endParaRPr lang="en-US"/>
           </a:p>
@@ -2824,7 +2842,7 @@
           <a:p>
             <a:fld id="{ACA5B2FB-9CAA-CB48-9913-D3769F3986D0}" type="datetimeFigureOut">
               <a:rPr lang="en-US" smtClean="0"/>
-              <a:t>1/6/26</a:t>
+              <a:t>3/8/26</a:t>
             </a:fld>
             <a:endParaRPr lang="en-US"/>
           </a:p>
@@ -3158,7 +3176,7 @@
           <a:p>
             <a:fld id="{ACA5B2FB-9CAA-CB48-9913-D3769F3986D0}" type="datetimeFigureOut">
               <a:rPr lang="en-US" smtClean="0"/>
-              <a:t>1/6/26</a:t>
+              <a:t>3/8/26</a:t>
             </a:fld>
             <a:endParaRPr lang="en-US"/>
           </a:p>
@@ -3649,7 +3667,7 @@
           <p:cNvPr id="2" name="Title 1">
             <a:extLst>
               <a:ext uri="{FF2B5EF4-FFF2-40B4-BE49-F238E27FC236}">
-                <a16:creationId xmlns:a16="http://schemas.microsoft.com/office/drawing/2014/main" id="{7E3D1CB9-1E3A-DA11-D7A7-F5480F765F6F}"/>
+                <a16:creationId xmlns:a16="http://schemas.microsoft.com/office/drawing/2014/main" id="{9D9DB326-1D0C-4E75-769E-FE4E00FC6DAE}"/>
               </a:ext>
             </a:extLst>
           </p:cNvPr>
@@ -3657,7 +3675,7 @@
             <a:spLocks noGrp="1"/>
           </p:cNvSpPr>
           <p:nvPr>
-            <p:ph type="ctrTitle"/>
+            <p:ph type="title"/>
           </p:nvPr>
         </p:nvSpPr>
         <p:spPr/>
@@ -3665,46 +3683,69 @@
           <a:bodyPr/>
           <a:lstStyle/>
           <a:p>
+            <a:r>
+              <a:rPr lang="en-US" dirty="0"/>
+              <a:t>Housekeeping</a:t>
+            </a:r>
+          </a:p>
+        </p:txBody>
+      </p:sp>
+      <p:sp>
+        <p:nvSpPr>
+          <p:cNvPr id="3" name="Content Placeholder 2">
+            <a:extLst>
+              <a:ext uri="{FF2B5EF4-FFF2-40B4-BE49-F238E27FC236}">
+                <a16:creationId xmlns:a16="http://schemas.microsoft.com/office/drawing/2014/main" id="{C743AAE6-EAAC-98CA-D2B4-1AAAF67D5F1F}"/>
+              </a:ext>
+            </a:extLst>
+          </p:cNvPr>
+          <p:cNvSpPr>
+            <a:spLocks noGrp="1"/>
+          </p:cNvSpPr>
+          <p:nvPr>
+            <p:ph idx="1"/>
+          </p:nvPr>
+        </p:nvSpPr>
+        <p:spPr/>
+        <p:txBody>
+          <a:bodyPr/>
+          <a:lstStyle/>
+          <a:p>
+            <a:r>
+              <a:rPr lang="en-US" dirty="0"/>
+              <a:t>Today</a:t>
+            </a:r>
+          </a:p>
+          <a:p>
+            <a:pPr lvl="1"/>
             <a:r>
               <a:rPr lang="en-US" dirty="0" err="1"/>
               <a:t>PyTorch</a:t>
             </a:r>
             <a:r>
               <a:rPr lang="en-US" dirty="0"/>
-              <a:t> Data</a:t>
-            </a:r>
-          </a:p>
-        </p:txBody>
-      </p:sp>
-      <p:sp>
-        <p:nvSpPr>
-          <p:cNvPr id="3" name="Subtitle 2">
-            <a:extLst>
-              <a:ext uri="{FF2B5EF4-FFF2-40B4-BE49-F238E27FC236}">
-                <a16:creationId xmlns:a16="http://schemas.microsoft.com/office/drawing/2014/main" id="{280EC84A-4931-77EC-C6E7-6AD91FB320C4}"/>
-              </a:ext>
-            </a:extLst>
-          </p:cNvPr>
-          <p:cNvSpPr>
-            <a:spLocks noGrp="1"/>
-          </p:cNvSpPr>
-          <p:nvPr>
-            <p:ph type="subTitle" idx="1"/>
-          </p:nvPr>
-        </p:nvSpPr>
-        <p:spPr/>
-        <p:txBody>
-          <a:bodyPr/>
-          <a:lstStyle/>
-          <a:p>
-            <a:endParaRPr lang="en-US"/>
+              <a:t> data processing. </a:t>
+            </a:r>
+          </a:p>
+          <a:p>
+            <a:pPr lvl="1"/>
+            <a:r>
+              <a:rPr lang="en-US" dirty="0"/>
+              <a:t>Depending on time, first part of CNNs (image models). </a:t>
+            </a:r>
+          </a:p>
+          <a:p>
+            <a:r>
+              <a:rPr lang="en-US" dirty="0"/>
+              <a:t>Next week – tuning models and monitoring training. </a:t>
+            </a:r>
           </a:p>
         </p:txBody>
       </p:sp>
     </p:spTree>
     <p:extLst>
       <p:ext uri="{BB962C8B-B14F-4D97-AF65-F5344CB8AC3E}">
-        <p14:creationId xmlns:p14="http://schemas.microsoft.com/office/powerpoint/2010/main" val="2828267948"/>
+        <p14:creationId xmlns:p14="http://schemas.microsoft.com/office/powerpoint/2010/main" val="3328831066"/>
       </p:ext>
     </p:extLst>
   </p:cSld>
@@ -3736,6 +3777,3036 @@
           <p:cNvPr id="2" name="Title 1">
             <a:extLst>
               <a:ext uri="{FF2B5EF4-FFF2-40B4-BE49-F238E27FC236}">
+                <a16:creationId xmlns:a16="http://schemas.microsoft.com/office/drawing/2014/main" id="{320C3B62-4D61-9768-403B-82944925D54A}"/>
+              </a:ext>
+            </a:extLst>
+          </p:cNvPr>
+          <p:cNvSpPr>
+            <a:spLocks noGrp="1"/>
+          </p:cNvSpPr>
+          <p:nvPr>
+            <p:ph type="title"/>
+          </p:nvPr>
+        </p:nvSpPr>
+        <p:spPr/>
+        <p:txBody>
+          <a:bodyPr/>
+          <a:lstStyle/>
+          <a:p>
+            <a:r>
+              <a:rPr lang="en-US" dirty="0"/>
+              <a:t>Heads up!</a:t>
+            </a:r>
+          </a:p>
+        </p:txBody>
+      </p:sp>
+      <p:sp>
+        <p:nvSpPr>
+          <p:cNvPr id="3" name="Content Placeholder 2">
+            <a:extLst>
+              <a:ext uri="{FF2B5EF4-FFF2-40B4-BE49-F238E27FC236}">
+                <a16:creationId xmlns:a16="http://schemas.microsoft.com/office/drawing/2014/main" id="{DB65D51A-E6BB-524F-5037-38AC49C9568F}"/>
+              </a:ext>
+            </a:extLst>
+          </p:cNvPr>
+          <p:cNvSpPr>
+            <a:spLocks noGrp="1"/>
+          </p:cNvSpPr>
+          <p:nvPr>
+            <p:ph idx="1"/>
+          </p:nvPr>
+        </p:nvSpPr>
+        <p:spPr>
+          <a:xfrm>
+            <a:off x="1451579" y="1944414"/>
+            <a:ext cx="9603275" cy="4109067"/>
+          </a:xfrm>
+        </p:spPr>
+        <p:txBody>
+          <a:bodyPr/>
+          <a:lstStyle/>
+          <a:p>
+            <a:r>
+              <a:rPr lang="en-US" dirty="0"/>
+              <a:t>In </a:t>
+            </a:r>
+            <a:r>
+              <a:rPr lang="en-US" dirty="0" err="1"/>
+              <a:t>PyTorch</a:t>
+            </a:r>
+            <a:r>
+              <a:rPr lang="en-US" dirty="0"/>
+              <a:t>, we almost always have several ways to do things:</a:t>
+            </a:r>
+          </a:p>
+          <a:p>
+            <a:pPr lvl="1"/>
+            <a:r>
+              <a:rPr lang="en-US" dirty="0"/>
+              <a:t>Write ’raw’ code to do math on tensors directly. </a:t>
+            </a:r>
+          </a:p>
+          <a:p>
+            <a:pPr lvl="1"/>
+            <a:r>
+              <a:rPr lang="en-US" dirty="0"/>
+              <a:t>Use simplified defaults like the “sequential” model. </a:t>
+            </a:r>
+          </a:p>
+          <a:p>
+            <a:pPr lvl="1"/>
+            <a:r>
+              <a:rPr lang="en-US" dirty="0"/>
+              <a:t>Create custom classes to implement parts of the code. </a:t>
+            </a:r>
+          </a:p>
+          <a:p>
+            <a:pPr lvl="1"/>
+            <a:r>
+              <a:rPr lang="en-US" dirty="0"/>
+              <a:t>Older ways to do things. </a:t>
+            </a:r>
+          </a:p>
+          <a:p>
+            <a:r>
+              <a:rPr lang="en-US" dirty="0"/>
+              <a:t>These are generally interchangeable. </a:t>
+            </a:r>
+          </a:p>
+          <a:p>
+            <a:r>
+              <a:rPr lang="en-US" dirty="0"/>
+              <a:t>There’s not one specific way to do stuff, you’ll see examples that all differ. </a:t>
+            </a:r>
+          </a:p>
+          <a:p>
+            <a:pPr lvl="1"/>
+            <a:r>
+              <a:rPr lang="en-US" dirty="0"/>
+              <a:t>Flexibility is useful, but it makes it harder </a:t>
+            </a:r>
+            <a:r>
+              <a:rPr lang="en-US"/>
+              <a:t>when starting. </a:t>
+            </a:r>
+            <a:endParaRPr lang="en-US" dirty="0"/>
+          </a:p>
+        </p:txBody>
+      </p:sp>
+    </p:spTree>
+    <p:extLst>
+      <p:ext uri="{BB962C8B-B14F-4D97-AF65-F5344CB8AC3E}">
+        <p14:creationId xmlns:p14="http://schemas.microsoft.com/office/powerpoint/2010/main" val="4033905771"/>
+      </p:ext>
+    </p:extLst>
+  </p:cSld>
+  <p:clrMapOvr>
+    <a:masterClrMapping/>
+  </p:clrMapOvr>
+</p:sld>
+</file>
+
+<file path=ppt/slides/slide11.xml><?xml version="1.0" encoding="utf-8"?>
+<p:sld xmlns:a="http://schemas.openxmlformats.org/drawingml/2006/main" xmlns:r="http://schemas.openxmlformats.org/officeDocument/2006/relationships" xmlns:p="http://schemas.openxmlformats.org/presentationml/2006/main">
+  <p:cSld>
+    <p:spTree>
+      <p:nvGrpSpPr>
+        <p:cNvPr id="1" name=""/>
+        <p:cNvGrpSpPr/>
+        <p:nvPr/>
+      </p:nvGrpSpPr>
+      <p:grpSpPr>
+        <a:xfrm>
+          <a:off x="0" y="0"/>
+          <a:ext cx="0" cy="0"/>
+          <a:chOff x="0" y="0"/>
+          <a:chExt cx="0" cy="0"/>
+        </a:xfrm>
+      </p:grpSpPr>
+      <p:sp>
+        <p:nvSpPr>
+          <p:cNvPr id="2" name="Title 1">
+            <a:extLst>
+              <a:ext uri="{FF2B5EF4-FFF2-40B4-BE49-F238E27FC236}">
+                <a16:creationId xmlns:a16="http://schemas.microsoft.com/office/drawing/2014/main" id="{01CCDE46-779C-3586-F921-264BF5A1CDA8}"/>
+              </a:ext>
+            </a:extLst>
+          </p:cNvPr>
+          <p:cNvSpPr>
+            <a:spLocks noGrp="1"/>
+          </p:cNvSpPr>
+          <p:nvPr>
+            <p:ph type="title"/>
+          </p:nvPr>
+        </p:nvSpPr>
+        <p:spPr/>
+        <p:txBody>
+          <a:bodyPr/>
+          <a:lstStyle/>
+          <a:p>
+            <a:r>
+              <a:rPr lang="en-US" dirty="0"/>
+              <a:t>Prepare some Data!</a:t>
+            </a:r>
+          </a:p>
+        </p:txBody>
+      </p:sp>
+      <p:sp>
+        <p:nvSpPr>
+          <p:cNvPr id="3" name="Content Placeholder 2">
+            <a:extLst>
+              <a:ext uri="{FF2B5EF4-FFF2-40B4-BE49-F238E27FC236}">
+                <a16:creationId xmlns:a16="http://schemas.microsoft.com/office/drawing/2014/main" id="{26C960D8-6C33-DDF6-F6E5-9F933C864D80}"/>
+              </a:ext>
+            </a:extLst>
+          </p:cNvPr>
+          <p:cNvSpPr>
+            <a:spLocks noGrp="1"/>
+          </p:cNvSpPr>
+          <p:nvPr>
+            <p:ph idx="1"/>
+          </p:nvPr>
+        </p:nvSpPr>
+        <p:spPr/>
+        <p:txBody>
+          <a:bodyPr/>
+          <a:lstStyle/>
+          <a:p>
+            <a:endParaRPr lang="en-US"/>
+          </a:p>
+        </p:txBody>
+      </p:sp>
+      <p:pic>
+        <p:nvPicPr>
+          <p:cNvPr id="4" name="Picture 3" descr="PyTorch Tutorial - GeeksforGeeks">
+            <a:extLst>
+              <a:ext uri="{FF2B5EF4-FFF2-40B4-BE49-F238E27FC236}">
+                <a16:creationId xmlns:a16="http://schemas.microsoft.com/office/drawing/2014/main" id="{ECAC6B40-A11E-61FB-1C43-C0C9C59EB020}"/>
+              </a:ext>
+            </a:extLst>
+          </p:cNvPr>
+          <p:cNvPicPr>
+            <a:picLocks noChangeAspect="1"/>
+          </p:cNvPicPr>
+          <p:nvPr/>
+        </p:nvPicPr>
+        <p:blipFill>
+          <a:blip r:embed="rId2"/>
+          <a:stretch>
+            <a:fillRect/>
+          </a:stretch>
+        </p:blipFill>
+        <p:spPr>
+          <a:xfrm>
+            <a:off x="3556000" y="2159000"/>
+            <a:ext cx="5080000" cy="2540000"/>
+          </a:xfrm>
+          <a:prstGeom prst="rect">
+            <a:avLst/>
+          </a:prstGeom>
+        </p:spPr>
+      </p:pic>
+    </p:spTree>
+    <p:extLst>
+      <p:ext uri="{BB962C8B-B14F-4D97-AF65-F5344CB8AC3E}">
+        <p14:creationId xmlns:p14="http://schemas.microsoft.com/office/powerpoint/2010/main" val="2008660851"/>
+      </p:ext>
+    </p:extLst>
+  </p:cSld>
+  <p:clrMapOvr>
+    <a:masterClrMapping/>
+  </p:clrMapOvr>
+</p:sld>
+</file>
+
+<file path=ppt/slides/slide12.xml><?xml version="1.0" encoding="utf-8"?>
+<p:sld xmlns:a="http://schemas.openxmlformats.org/drawingml/2006/main" xmlns:r="http://schemas.openxmlformats.org/officeDocument/2006/relationships" xmlns:p="http://schemas.openxmlformats.org/presentationml/2006/main">
+  <p:cSld>
+    <p:spTree>
+      <p:nvGrpSpPr>
+        <p:cNvPr id="1" name=""/>
+        <p:cNvGrpSpPr/>
+        <p:nvPr/>
+      </p:nvGrpSpPr>
+      <p:grpSpPr>
+        <a:xfrm>
+          <a:off x="0" y="0"/>
+          <a:ext cx="0" cy="0"/>
+          <a:chOff x="0" y="0"/>
+          <a:chExt cx="0" cy="0"/>
+        </a:xfrm>
+      </p:grpSpPr>
+      <p:sp>
+        <p:nvSpPr>
+          <p:cNvPr id="2" name="Title 1">
+            <a:extLst>
+              <a:ext uri="{FF2B5EF4-FFF2-40B4-BE49-F238E27FC236}">
+                <a16:creationId xmlns:a16="http://schemas.microsoft.com/office/drawing/2014/main" id="{24CCB19B-AC38-DB73-A16D-A5B25B7893A9}"/>
+              </a:ext>
+            </a:extLst>
+          </p:cNvPr>
+          <p:cNvSpPr>
+            <a:spLocks noGrp="1"/>
+          </p:cNvSpPr>
+          <p:nvPr>
+            <p:ph type="title"/>
+          </p:nvPr>
+        </p:nvSpPr>
+        <p:spPr/>
+        <p:txBody>
+          <a:bodyPr/>
+          <a:lstStyle/>
+          <a:p>
+            <a:r>
+              <a:rPr lang="en-US" dirty="0"/>
+              <a:t>Data in Neural Networks</a:t>
+            </a:r>
+          </a:p>
+        </p:txBody>
+      </p:sp>
+      <p:sp>
+        <p:nvSpPr>
+          <p:cNvPr id="3" name="Content Placeholder 2">
+            <a:extLst>
+              <a:ext uri="{FF2B5EF4-FFF2-40B4-BE49-F238E27FC236}">
+                <a16:creationId xmlns:a16="http://schemas.microsoft.com/office/drawing/2014/main" id="{51C4114D-F679-830D-CC5D-C95048043217}"/>
+              </a:ext>
+            </a:extLst>
+          </p:cNvPr>
+          <p:cNvSpPr>
+            <a:spLocks noGrp="1"/>
+          </p:cNvSpPr>
+          <p:nvPr>
+            <p:ph idx="1"/>
+          </p:nvPr>
+        </p:nvSpPr>
+        <p:spPr>
+          <a:xfrm>
+            <a:off x="1451579" y="2015732"/>
+            <a:ext cx="9603275" cy="4037749"/>
+          </a:xfrm>
+        </p:spPr>
+        <p:txBody>
+          <a:bodyPr/>
+          <a:lstStyle/>
+          <a:p>
+            <a:r>
+              <a:rPr lang="en-US" dirty="0"/>
+              <a:t>We can feed our </a:t>
+            </a:r>
+            <a:r>
+              <a:rPr lang="en-US" dirty="0" err="1"/>
+              <a:t>pytorch</a:t>
+            </a:r>
+            <a:r>
+              <a:rPr lang="en-US" dirty="0"/>
+              <a:t> models data in the same way as sklearn models. </a:t>
+            </a:r>
+          </a:p>
+          <a:p>
+            <a:pPr lvl="1"/>
+            <a:r>
+              <a:rPr lang="en-US" dirty="0"/>
+              <a:t>Targets and features are the exact same as before. </a:t>
+            </a:r>
+          </a:p>
+          <a:p>
+            <a:r>
+              <a:rPr lang="en-US" dirty="0"/>
+              <a:t>However…</a:t>
+            </a:r>
+          </a:p>
+          <a:p>
+            <a:pPr lvl="1"/>
+            <a:r>
+              <a:rPr lang="en-US" dirty="0"/>
+              <a:t>Neural networks are mainly targeted at unstructured data, while sklearn at tabular. </a:t>
+            </a:r>
+          </a:p>
+          <a:p>
+            <a:pPr lvl="1"/>
+            <a:r>
+              <a:rPr lang="en-US" dirty="0"/>
+              <a:t>We often deal with large amounts of data, maybe more than we can fit in memory. </a:t>
+            </a:r>
+          </a:p>
+          <a:p>
+            <a:pPr lvl="1"/>
+            <a:r>
+              <a:rPr lang="en-US" dirty="0"/>
+              <a:t>We usually have batches, or subsets of the data that we use one at a time. </a:t>
+            </a:r>
+          </a:p>
+          <a:p>
+            <a:pPr lvl="1"/>
+            <a:r>
+              <a:rPr lang="en-US" dirty="0"/>
+              <a:t>Preparation steps can be ‘moved around’ for performance reasons. </a:t>
+            </a:r>
+          </a:p>
+          <a:p>
+            <a:r>
+              <a:rPr lang="en-US" dirty="0"/>
+              <a:t>Managing the data in a NN model can involve much more work than we are used to. </a:t>
+            </a:r>
+          </a:p>
+        </p:txBody>
+      </p:sp>
+    </p:spTree>
+    <p:extLst>
+      <p:ext uri="{BB962C8B-B14F-4D97-AF65-F5344CB8AC3E}">
+        <p14:creationId xmlns:p14="http://schemas.microsoft.com/office/powerpoint/2010/main" val="3945427673"/>
+      </p:ext>
+    </p:extLst>
+  </p:cSld>
+  <p:clrMapOvr>
+    <a:masterClrMapping/>
+  </p:clrMapOvr>
+</p:sld>
+</file>
+
+<file path=ppt/slides/slide13.xml><?xml version="1.0" encoding="utf-8"?>
+<p:sld xmlns:a="http://schemas.openxmlformats.org/drawingml/2006/main" xmlns:r="http://schemas.openxmlformats.org/officeDocument/2006/relationships" xmlns:p="http://schemas.openxmlformats.org/presentationml/2006/main">
+  <p:cSld>
+    <p:spTree>
+      <p:nvGrpSpPr>
+        <p:cNvPr id="1" name=""/>
+        <p:cNvGrpSpPr/>
+        <p:nvPr/>
+      </p:nvGrpSpPr>
+      <p:grpSpPr>
+        <a:xfrm>
+          <a:off x="0" y="0"/>
+          <a:ext cx="0" cy="0"/>
+          <a:chOff x="0" y="0"/>
+          <a:chExt cx="0" cy="0"/>
+        </a:xfrm>
+      </p:grpSpPr>
+      <p:sp>
+        <p:nvSpPr>
+          <p:cNvPr id="2" name="Title 1">
+            <a:extLst>
+              <a:ext uri="{FF2B5EF4-FFF2-40B4-BE49-F238E27FC236}">
+                <a16:creationId xmlns:a16="http://schemas.microsoft.com/office/drawing/2014/main" id="{0AA66CD4-47EA-F69E-1B29-7A8DDCCE3F39}"/>
+              </a:ext>
+            </a:extLst>
+          </p:cNvPr>
+          <p:cNvSpPr>
+            <a:spLocks noGrp="1"/>
+          </p:cNvSpPr>
+          <p:nvPr>
+            <p:ph type="title"/>
+          </p:nvPr>
+        </p:nvSpPr>
+        <p:spPr/>
+        <p:txBody>
+          <a:bodyPr/>
+          <a:lstStyle/>
+          <a:p>
+            <a:r>
+              <a:rPr lang="en-US" dirty="0"/>
+              <a:t>Datasets for Neural Networks</a:t>
+            </a:r>
+          </a:p>
+        </p:txBody>
+      </p:sp>
+      <p:sp>
+        <p:nvSpPr>
+          <p:cNvPr id="3" name="Content Placeholder 2">
+            <a:extLst>
+              <a:ext uri="{FF2B5EF4-FFF2-40B4-BE49-F238E27FC236}">
+                <a16:creationId xmlns:a16="http://schemas.microsoft.com/office/drawing/2014/main" id="{E2F4168F-5C8C-BC5B-DBB9-5D52AE81DEAC}"/>
+              </a:ext>
+            </a:extLst>
+          </p:cNvPr>
+          <p:cNvSpPr>
+            <a:spLocks noGrp="1"/>
+          </p:cNvSpPr>
+          <p:nvPr>
+            <p:ph idx="1"/>
+          </p:nvPr>
+        </p:nvSpPr>
+        <p:spPr>
+          <a:xfrm>
+            <a:off x="1451579" y="1929468"/>
+            <a:ext cx="9603275" cy="4124013"/>
+          </a:xfrm>
+        </p:spPr>
+        <p:txBody>
+          <a:bodyPr/>
+          <a:lstStyle/>
+          <a:p>
+            <a:r>
+              <a:rPr lang="en-US" dirty="0"/>
+              <a:t>Before we feed data into our neural network we construct some helpers:</a:t>
+            </a:r>
+          </a:p>
+          <a:p>
+            <a:pPr lvl="1"/>
+            <a:r>
+              <a:rPr lang="en-US" dirty="0"/>
+              <a:t>Datasets – ‘holds’ the actual data and labels. </a:t>
+            </a:r>
+          </a:p>
+          <a:p>
+            <a:pPr lvl="1"/>
+            <a:r>
+              <a:rPr lang="en-US" dirty="0" err="1"/>
+              <a:t>Dataloaders</a:t>
+            </a:r>
+            <a:r>
+              <a:rPr lang="en-US" dirty="0"/>
+              <a:t> – manages the data loading process, doing things like batches. </a:t>
+            </a:r>
+          </a:p>
+          <a:p>
+            <a:r>
+              <a:rPr lang="en-US" dirty="0"/>
+              <a:t>Instead of handling a raw </a:t>
+            </a:r>
+            <a:r>
+              <a:rPr lang="en-US" dirty="0" err="1"/>
+              <a:t>dataframe</a:t>
+            </a:r>
+            <a:r>
+              <a:rPr lang="en-US" dirty="0"/>
+              <a:t>, we use our data to create these objects. </a:t>
+            </a:r>
+          </a:p>
+          <a:p>
+            <a:r>
+              <a:rPr lang="en-US" dirty="0"/>
+              <a:t>The ‘holding’ bit can be a little variable:</a:t>
+            </a:r>
+          </a:p>
+          <a:p>
+            <a:pPr lvl="1"/>
+            <a:r>
+              <a:rPr lang="en-US" dirty="0"/>
+              <a:t>The dataset can hold the data in memory, like we are used to. </a:t>
+            </a:r>
+          </a:p>
+          <a:p>
+            <a:pPr lvl="1"/>
+            <a:r>
+              <a:rPr lang="en-US" dirty="0"/>
+              <a:t>It doesn’t need to, and is often impossible when we have more data than memory. </a:t>
+            </a:r>
+          </a:p>
+          <a:p>
+            <a:pPr lvl="1"/>
+            <a:r>
+              <a:rPr lang="en-US" dirty="0"/>
+              <a:t>The dataset is just responsible for providing data when asked. </a:t>
+            </a:r>
+          </a:p>
+          <a:p>
+            <a:pPr lvl="1"/>
+            <a:r>
+              <a:rPr lang="en-US" dirty="0"/>
+              <a:t>That data may be saved on disk, and loaded bit by bit. </a:t>
+            </a:r>
+          </a:p>
+        </p:txBody>
+      </p:sp>
+    </p:spTree>
+    <p:extLst>
+      <p:ext uri="{BB962C8B-B14F-4D97-AF65-F5344CB8AC3E}">
+        <p14:creationId xmlns:p14="http://schemas.microsoft.com/office/powerpoint/2010/main" val="2751657622"/>
+      </p:ext>
+    </p:extLst>
+  </p:cSld>
+  <p:clrMapOvr>
+    <a:masterClrMapping/>
+  </p:clrMapOvr>
+</p:sld>
+</file>
+
+<file path=ppt/slides/slide14.xml><?xml version="1.0" encoding="utf-8"?>
+<p:sld xmlns:a="http://schemas.openxmlformats.org/drawingml/2006/main" xmlns:r="http://schemas.openxmlformats.org/officeDocument/2006/relationships" xmlns:p="http://schemas.openxmlformats.org/presentationml/2006/main">
+  <p:cSld>
+    <p:spTree>
+      <p:nvGrpSpPr>
+        <p:cNvPr id="1" name=""/>
+        <p:cNvGrpSpPr/>
+        <p:nvPr/>
+      </p:nvGrpSpPr>
+      <p:grpSpPr>
+        <a:xfrm>
+          <a:off x="0" y="0"/>
+          <a:ext cx="0" cy="0"/>
+          <a:chOff x="0" y="0"/>
+          <a:chExt cx="0" cy="0"/>
+        </a:xfrm>
+      </p:grpSpPr>
+      <p:sp>
+        <p:nvSpPr>
+          <p:cNvPr id="2" name="Title 1">
+            <a:extLst>
+              <a:ext uri="{FF2B5EF4-FFF2-40B4-BE49-F238E27FC236}">
+                <a16:creationId xmlns:a16="http://schemas.microsoft.com/office/drawing/2014/main" id="{5B489EF4-21F1-8D1C-19CC-48B885A4ECD4}"/>
+              </a:ext>
+            </a:extLst>
+          </p:cNvPr>
+          <p:cNvSpPr>
+            <a:spLocks noGrp="1"/>
+          </p:cNvSpPr>
+          <p:nvPr>
+            <p:ph type="title"/>
+          </p:nvPr>
+        </p:nvSpPr>
+        <p:spPr/>
+        <p:txBody>
+          <a:bodyPr/>
+          <a:lstStyle/>
+          <a:p>
+            <a:r>
+              <a:rPr lang="en-US" dirty="0"/>
+              <a:t>Data </a:t>
+            </a:r>
+            <a:r>
+              <a:rPr lang="en-US" dirty="0" err="1"/>
+              <a:t>Thingys</a:t>
+            </a:r>
+            <a:endParaRPr lang="en-US" dirty="0"/>
+          </a:p>
+        </p:txBody>
+      </p:sp>
+      <p:sp>
+        <p:nvSpPr>
+          <p:cNvPr id="3" name="Content Placeholder 2">
+            <a:extLst>
+              <a:ext uri="{FF2B5EF4-FFF2-40B4-BE49-F238E27FC236}">
+                <a16:creationId xmlns:a16="http://schemas.microsoft.com/office/drawing/2014/main" id="{C35893A7-E901-959E-F03D-8D56ECB57B8C}"/>
+              </a:ext>
+            </a:extLst>
+          </p:cNvPr>
+          <p:cNvSpPr>
+            <a:spLocks noGrp="1"/>
+          </p:cNvSpPr>
+          <p:nvPr>
+            <p:ph idx="1"/>
+          </p:nvPr>
+        </p:nvSpPr>
+        <p:spPr>
+          <a:xfrm>
+            <a:off x="7772400" y="1853754"/>
+            <a:ext cx="4419600" cy="4199727"/>
+          </a:xfrm>
+        </p:spPr>
+        <p:txBody>
+          <a:bodyPr>
+            <a:normAutofit lnSpcReduction="10000"/>
+          </a:bodyPr>
+          <a:lstStyle/>
+          <a:p>
+            <a:r>
+              <a:rPr lang="en-US" dirty="0"/>
+              <a:t>Datasets must provide:</a:t>
+            </a:r>
+          </a:p>
+          <a:p>
+            <a:pPr lvl="1"/>
+            <a:r>
+              <a:rPr lang="en-US" dirty="0"/>
+              <a:t>Length and get item. </a:t>
+            </a:r>
+          </a:p>
+          <a:p>
+            <a:pPr lvl="1"/>
+            <a:r>
+              <a:rPr lang="en-US" dirty="0"/>
+              <a:t>Do transformation. </a:t>
+            </a:r>
+          </a:p>
+          <a:p>
+            <a:pPr lvl="1"/>
+            <a:r>
+              <a:rPr lang="en-US" dirty="0"/>
+              <a:t>Make it a tensor. </a:t>
+            </a:r>
+          </a:p>
+          <a:p>
+            <a:r>
+              <a:rPr lang="en-US" dirty="0" err="1"/>
+              <a:t>Dataloaders</a:t>
+            </a:r>
+            <a:r>
+              <a:rPr lang="en-US" dirty="0"/>
+              <a:t> manage:</a:t>
+            </a:r>
+          </a:p>
+          <a:p>
+            <a:pPr lvl="1"/>
+            <a:r>
+              <a:rPr lang="en-US" dirty="0"/>
+              <a:t>Packaging items into batches. </a:t>
+            </a:r>
+          </a:p>
+          <a:p>
+            <a:r>
+              <a:rPr lang="en-US" dirty="0"/>
+              <a:t>Datasets are often custom. </a:t>
+            </a:r>
+          </a:p>
+          <a:p>
+            <a:pPr lvl="1"/>
+            <a:r>
+              <a:rPr lang="en-US" dirty="0"/>
+              <a:t>Loaders can be, but less required. </a:t>
+            </a:r>
+          </a:p>
+          <a:p>
+            <a:r>
+              <a:rPr lang="en-US" dirty="0"/>
+              <a:t>Each data item is separate, they aren’t remixed like in CV. </a:t>
+            </a:r>
+          </a:p>
+        </p:txBody>
+      </p:sp>
+      <p:pic>
+        <p:nvPicPr>
+          <p:cNvPr id="4" name="Picture 3" descr="Taking Datasets, DataLoaders, and PyTorch's New DataPipes for a Spin |  Sebastian Raschka, PhD">
+            <a:extLst>
+              <a:ext uri="{FF2B5EF4-FFF2-40B4-BE49-F238E27FC236}">
+                <a16:creationId xmlns:a16="http://schemas.microsoft.com/office/drawing/2014/main" id="{BD3E3A58-E4D6-912D-FEB3-611DFEA0F4F3}"/>
+              </a:ext>
+            </a:extLst>
+          </p:cNvPr>
+          <p:cNvPicPr>
+            <a:picLocks noChangeAspect="1"/>
+          </p:cNvPicPr>
+          <p:nvPr/>
+        </p:nvPicPr>
+        <p:blipFill>
+          <a:blip r:embed="rId2"/>
+          <a:stretch>
+            <a:fillRect/>
+          </a:stretch>
+        </p:blipFill>
+        <p:spPr>
+          <a:xfrm>
+            <a:off x="0" y="1853754"/>
+            <a:ext cx="7772400" cy="4034117"/>
+          </a:xfrm>
+          <a:prstGeom prst="rect">
+            <a:avLst/>
+          </a:prstGeom>
+        </p:spPr>
+      </p:pic>
+    </p:spTree>
+    <p:extLst>
+      <p:ext uri="{BB962C8B-B14F-4D97-AF65-F5344CB8AC3E}">
+        <p14:creationId xmlns:p14="http://schemas.microsoft.com/office/powerpoint/2010/main" val="4272701643"/>
+      </p:ext>
+    </p:extLst>
+  </p:cSld>
+  <p:clrMapOvr>
+    <a:masterClrMapping/>
+  </p:clrMapOvr>
+</p:sld>
+</file>
+
+<file path=ppt/slides/slide15.xml><?xml version="1.0" encoding="utf-8"?>
+<p:sld xmlns:a="http://schemas.openxmlformats.org/drawingml/2006/main" xmlns:r="http://schemas.openxmlformats.org/officeDocument/2006/relationships" xmlns:p="http://schemas.openxmlformats.org/presentationml/2006/main">
+  <p:cSld>
+    <p:spTree>
+      <p:nvGrpSpPr>
+        <p:cNvPr id="1" name=""/>
+        <p:cNvGrpSpPr/>
+        <p:nvPr/>
+      </p:nvGrpSpPr>
+      <p:grpSpPr>
+        <a:xfrm>
+          <a:off x="0" y="0"/>
+          <a:ext cx="0" cy="0"/>
+          <a:chOff x="0" y="0"/>
+          <a:chExt cx="0" cy="0"/>
+        </a:xfrm>
+      </p:grpSpPr>
+      <p:sp>
+        <p:nvSpPr>
+          <p:cNvPr id="2" name="Title 1">
+            <a:extLst>
+              <a:ext uri="{FF2B5EF4-FFF2-40B4-BE49-F238E27FC236}">
+                <a16:creationId xmlns:a16="http://schemas.microsoft.com/office/drawing/2014/main" id="{8F7B8909-3774-0839-1DF2-8877CABE9F8D}"/>
+              </a:ext>
+            </a:extLst>
+          </p:cNvPr>
+          <p:cNvSpPr>
+            <a:spLocks noGrp="1"/>
+          </p:cNvSpPr>
+          <p:nvPr>
+            <p:ph type="title"/>
+          </p:nvPr>
+        </p:nvSpPr>
+        <p:spPr/>
+        <p:txBody>
+          <a:bodyPr/>
+          <a:lstStyle/>
+          <a:p>
+            <a:r>
+              <a:rPr lang="en-US" dirty="0"/>
+              <a:t>Datasets</a:t>
+            </a:r>
+          </a:p>
+        </p:txBody>
+      </p:sp>
+      <p:sp>
+        <p:nvSpPr>
+          <p:cNvPr id="3" name="Content Placeholder 2">
+            <a:extLst>
+              <a:ext uri="{FF2B5EF4-FFF2-40B4-BE49-F238E27FC236}">
+                <a16:creationId xmlns:a16="http://schemas.microsoft.com/office/drawing/2014/main" id="{F85FE1AF-B80B-772B-4432-B942257D9AE8}"/>
+              </a:ext>
+            </a:extLst>
+          </p:cNvPr>
+          <p:cNvSpPr>
+            <a:spLocks noGrp="1"/>
+          </p:cNvSpPr>
+          <p:nvPr>
+            <p:ph idx="1"/>
+          </p:nvPr>
+        </p:nvSpPr>
+        <p:spPr>
+          <a:xfrm>
+            <a:off x="1451579" y="1921079"/>
+            <a:ext cx="9603275" cy="4132401"/>
+          </a:xfrm>
+        </p:spPr>
+        <p:txBody>
+          <a:bodyPr/>
+          <a:lstStyle/>
+          <a:p>
+            <a:r>
+              <a:rPr lang="en-US" dirty="0"/>
+              <a:t>Datasets have 3 mandatory parts:</a:t>
+            </a:r>
+          </a:p>
+          <a:p>
+            <a:pPr lvl="1"/>
+            <a:r>
+              <a:rPr lang="en-US" dirty="0"/>
+              <a:t>Len – returns the number of items in the dataset. </a:t>
+            </a:r>
+          </a:p>
+          <a:p>
+            <a:pPr lvl="1"/>
+            <a:r>
+              <a:rPr lang="en-US" dirty="0"/>
+              <a:t>Init – sets up the data initially – pass in the data or aim at the location of data. </a:t>
+            </a:r>
+          </a:p>
+          <a:p>
+            <a:pPr lvl="1"/>
+            <a:r>
+              <a:rPr lang="en-US" dirty="0" err="1"/>
+              <a:t>Getitem</a:t>
+            </a:r>
+            <a:r>
+              <a:rPr lang="en-US" dirty="0"/>
+              <a:t> – returns an item from the dataset. </a:t>
+            </a:r>
+          </a:p>
+          <a:p>
+            <a:r>
+              <a:rPr lang="en-US" dirty="0"/>
+              <a:t>In a dataset we don’t look at the entire data and address/select specific items. </a:t>
+            </a:r>
+          </a:p>
+          <a:p>
+            <a:pPr lvl="1"/>
+            <a:r>
+              <a:rPr lang="en-US" dirty="0"/>
+              <a:t>If we want data, we need to request a sample, then manipulate that. </a:t>
+            </a:r>
+          </a:p>
+          <a:p>
+            <a:r>
+              <a:rPr lang="en-US" dirty="0"/>
+              <a:t>For built-in/public datasets, we generally can use the dataset time they’ve made. </a:t>
+            </a:r>
+          </a:p>
+          <a:p>
+            <a:r>
+              <a:rPr lang="en-US" dirty="0"/>
+              <a:t>We can also build in preparation steps such as transformations. </a:t>
+            </a:r>
+          </a:p>
+          <a:p>
+            <a:pPr lvl="1"/>
+            <a:r>
+              <a:rPr lang="en-US" dirty="0"/>
+              <a:t>With more complex data, this can be a big step. </a:t>
+            </a:r>
+          </a:p>
+        </p:txBody>
+      </p:sp>
+    </p:spTree>
+    <p:extLst>
+      <p:ext uri="{BB962C8B-B14F-4D97-AF65-F5344CB8AC3E}">
+        <p14:creationId xmlns:p14="http://schemas.microsoft.com/office/powerpoint/2010/main" val="3883359744"/>
+      </p:ext>
+    </p:extLst>
+  </p:cSld>
+  <p:clrMapOvr>
+    <a:masterClrMapping/>
+  </p:clrMapOvr>
+</p:sld>
+</file>
+
+<file path=ppt/slides/slide16.xml><?xml version="1.0" encoding="utf-8"?>
+<p:sld xmlns:a="http://schemas.openxmlformats.org/drawingml/2006/main" xmlns:r="http://schemas.openxmlformats.org/officeDocument/2006/relationships" xmlns:p="http://schemas.openxmlformats.org/presentationml/2006/main">
+  <p:cSld>
+    <p:spTree>
+      <p:nvGrpSpPr>
+        <p:cNvPr id="1" name=""/>
+        <p:cNvGrpSpPr/>
+        <p:nvPr/>
+      </p:nvGrpSpPr>
+      <p:grpSpPr>
+        <a:xfrm>
+          <a:off x="0" y="0"/>
+          <a:ext cx="0" cy="0"/>
+          <a:chOff x="0" y="0"/>
+          <a:chExt cx="0" cy="0"/>
+        </a:xfrm>
+      </p:grpSpPr>
+      <p:sp>
+        <p:nvSpPr>
+          <p:cNvPr id="2" name="Title 1">
+            <a:extLst>
+              <a:ext uri="{FF2B5EF4-FFF2-40B4-BE49-F238E27FC236}">
+                <a16:creationId xmlns:a16="http://schemas.microsoft.com/office/drawing/2014/main" id="{C789CAEF-4AB1-8375-85A5-BFCAFED61F65}"/>
+              </a:ext>
+            </a:extLst>
+          </p:cNvPr>
+          <p:cNvSpPr>
+            <a:spLocks noGrp="1"/>
+          </p:cNvSpPr>
+          <p:nvPr>
+            <p:ph type="title"/>
+          </p:nvPr>
+        </p:nvSpPr>
+        <p:spPr/>
+        <p:txBody>
+          <a:bodyPr/>
+          <a:lstStyle/>
+          <a:p>
+            <a:r>
+              <a:rPr lang="en-US" dirty="0"/>
+              <a:t>Out OF memory</a:t>
+            </a:r>
+          </a:p>
+        </p:txBody>
+      </p:sp>
+      <p:sp>
+        <p:nvSpPr>
+          <p:cNvPr id="3" name="Content Placeholder 2">
+            <a:extLst>
+              <a:ext uri="{FF2B5EF4-FFF2-40B4-BE49-F238E27FC236}">
+                <a16:creationId xmlns:a16="http://schemas.microsoft.com/office/drawing/2014/main" id="{BB7FBA6D-69A3-3289-7006-8D41CF324D70}"/>
+              </a:ext>
+            </a:extLst>
+          </p:cNvPr>
+          <p:cNvSpPr>
+            <a:spLocks noGrp="1"/>
+          </p:cNvSpPr>
+          <p:nvPr>
+            <p:ph idx="1"/>
+          </p:nvPr>
+        </p:nvSpPr>
+        <p:spPr>
+          <a:xfrm>
+            <a:off x="1019503" y="1853754"/>
+            <a:ext cx="6867197" cy="4199727"/>
+          </a:xfrm>
+        </p:spPr>
+        <p:txBody>
+          <a:bodyPr/>
+          <a:lstStyle/>
+          <a:p>
+            <a:r>
+              <a:rPr lang="en-US" dirty="0"/>
+              <a:t>Datasets allow for us to handle data out of memory. </a:t>
+            </a:r>
+          </a:p>
+          <a:p>
+            <a:pPr lvl="1"/>
+            <a:r>
+              <a:rPr lang="en-US" dirty="0"/>
+              <a:t>E.g. more data than we have RAM. </a:t>
+            </a:r>
+          </a:p>
+          <a:p>
+            <a:r>
+              <a:rPr lang="en-US" dirty="0"/>
+              <a:t>With a </a:t>
+            </a:r>
+            <a:r>
+              <a:rPr lang="en-US" dirty="0" err="1"/>
+              <a:t>df</a:t>
+            </a:r>
+            <a:r>
+              <a:rPr lang="en-US" dirty="0"/>
+              <a:t>, we load the </a:t>
+            </a:r>
+            <a:r>
+              <a:rPr lang="en-US" dirty="0" err="1"/>
+              <a:t>df</a:t>
+            </a:r>
+            <a:r>
+              <a:rPr lang="en-US" dirty="0"/>
+              <a:t>, it is all in memory. </a:t>
+            </a:r>
+          </a:p>
+          <a:p>
+            <a:r>
+              <a:rPr lang="en-US" dirty="0"/>
+              <a:t>With a dataset, we only load a batch (or so), rest is on disk. </a:t>
+            </a:r>
+          </a:p>
+          <a:p>
+            <a:r>
+              <a:rPr lang="en-US" dirty="0"/>
+              <a:t>Key differences:</a:t>
+            </a:r>
+          </a:p>
+          <a:p>
+            <a:pPr lvl="1"/>
+            <a:r>
+              <a:rPr lang="en-US" dirty="0"/>
+              <a:t>Dataset can be any size, since only a </a:t>
+            </a:r>
+            <a:r>
+              <a:rPr lang="en-US" dirty="0" err="1"/>
+              <a:t>protion</a:t>
+            </a:r>
+            <a:r>
+              <a:rPr lang="en-US" dirty="0"/>
+              <a:t> is used at a time. </a:t>
+            </a:r>
+          </a:p>
+          <a:p>
+            <a:pPr lvl="1"/>
+            <a:r>
+              <a:rPr lang="en-US" dirty="0"/>
+              <a:t>Access speed differs – the batch in mem is fast, rest is slow. </a:t>
+            </a:r>
+          </a:p>
+          <a:p>
+            <a:pPr lvl="1"/>
+            <a:r>
+              <a:rPr lang="en-US" dirty="0"/>
+              <a:t>From perspective of model, it just sees data – as normal. </a:t>
+            </a:r>
+          </a:p>
+          <a:p>
+            <a:r>
+              <a:rPr lang="en-US" dirty="0"/>
+              <a:t>How to access disk data is on us. </a:t>
+            </a:r>
+          </a:p>
+        </p:txBody>
+      </p:sp>
+      <p:pic>
+        <p:nvPicPr>
+          <p:cNvPr id="4" name="Picture 3" descr="A guide on good usage of non_blocking and pin_memory() in PyTorch — PyTorch  Tutorials 2.11.0+cu130 documentation">
+            <a:extLst>
+              <a:ext uri="{FF2B5EF4-FFF2-40B4-BE49-F238E27FC236}">
+                <a16:creationId xmlns:a16="http://schemas.microsoft.com/office/drawing/2014/main" id="{073611F0-0708-ED02-7DA6-36ABABDBE2E6}"/>
+              </a:ext>
+            </a:extLst>
+          </p:cNvPr>
+          <p:cNvPicPr>
+            <a:picLocks noChangeAspect="1"/>
+          </p:cNvPicPr>
+          <p:nvPr/>
+        </p:nvPicPr>
+        <p:blipFill>
+          <a:blip r:embed="rId2"/>
+          <a:stretch>
+            <a:fillRect/>
+          </a:stretch>
+        </p:blipFill>
+        <p:spPr>
+          <a:xfrm>
+            <a:off x="7886700" y="1161716"/>
+            <a:ext cx="4305300" cy="4775200"/>
+          </a:xfrm>
+          <a:prstGeom prst="rect">
+            <a:avLst/>
+          </a:prstGeom>
+        </p:spPr>
+      </p:pic>
+    </p:spTree>
+    <p:extLst>
+      <p:ext uri="{BB962C8B-B14F-4D97-AF65-F5344CB8AC3E}">
+        <p14:creationId xmlns:p14="http://schemas.microsoft.com/office/powerpoint/2010/main" val="397638002"/>
+      </p:ext>
+    </p:extLst>
+  </p:cSld>
+  <p:clrMapOvr>
+    <a:masterClrMapping/>
+  </p:clrMapOvr>
+</p:sld>
+</file>
+
+<file path=ppt/slides/slide17.xml><?xml version="1.0" encoding="utf-8"?>
+<p:sld xmlns:a="http://schemas.openxmlformats.org/drawingml/2006/main" xmlns:r="http://schemas.openxmlformats.org/officeDocument/2006/relationships" xmlns:p="http://schemas.openxmlformats.org/presentationml/2006/main">
+  <p:cSld>
+    <p:spTree>
+      <p:nvGrpSpPr>
+        <p:cNvPr id="1" name=""/>
+        <p:cNvGrpSpPr/>
+        <p:nvPr/>
+      </p:nvGrpSpPr>
+      <p:grpSpPr>
+        <a:xfrm>
+          <a:off x="0" y="0"/>
+          <a:ext cx="0" cy="0"/>
+          <a:chOff x="0" y="0"/>
+          <a:chExt cx="0" cy="0"/>
+        </a:xfrm>
+      </p:grpSpPr>
+      <p:sp>
+        <p:nvSpPr>
+          <p:cNvPr id="2" name="Title 1">
+            <a:extLst>
+              <a:ext uri="{FF2B5EF4-FFF2-40B4-BE49-F238E27FC236}">
+                <a16:creationId xmlns:a16="http://schemas.microsoft.com/office/drawing/2014/main" id="{98EDF7BC-8DDF-D555-337E-001600910EC5}"/>
+              </a:ext>
+            </a:extLst>
+          </p:cNvPr>
+          <p:cNvSpPr>
+            <a:spLocks noGrp="1"/>
+          </p:cNvSpPr>
+          <p:nvPr>
+            <p:ph type="title"/>
+          </p:nvPr>
+        </p:nvSpPr>
+        <p:spPr/>
+        <p:txBody>
+          <a:bodyPr/>
+          <a:lstStyle/>
+          <a:p>
+            <a:r>
+              <a:rPr lang="en-US" dirty="0" err="1"/>
+              <a:t>Dataloaders</a:t>
+            </a:r>
+            <a:endParaRPr lang="en-US" dirty="0"/>
+          </a:p>
+        </p:txBody>
+      </p:sp>
+      <p:sp>
+        <p:nvSpPr>
+          <p:cNvPr id="3" name="Content Placeholder 2">
+            <a:extLst>
+              <a:ext uri="{FF2B5EF4-FFF2-40B4-BE49-F238E27FC236}">
+                <a16:creationId xmlns:a16="http://schemas.microsoft.com/office/drawing/2014/main" id="{881ABB9A-491D-31F7-7C03-3891D012967B}"/>
+              </a:ext>
+            </a:extLst>
+          </p:cNvPr>
+          <p:cNvSpPr>
+            <a:spLocks noGrp="1"/>
+          </p:cNvSpPr>
+          <p:nvPr>
+            <p:ph idx="1"/>
+          </p:nvPr>
+        </p:nvSpPr>
+        <p:spPr>
+          <a:xfrm>
+            <a:off x="1451579" y="1963024"/>
+            <a:ext cx="9603275" cy="3942826"/>
+          </a:xfrm>
+        </p:spPr>
+        <p:txBody>
+          <a:bodyPr/>
+          <a:lstStyle/>
+          <a:p>
+            <a:r>
+              <a:rPr lang="en-US" dirty="0"/>
+              <a:t>The </a:t>
+            </a:r>
+            <a:r>
+              <a:rPr lang="en-US" dirty="0" err="1"/>
+              <a:t>dataloader</a:t>
+            </a:r>
+            <a:r>
+              <a:rPr lang="en-US" dirty="0"/>
+              <a:t> takes in the dataset and provides data in a model friendly way. </a:t>
+            </a:r>
+          </a:p>
+          <a:p>
+            <a:r>
+              <a:rPr lang="en-US" dirty="0"/>
+              <a:t>A dataset provides one item at a time with </a:t>
+            </a:r>
+            <a:r>
+              <a:rPr lang="en-US" dirty="0" err="1"/>
+              <a:t>getitem</a:t>
+            </a:r>
+            <a:r>
+              <a:rPr lang="en-US" dirty="0"/>
+              <a:t>. </a:t>
+            </a:r>
+          </a:p>
+          <a:p>
+            <a:pPr lvl="1"/>
+            <a:r>
+              <a:rPr lang="en-US" dirty="0"/>
+              <a:t>The </a:t>
+            </a:r>
+            <a:r>
+              <a:rPr lang="en-US" dirty="0" err="1"/>
+              <a:t>dataloader</a:t>
+            </a:r>
+            <a:r>
+              <a:rPr lang="en-US" dirty="0"/>
+              <a:t> can be set to provide one batch at a time. </a:t>
+            </a:r>
+          </a:p>
+          <a:p>
+            <a:pPr lvl="1"/>
+            <a:r>
+              <a:rPr lang="en-US" dirty="0"/>
+              <a:t>We can also tell it to do things like shuffle the data. </a:t>
+            </a:r>
+          </a:p>
+          <a:p>
+            <a:r>
+              <a:rPr lang="en-US" dirty="0"/>
+              <a:t>There are several other things we can do, mostly related to performance. </a:t>
+            </a:r>
+          </a:p>
+          <a:p>
+            <a:r>
+              <a:rPr lang="en-US" dirty="0"/>
+              <a:t>The </a:t>
+            </a:r>
+            <a:r>
+              <a:rPr lang="en-US" dirty="0" err="1"/>
+              <a:t>dataloader</a:t>
+            </a:r>
+            <a:r>
+              <a:rPr lang="en-US" dirty="0"/>
+              <a:t> is provided to the model to train. </a:t>
+            </a:r>
+          </a:p>
+          <a:p>
+            <a:pPr lvl="1"/>
+            <a:r>
+              <a:rPr lang="en-US" dirty="0"/>
+              <a:t>It will provide a batch of data at a time to the training loop. </a:t>
+            </a:r>
+          </a:p>
+          <a:p>
+            <a:pPr lvl="1"/>
+            <a:r>
+              <a:rPr lang="en-US" dirty="0"/>
+              <a:t>The </a:t>
+            </a:r>
+            <a:r>
+              <a:rPr lang="en-US" dirty="0" err="1"/>
+              <a:t>dataloader</a:t>
+            </a:r>
+            <a:r>
+              <a:rPr lang="en-US" dirty="0"/>
+              <a:t> is a middle-man between dataset and model, they don’t interact. </a:t>
+            </a:r>
+          </a:p>
+        </p:txBody>
+      </p:sp>
+    </p:spTree>
+    <p:extLst>
+      <p:ext uri="{BB962C8B-B14F-4D97-AF65-F5344CB8AC3E}">
+        <p14:creationId xmlns:p14="http://schemas.microsoft.com/office/powerpoint/2010/main" val="3486626440"/>
+      </p:ext>
+    </p:extLst>
+  </p:cSld>
+  <p:clrMapOvr>
+    <a:masterClrMapping/>
+  </p:clrMapOvr>
+</p:sld>
+</file>
+
+<file path=ppt/slides/slide18.xml><?xml version="1.0" encoding="utf-8"?>
+<p:sld xmlns:a="http://schemas.openxmlformats.org/drawingml/2006/main" xmlns:r="http://schemas.openxmlformats.org/officeDocument/2006/relationships" xmlns:p="http://schemas.openxmlformats.org/presentationml/2006/main">
+  <p:cSld>
+    <p:spTree>
+      <p:nvGrpSpPr>
+        <p:cNvPr id="1" name=""/>
+        <p:cNvGrpSpPr/>
+        <p:nvPr/>
+      </p:nvGrpSpPr>
+      <p:grpSpPr>
+        <a:xfrm>
+          <a:off x="0" y="0"/>
+          <a:ext cx="0" cy="0"/>
+          <a:chOff x="0" y="0"/>
+          <a:chExt cx="0" cy="0"/>
+        </a:xfrm>
+      </p:grpSpPr>
+      <p:sp>
+        <p:nvSpPr>
+          <p:cNvPr id="2" name="Title 1">
+            <a:extLst>
+              <a:ext uri="{FF2B5EF4-FFF2-40B4-BE49-F238E27FC236}">
+                <a16:creationId xmlns:a16="http://schemas.microsoft.com/office/drawing/2014/main" id="{0F70A6B3-2007-4839-5F43-6DDB22137C78}"/>
+              </a:ext>
+            </a:extLst>
+          </p:cNvPr>
+          <p:cNvSpPr>
+            <a:spLocks noGrp="1"/>
+          </p:cNvSpPr>
+          <p:nvPr>
+            <p:ph type="title"/>
+          </p:nvPr>
+        </p:nvSpPr>
+        <p:spPr/>
+        <p:txBody>
+          <a:bodyPr/>
+          <a:lstStyle/>
+          <a:p>
+            <a:r>
+              <a:rPr lang="en-US" dirty="0"/>
+              <a:t>Get a Load of this Data!</a:t>
+            </a:r>
+          </a:p>
+        </p:txBody>
+      </p:sp>
+      <p:sp>
+        <p:nvSpPr>
+          <p:cNvPr id="3" name="Content Placeholder 2">
+            <a:extLst>
+              <a:ext uri="{FF2B5EF4-FFF2-40B4-BE49-F238E27FC236}">
+                <a16:creationId xmlns:a16="http://schemas.microsoft.com/office/drawing/2014/main" id="{D415E3B6-A8F6-CA64-3527-20F9389E94EF}"/>
+              </a:ext>
+            </a:extLst>
+          </p:cNvPr>
+          <p:cNvSpPr>
+            <a:spLocks noGrp="1"/>
+          </p:cNvSpPr>
+          <p:nvPr>
+            <p:ph idx="1"/>
+          </p:nvPr>
+        </p:nvSpPr>
+        <p:spPr>
+          <a:xfrm>
+            <a:off x="6189852" y="1853753"/>
+            <a:ext cx="6002148" cy="4199727"/>
+          </a:xfrm>
+        </p:spPr>
+        <p:txBody>
+          <a:bodyPr>
+            <a:normAutofit/>
+          </a:bodyPr>
+          <a:lstStyle/>
+          <a:p>
+            <a:r>
+              <a:rPr lang="en-US" dirty="0" err="1"/>
+              <a:t>Dataloaders</a:t>
+            </a:r>
+            <a:r>
+              <a:rPr lang="en-US" dirty="0"/>
+              <a:t> manage the “get the data ready for a model” part of the pipeline. </a:t>
+            </a:r>
+          </a:p>
+          <a:p>
+            <a:pPr lvl="1"/>
+            <a:r>
+              <a:rPr lang="en-US" dirty="0"/>
+              <a:t>Uses its dataset to get data, combines with other settings. </a:t>
+            </a:r>
+          </a:p>
+          <a:p>
+            <a:r>
+              <a:rPr lang="en-US" dirty="0"/>
+              <a:t>Batching – set size, each ask for data gets a batch. </a:t>
+            </a:r>
+          </a:p>
+          <a:p>
+            <a:r>
+              <a:rPr lang="en-US" dirty="0"/>
+              <a:t>Shuffle – we normally want to shuffle training data. </a:t>
+            </a:r>
+          </a:p>
+          <a:p>
+            <a:r>
+              <a:rPr lang="en-US" dirty="0"/>
+              <a:t>Num workers – allow for parallel processes. </a:t>
+            </a:r>
+          </a:p>
+          <a:p>
+            <a:r>
+              <a:rPr lang="en-US" dirty="0"/>
+              <a:t>Pin memory – forces loader into special “non-paging” memory area that allows for faster data transfer. </a:t>
+            </a:r>
+          </a:p>
+        </p:txBody>
+      </p:sp>
+      <p:pic>
+        <p:nvPicPr>
+          <p:cNvPr id="4" name="Picture 3" descr="dataloader in deep-learning">
+            <a:extLst>
+              <a:ext uri="{FF2B5EF4-FFF2-40B4-BE49-F238E27FC236}">
+                <a16:creationId xmlns:a16="http://schemas.microsoft.com/office/drawing/2014/main" id="{E65CB1AD-8028-A634-0C14-BDC535FFEEFB}"/>
+              </a:ext>
+            </a:extLst>
+          </p:cNvPr>
+          <p:cNvPicPr>
+            <a:picLocks noChangeAspect="1"/>
+          </p:cNvPicPr>
+          <p:nvPr/>
+        </p:nvPicPr>
+        <p:blipFill>
+          <a:blip r:embed="rId2"/>
+          <a:stretch>
+            <a:fillRect/>
+          </a:stretch>
+        </p:blipFill>
+        <p:spPr>
+          <a:xfrm>
+            <a:off x="0" y="1828002"/>
+            <a:ext cx="6189852" cy="1660692"/>
+          </a:xfrm>
+          <a:prstGeom prst="rect">
+            <a:avLst/>
+          </a:prstGeom>
+        </p:spPr>
+      </p:pic>
+      <p:pic>
+        <p:nvPicPr>
+          <p:cNvPr id="5" name="Picture 4" descr="PyTorch Dataset and DataLoader: Theory, Concepts, and Workflow | by Alok  Choudhary | Towards AI">
+            <a:extLst>
+              <a:ext uri="{FF2B5EF4-FFF2-40B4-BE49-F238E27FC236}">
+                <a16:creationId xmlns:a16="http://schemas.microsoft.com/office/drawing/2014/main" id="{FCE314EA-9F13-DA56-C512-1E97B31DF37D}"/>
+              </a:ext>
+            </a:extLst>
+          </p:cNvPr>
+          <p:cNvPicPr>
+            <a:picLocks noChangeAspect="1"/>
+          </p:cNvPicPr>
+          <p:nvPr/>
+        </p:nvPicPr>
+        <p:blipFill>
+          <a:blip r:embed="rId3"/>
+          <a:stretch>
+            <a:fillRect/>
+          </a:stretch>
+        </p:blipFill>
+        <p:spPr>
+          <a:xfrm>
+            <a:off x="0" y="3488694"/>
+            <a:ext cx="5350042" cy="2330711"/>
+          </a:xfrm>
+          <a:prstGeom prst="rect">
+            <a:avLst/>
+          </a:prstGeom>
+        </p:spPr>
+      </p:pic>
+    </p:spTree>
+    <p:extLst>
+      <p:ext uri="{BB962C8B-B14F-4D97-AF65-F5344CB8AC3E}">
+        <p14:creationId xmlns:p14="http://schemas.microsoft.com/office/powerpoint/2010/main" val="1839931894"/>
+      </p:ext>
+    </p:extLst>
+  </p:cSld>
+  <p:clrMapOvr>
+    <a:masterClrMapping/>
+  </p:clrMapOvr>
+</p:sld>
+</file>
+
+<file path=ppt/slides/slide19.xml><?xml version="1.0" encoding="utf-8"?>
+<p:sld xmlns:a="http://schemas.openxmlformats.org/drawingml/2006/main" xmlns:r="http://schemas.openxmlformats.org/officeDocument/2006/relationships" xmlns:p="http://schemas.openxmlformats.org/presentationml/2006/main">
+  <p:cSld>
+    <p:spTree>
+      <p:nvGrpSpPr>
+        <p:cNvPr id="1" name=""/>
+        <p:cNvGrpSpPr/>
+        <p:nvPr/>
+      </p:nvGrpSpPr>
+      <p:grpSpPr>
+        <a:xfrm>
+          <a:off x="0" y="0"/>
+          <a:ext cx="0" cy="0"/>
+          <a:chOff x="0" y="0"/>
+          <a:chExt cx="0" cy="0"/>
+        </a:xfrm>
+      </p:grpSpPr>
+      <p:sp>
+        <p:nvSpPr>
+          <p:cNvPr id="2" name="Title 1">
+            <a:extLst>
+              <a:ext uri="{FF2B5EF4-FFF2-40B4-BE49-F238E27FC236}">
+                <a16:creationId xmlns:a16="http://schemas.microsoft.com/office/drawing/2014/main" id="{DB482396-8384-ED85-4C18-8048146BDBCB}"/>
+              </a:ext>
+            </a:extLst>
+          </p:cNvPr>
+          <p:cNvSpPr>
+            <a:spLocks noGrp="1"/>
+          </p:cNvSpPr>
+          <p:nvPr>
+            <p:ph type="title"/>
+          </p:nvPr>
+        </p:nvSpPr>
+        <p:spPr/>
+        <p:txBody>
+          <a:bodyPr/>
+          <a:lstStyle/>
+          <a:p>
+            <a:r>
+              <a:rPr lang="en-US" dirty="0"/>
+              <a:t>Data Preparation</a:t>
+            </a:r>
+          </a:p>
+        </p:txBody>
+      </p:sp>
+      <p:sp>
+        <p:nvSpPr>
+          <p:cNvPr id="3" name="Content Placeholder 2">
+            <a:extLst>
+              <a:ext uri="{FF2B5EF4-FFF2-40B4-BE49-F238E27FC236}">
+                <a16:creationId xmlns:a16="http://schemas.microsoft.com/office/drawing/2014/main" id="{F8F8318B-4877-68DD-C58D-4BB94881007B}"/>
+              </a:ext>
+            </a:extLst>
+          </p:cNvPr>
+          <p:cNvSpPr>
+            <a:spLocks noGrp="1"/>
+          </p:cNvSpPr>
+          <p:nvPr>
+            <p:ph idx="1"/>
+          </p:nvPr>
+        </p:nvSpPr>
+        <p:spPr/>
+        <p:txBody>
+          <a:bodyPr/>
+          <a:lstStyle/>
+          <a:p>
+            <a:endParaRPr lang="en-US"/>
+          </a:p>
+        </p:txBody>
+      </p:sp>
+    </p:spTree>
+    <p:extLst>
+      <p:ext uri="{BB962C8B-B14F-4D97-AF65-F5344CB8AC3E}">
+        <p14:creationId xmlns:p14="http://schemas.microsoft.com/office/powerpoint/2010/main" val="4225149003"/>
+      </p:ext>
+    </p:extLst>
+  </p:cSld>
+  <p:clrMapOvr>
+    <a:masterClrMapping/>
+  </p:clrMapOvr>
+</p:sld>
+</file>
+
+<file path=ppt/slides/slide2.xml><?xml version="1.0" encoding="utf-8"?>
+<p:sld xmlns:a="http://schemas.openxmlformats.org/drawingml/2006/main" xmlns:r="http://schemas.openxmlformats.org/officeDocument/2006/relationships" xmlns:p="http://schemas.openxmlformats.org/presentationml/2006/main">
+  <p:cSld>
+    <p:spTree>
+      <p:nvGrpSpPr>
+        <p:cNvPr id="1" name=""/>
+        <p:cNvGrpSpPr/>
+        <p:nvPr/>
+      </p:nvGrpSpPr>
+      <p:grpSpPr>
+        <a:xfrm>
+          <a:off x="0" y="0"/>
+          <a:ext cx="0" cy="0"/>
+          <a:chOff x="0" y="0"/>
+          <a:chExt cx="0" cy="0"/>
+        </a:xfrm>
+      </p:grpSpPr>
+      <p:sp>
+        <p:nvSpPr>
+          <p:cNvPr id="2" name="Title 1">
+            <a:extLst>
+              <a:ext uri="{FF2B5EF4-FFF2-40B4-BE49-F238E27FC236}">
+                <a16:creationId xmlns:a16="http://schemas.microsoft.com/office/drawing/2014/main" id="{6E94FE75-CDF8-8409-E665-03B5C89F431A}"/>
+              </a:ext>
+            </a:extLst>
+          </p:cNvPr>
+          <p:cNvSpPr>
+            <a:spLocks noGrp="1"/>
+          </p:cNvSpPr>
+          <p:nvPr>
+            <p:ph type="title"/>
+          </p:nvPr>
+        </p:nvSpPr>
+        <p:spPr/>
+        <p:txBody>
+          <a:bodyPr/>
+          <a:lstStyle/>
+          <a:p>
+            <a:r>
+              <a:rPr lang="en-US" dirty="0"/>
+              <a:t>Fun Project Idea!</a:t>
+            </a:r>
+          </a:p>
+        </p:txBody>
+      </p:sp>
+      <p:sp>
+        <p:nvSpPr>
+          <p:cNvPr id="3" name="Content Placeholder 2">
+            <a:extLst>
+              <a:ext uri="{FF2B5EF4-FFF2-40B4-BE49-F238E27FC236}">
+                <a16:creationId xmlns:a16="http://schemas.microsoft.com/office/drawing/2014/main" id="{C53C85BE-7A01-98D8-39CA-C251B16A8B13}"/>
+              </a:ext>
+            </a:extLst>
+          </p:cNvPr>
+          <p:cNvSpPr>
+            <a:spLocks noGrp="1"/>
+          </p:cNvSpPr>
+          <p:nvPr>
+            <p:ph idx="1"/>
+          </p:nvPr>
+        </p:nvSpPr>
+        <p:spPr>
+          <a:xfrm>
+            <a:off x="1219201" y="1933903"/>
+            <a:ext cx="9835654" cy="4119577"/>
+          </a:xfrm>
+        </p:spPr>
+        <p:txBody>
+          <a:bodyPr/>
+          <a:lstStyle/>
+          <a:p>
+            <a:r>
+              <a:rPr lang="en-US" dirty="0"/>
+              <a:t>For the real estate thing, you have image URLs. </a:t>
+            </a:r>
+          </a:p>
+          <a:p>
+            <a:r>
+              <a:rPr lang="en-US" dirty="0"/>
+              <a:t>Grab the images, create a dataset to process and prepare them, and use them as some features to make a model. </a:t>
+            </a:r>
+          </a:p>
+          <a:p>
+            <a:pPr lvl="1"/>
+            <a:r>
+              <a:rPr lang="en-US" dirty="0"/>
+              <a:t>This will require a bit of thinking to plan a good way and order to do it.</a:t>
+            </a:r>
+          </a:p>
+          <a:p>
+            <a:pPr lvl="1"/>
+            <a:r>
+              <a:rPr lang="en-US" dirty="0"/>
+              <a:t>We’ll cover the image specific bits by next time. </a:t>
+            </a:r>
+          </a:p>
+          <a:p>
+            <a:r>
+              <a:rPr lang="en-US" dirty="0"/>
+              <a:t>Also, with the tabular stuff, I’d throw it all into a deep regression NN to predict the price and see what happens. </a:t>
+            </a:r>
+          </a:p>
+          <a:p>
+            <a:pPr lvl="1"/>
+            <a:r>
+              <a:rPr lang="en-US" dirty="0"/>
+              <a:t>You’ll need to do some clean up (e.g. large number of </a:t>
+            </a:r>
+            <a:r>
+              <a:rPr lang="en-US" dirty="0" err="1"/>
+              <a:t>vals</a:t>
+            </a:r>
+            <a:r>
+              <a:rPr lang="en-US" dirty="0"/>
+              <a:t> in categorical) but I would just see how it works out. </a:t>
+            </a:r>
+          </a:p>
+          <a:p>
+            <a:pPr lvl="1"/>
+            <a:r>
+              <a:rPr lang="en-US" dirty="0"/>
+              <a:t>I’d also try separate features for year and season, as well as something for “momentum”. </a:t>
+            </a:r>
+          </a:p>
+        </p:txBody>
+      </p:sp>
+    </p:spTree>
+    <p:extLst>
+      <p:ext uri="{BB962C8B-B14F-4D97-AF65-F5344CB8AC3E}">
+        <p14:creationId xmlns:p14="http://schemas.microsoft.com/office/powerpoint/2010/main" val="2453275796"/>
+      </p:ext>
+    </p:extLst>
+  </p:cSld>
+  <p:clrMapOvr>
+    <a:masterClrMapping/>
+  </p:clrMapOvr>
+</p:sld>
+</file>
+
+<file path=ppt/slides/slide20.xml><?xml version="1.0" encoding="utf-8"?>
+<p:sld xmlns:a="http://schemas.openxmlformats.org/drawingml/2006/main" xmlns:r="http://schemas.openxmlformats.org/officeDocument/2006/relationships" xmlns:p="http://schemas.openxmlformats.org/presentationml/2006/main">
+  <p:cSld>
+    <p:spTree>
+      <p:nvGrpSpPr>
+        <p:cNvPr id="1" name=""/>
+        <p:cNvGrpSpPr/>
+        <p:nvPr/>
+      </p:nvGrpSpPr>
+      <p:grpSpPr>
+        <a:xfrm>
+          <a:off x="0" y="0"/>
+          <a:ext cx="0" cy="0"/>
+          <a:chOff x="0" y="0"/>
+          <a:chExt cx="0" cy="0"/>
+        </a:xfrm>
+      </p:grpSpPr>
+      <p:sp>
+        <p:nvSpPr>
+          <p:cNvPr id="2" name="Title 1">
+            <a:extLst>
+              <a:ext uri="{FF2B5EF4-FFF2-40B4-BE49-F238E27FC236}">
+                <a16:creationId xmlns:a16="http://schemas.microsoft.com/office/drawing/2014/main" id="{CD517989-57C5-833E-EB5F-4F5040A80D36}"/>
+              </a:ext>
+            </a:extLst>
+          </p:cNvPr>
+          <p:cNvSpPr>
+            <a:spLocks noGrp="1"/>
+          </p:cNvSpPr>
+          <p:nvPr>
+            <p:ph type="title"/>
+          </p:nvPr>
+        </p:nvSpPr>
+        <p:spPr/>
+        <p:txBody>
+          <a:bodyPr/>
+          <a:lstStyle/>
+          <a:p>
+            <a:r>
+              <a:rPr lang="en-US" dirty="0"/>
+              <a:t>The Pipeline</a:t>
+            </a:r>
+          </a:p>
+        </p:txBody>
+      </p:sp>
+      <p:sp>
+        <p:nvSpPr>
+          <p:cNvPr id="3" name="Content Placeholder 2">
+            <a:extLst>
+              <a:ext uri="{FF2B5EF4-FFF2-40B4-BE49-F238E27FC236}">
+                <a16:creationId xmlns:a16="http://schemas.microsoft.com/office/drawing/2014/main" id="{635966C6-22A5-ADCA-0E20-979C815D4FA9}"/>
+              </a:ext>
+            </a:extLst>
+          </p:cNvPr>
+          <p:cNvSpPr>
+            <a:spLocks noGrp="1"/>
+          </p:cNvSpPr>
+          <p:nvPr>
+            <p:ph idx="1"/>
+          </p:nvPr>
+        </p:nvSpPr>
+        <p:spPr>
+          <a:xfrm>
+            <a:off x="6897249" y="2015732"/>
+            <a:ext cx="5214824" cy="4037749"/>
+          </a:xfrm>
+        </p:spPr>
+        <p:txBody>
+          <a:bodyPr/>
+          <a:lstStyle/>
+          <a:p>
+            <a:r>
+              <a:rPr lang="en-US" dirty="0"/>
+              <a:t>The dataset/loader can do most pipeline stuff.</a:t>
+            </a:r>
+          </a:p>
+          <a:p>
+            <a:r>
+              <a:rPr lang="en-US" dirty="0"/>
+              <a:t>The dataset interacts with actual data/labels.</a:t>
+            </a:r>
+          </a:p>
+          <a:p>
+            <a:pPr lvl="1"/>
+            <a:r>
+              <a:rPr lang="en-US" dirty="0"/>
+              <a:t>It can apply transformations to data. </a:t>
+            </a:r>
+          </a:p>
+          <a:p>
+            <a:r>
+              <a:rPr lang="en-US" dirty="0"/>
+              <a:t>The </a:t>
+            </a:r>
+            <a:r>
+              <a:rPr lang="en-US" dirty="0" err="1"/>
+              <a:t>dataloader</a:t>
+            </a:r>
+            <a:r>
+              <a:rPr lang="en-US" dirty="0"/>
+              <a:t> takes that prepared data and manages providing it as needed. </a:t>
+            </a:r>
+          </a:p>
+          <a:p>
+            <a:r>
+              <a:rPr lang="en-US" dirty="0"/>
+              <a:t>The model still sees a batch at a time. </a:t>
+            </a:r>
+          </a:p>
+          <a:p>
+            <a:pPr lvl="1"/>
+            <a:r>
+              <a:rPr lang="en-US" dirty="0"/>
+              <a:t>More backend work organizes that batch. </a:t>
+            </a:r>
+          </a:p>
+        </p:txBody>
+      </p:sp>
+      <p:pic>
+        <p:nvPicPr>
+          <p:cNvPr id="1026" name="Picture 2" descr="Do You Visualize DataLoaders for Deep Neural Networks?">
+            <a:extLst>
+              <a:ext uri="{FF2B5EF4-FFF2-40B4-BE49-F238E27FC236}">
+                <a16:creationId xmlns:a16="http://schemas.microsoft.com/office/drawing/2014/main" id="{A06C68C4-A2C2-CE55-6127-D6D818D9ADF3}"/>
+              </a:ext>
+            </a:extLst>
+          </p:cNvPr>
+          <p:cNvPicPr>
+            <a:picLocks noChangeAspect="1" noChangeArrowheads="1"/>
+          </p:cNvPicPr>
+          <p:nvPr/>
+        </p:nvPicPr>
+        <p:blipFill rotWithShape="1">
+          <a:blip r:embed="rId2">
+            <a:extLst>
+              <a:ext uri="{28A0092B-C50C-407E-A947-70E740481C1C}">
+                <a14:useLocalDpi xmlns:a14="http://schemas.microsoft.com/office/drawing/2010/main" val="0"/>
+              </a:ext>
+            </a:extLst>
+          </a:blip>
+          <a:srcRect t="9348" b="8046"/>
+          <a:stretch>
+            <a:fillRect/>
+          </a:stretch>
+        </p:blipFill>
+        <p:spPr bwMode="auto">
+          <a:xfrm>
+            <a:off x="79927" y="2015732"/>
+            <a:ext cx="6817323" cy="3857297"/>
+          </a:xfrm>
+          <a:prstGeom prst="rect">
+            <a:avLst/>
+          </a:prstGeom>
+          <a:noFill/>
+          <a:extLst>
+            <a:ext uri="{909E8E84-426E-40DD-AFC4-6F175D3DCCD1}">
+              <a14:hiddenFill xmlns:a14="http://schemas.microsoft.com/office/drawing/2010/main">
+                <a:solidFill>
+                  <a:srgbClr val="FFFFFF"/>
+                </a:solidFill>
+              </a14:hiddenFill>
+            </a:ext>
+          </a:extLst>
+        </p:spPr>
+      </p:pic>
+    </p:spTree>
+    <p:extLst>
+      <p:ext uri="{BB962C8B-B14F-4D97-AF65-F5344CB8AC3E}">
+        <p14:creationId xmlns:p14="http://schemas.microsoft.com/office/powerpoint/2010/main" val="2583314663"/>
+      </p:ext>
+    </p:extLst>
+  </p:cSld>
+  <p:clrMapOvr>
+    <a:masterClrMapping/>
+  </p:clrMapOvr>
+</p:sld>
+</file>
+
+<file path=ppt/slides/slide21.xml><?xml version="1.0" encoding="utf-8"?>
+<p:sld xmlns:a="http://schemas.openxmlformats.org/drawingml/2006/main" xmlns:r="http://schemas.openxmlformats.org/officeDocument/2006/relationships" xmlns:p="http://schemas.openxmlformats.org/presentationml/2006/main">
+  <p:cSld>
+    <p:spTree>
+      <p:nvGrpSpPr>
+        <p:cNvPr id="1" name=""/>
+        <p:cNvGrpSpPr/>
+        <p:nvPr/>
+      </p:nvGrpSpPr>
+      <p:grpSpPr>
+        <a:xfrm>
+          <a:off x="0" y="0"/>
+          <a:ext cx="0" cy="0"/>
+          <a:chOff x="0" y="0"/>
+          <a:chExt cx="0" cy="0"/>
+        </a:xfrm>
+      </p:grpSpPr>
+      <p:sp>
+        <p:nvSpPr>
+          <p:cNvPr id="2" name="Title 1">
+            <a:extLst>
+              <a:ext uri="{FF2B5EF4-FFF2-40B4-BE49-F238E27FC236}">
+                <a16:creationId xmlns:a16="http://schemas.microsoft.com/office/drawing/2014/main" id="{FD7F0F3D-3AD7-DDB8-8A9B-E8D6BA0B92ED}"/>
+              </a:ext>
+            </a:extLst>
+          </p:cNvPr>
+          <p:cNvSpPr>
+            <a:spLocks noGrp="1"/>
+          </p:cNvSpPr>
+          <p:nvPr>
+            <p:ph type="title"/>
+          </p:nvPr>
+        </p:nvSpPr>
+        <p:spPr/>
+        <p:txBody>
+          <a:bodyPr/>
+          <a:lstStyle/>
+          <a:p>
+            <a:r>
+              <a:rPr lang="en-US" dirty="0"/>
+              <a:t>Transformations</a:t>
+            </a:r>
+          </a:p>
+        </p:txBody>
+      </p:sp>
+      <p:sp>
+        <p:nvSpPr>
+          <p:cNvPr id="3" name="Content Placeholder 2">
+            <a:extLst>
+              <a:ext uri="{FF2B5EF4-FFF2-40B4-BE49-F238E27FC236}">
+                <a16:creationId xmlns:a16="http://schemas.microsoft.com/office/drawing/2014/main" id="{035B8533-6438-CFC6-593E-7A90AA51FCD6}"/>
+              </a:ext>
+            </a:extLst>
+          </p:cNvPr>
+          <p:cNvSpPr>
+            <a:spLocks noGrp="1"/>
+          </p:cNvSpPr>
+          <p:nvPr>
+            <p:ph idx="1"/>
+          </p:nvPr>
+        </p:nvSpPr>
+        <p:spPr>
+          <a:xfrm>
+            <a:off x="1137146" y="1853754"/>
+            <a:ext cx="10392701" cy="4199727"/>
+          </a:xfrm>
+        </p:spPr>
+        <p:txBody>
+          <a:bodyPr/>
+          <a:lstStyle/>
+          <a:p>
+            <a:r>
+              <a:rPr lang="en-US" dirty="0"/>
+              <a:t>Transformations are normally applied in the dataset. </a:t>
+            </a:r>
+          </a:p>
+          <a:p>
+            <a:pPr lvl="1"/>
+            <a:r>
+              <a:rPr lang="en-US" dirty="0"/>
+              <a:t>Either as it is created or as a batch is produced. </a:t>
+            </a:r>
+          </a:p>
+          <a:p>
+            <a:r>
+              <a:rPr lang="en-US" dirty="0"/>
+              <a:t>With a custom dataset, we can do anything.</a:t>
+            </a:r>
+          </a:p>
+          <a:p>
+            <a:r>
+              <a:rPr lang="en-US" dirty="0"/>
+              <a:t>For images, we generally do things like normalize and resize. </a:t>
+            </a:r>
+          </a:p>
+          <a:p>
+            <a:r>
+              <a:rPr lang="en-US" dirty="0"/>
+              <a:t>For tabular data, we do things like encode or scale. </a:t>
+            </a:r>
+          </a:p>
+          <a:p>
+            <a:r>
+              <a:rPr lang="en-US" dirty="0"/>
+              <a:t>There’s less of a standardized process like an sklearn pipeline. </a:t>
+            </a:r>
+          </a:p>
+          <a:p>
+            <a:pPr lvl="1"/>
+            <a:r>
+              <a:rPr lang="en-US" dirty="0"/>
+              <a:t>Things tend to vary more, so are more open </a:t>
+            </a:r>
+            <a:r>
+              <a:rPr lang="en-US" dirty="0" err="1"/>
+              <a:t>eneded</a:t>
+            </a:r>
+            <a:r>
+              <a:rPr lang="en-US" dirty="0"/>
+              <a:t>. </a:t>
+            </a:r>
+          </a:p>
+          <a:p>
+            <a:r>
+              <a:rPr lang="en-US" dirty="0"/>
+              <a:t>When things are done is open – preprocessing, dataset creation, batch creation, in model…</a:t>
+            </a:r>
+          </a:p>
+          <a:p>
+            <a:pPr lvl="1"/>
+            <a:r>
+              <a:rPr lang="en-US" dirty="0"/>
+              <a:t>Performance is a </a:t>
+            </a:r>
+            <a:r>
+              <a:rPr lang="en-US" dirty="0" err="1"/>
+              <a:t>cocern</a:t>
+            </a:r>
+            <a:r>
+              <a:rPr lang="en-US" dirty="0"/>
+              <a:t>, and we can move prep steps if we need to. </a:t>
+            </a:r>
+          </a:p>
+        </p:txBody>
+      </p:sp>
+    </p:spTree>
+    <p:extLst>
+      <p:ext uri="{BB962C8B-B14F-4D97-AF65-F5344CB8AC3E}">
+        <p14:creationId xmlns:p14="http://schemas.microsoft.com/office/powerpoint/2010/main" val="2187286386"/>
+      </p:ext>
+    </p:extLst>
+  </p:cSld>
+  <p:clrMapOvr>
+    <a:masterClrMapping/>
+  </p:clrMapOvr>
+</p:sld>
+</file>
+
+<file path=ppt/slides/slide22.xml><?xml version="1.0" encoding="utf-8"?>
+<p:sld xmlns:a="http://schemas.openxmlformats.org/drawingml/2006/main" xmlns:r="http://schemas.openxmlformats.org/officeDocument/2006/relationships" xmlns:p="http://schemas.openxmlformats.org/presentationml/2006/main">
+  <p:cSld>
+    <p:spTree>
+      <p:nvGrpSpPr>
+        <p:cNvPr id="1" name=""/>
+        <p:cNvGrpSpPr/>
+        <p:nvPr/>
+      </p:nvGrpSpPr>
+      <p:grpSpPr>
+        <a:xfrm>
+          <a:off x="0" y="0"/>
+          <a:ext cx="0" cy="0"/>
+          <a:chOff x="0" y="0"/>
+          <a:chExt cx="0" cy="0"/>
+        </a:xfrm>
+      </p:grpSpPr>
+      <p:sp>
+        <p:nvSpPr>
+          <p:cNvPr id="2" name="Title 1">
+            <a:extLst>
+              <a:ext uri="{FF2B5EF4-FFF2-40B4-BE49-F238E27FC236}">
+                <a16:creationId xmlns:a16="http://schemas.microsoft.com/office/drawing/2014/main" id="{E6A0BECB-66B2-50EB-B206-BA7D2F828AB3}"/>
+              </a:ext>
+            </a:extLst>
+          </p:cNvPr>
+          <p:cNvSpPr>
+            <a:spLocks noGrp="1"/>
+          </p:cNvSpPr>
+          <p:nvPr>
+            <p:ph type="title"/>
+          </p:nvPr>
+        </p:nvSpPr>
+        <p:spPr/>
+        <p:txBody>
+          <a:bodyPr/>
+          <a:lstStyle/>
+          <a:p>
+            <a:r>
+              <a:rPr lang="en-US" dirty="0"/>
+              <a:t>Compose</a:t>
+            </a:r>
+          </a:p>
+        </p:txBody>
+      </p:sp>
+      <p:sp>
+        <p:nvSpPr>
+          <p:cNvPr id="3" name="Content Placeholder 2">
+            <a:extLst>
+              <a:ext uri="{FF2B5EF4-FFF2-40B4-BE49-F238E27FC236}">
+                <a16:creationId xmlns:a16="http://schemas.microsoft.com/office/drawing/2014/main" id="{FE92BC6A-CA32-0D9A-3D25-94CA84946342}"/>
+              </a:ext>
+            </a:extLst>
+          </p:cNvPr>
+          <p:cNvSpPr>
+            <a:spLocks noGrp="1"/>
+          </p:cNvSpPr>
+          <p:nvPr>
+            <p:ph idx="1"/>
+          </p:nvPr>
+        </p:nvSpPr>
+        <p:spPr>
+          <a:xfrm>
+            <a:off x="757989" y="2015732"/>
+            <a:ext cx="6416843" cy="3450613"/>
+          </a:xfrm>
+        </p:spPr>
+        <p:txBody>
+          <a:bodyPr/>
+          <a:lstStyle/>
+          <a:p>
+            <a:r>
+              <a:rPr lang="en-US" dirty="0"/>
+              <a:t>Compose is roughly equivalent to a column transformer in sklearn. </a:t>
+            </a:r>
+          </a:p>
+          <a:p>
+            <a:r>
+              <a:rPr lang="en-US" dirty="0"/>
+              <a:t>If there are 2+ transformations, Compose combines them. </a:t>
+            </a:r>
+          </a:p>
+          <a:p>
+            <a:r>
+              <a:rPr lang="en-US" dirty="0"/>
+              <a:t>Compose is generally more efficient than separately. </a:t>
+            </a:r>
+          </a:p>
+          <a:p>
+            <a:r>
+              <a:rPr lang="en-US" dirty="0"/>
+              <a:t>Normally ends with </a:t>
+            </a:r>
+            <a:r>
+              <a:rPr lang="en-US" dirty="0" err="1"/>
+              <a:t>toTensor</a:t>
+            </a:r>
+            <a:r>
+              <a:rPr lang="en-US" dirty="0"/>
+              <a:t>() to make whatever our data is into a tensor for the model. </a:t>
+            </a:r>
+          </a:p>
+        </p:txBody>
+      </p:sp>
+      <p:pic>
+        <p:nvPicPr>
+          <p:cNvPr id="4" name="Picture 3" descr="Introduction to Transformations - KodeKloud">
+            <a:extLst>
+              <a:ext uri="{FF2B5EF4-FFF2-40B4-BE49-F238E27FC236}">
+                <a16:creationId xmlns:a16="http://schemas.microsoft.com/office/drawing/2014/main" id="{5BEF9983-0E1E-2368-726A-39E9BFDE7E0C}"/>
+              </a:ext>
+            </a:extLst>
+          </p:cNvPr>
+          <p:cNvPicPr>
+            <a:picLocks noChangeAspect="1"/>
+          </p:cNvPicPr>
+          <p:nvPr/>
+        </p:nvPicPr>
+        <p:blipFill>
+          <a:blip r:embed="rId2"/>
+          <a:srcRect l="19454" r="15995"/>
+          <a:stretch>
+            <a:fillRect/>
+          </a:stretch>
+        </p:blipFill>
+        <p:spPr>
+          <a:xfrm>
+            <a:off x="7174831" y="1853754"/>
+            <a:ext cx="5017169" cy="4371975"/>
+          </a:xfrm>
+          <a:prstGeom prst="rect">
+            <a:avLst/>
+          </a:prstGeom>
+        </p:spPr>
+      </p:pic>
+    </p:spTree>
+    <p:extLst>
+      <p:ext uri="{BB962C8B-B14F-4D97-AF65-F5344CB8AC3E}">
+        <p14:creationId xmlns:p14="http://schemas.microsoft.com/office/powerpoint/2010/main" val="773906650"/>
+      </p:ext>
+    </p:extLst>
+  </p:cSld>
+  <p:clrMapOvr>
+    <a:masterClrMapping/>
+  </p:clrMapOvr>
+</p:sld>
+</file>
+
+<file path=ppt/slides/slide23.xml><?xml version="1.0" encoding="utf-8"?>
+<p:sld xmlns:a="http://schemas.openxmlformats.org/drawingml/2006/main" xmlns:r="http://schemas.openxmlformats.org/officeDocument/2006/relationships" xmlns:p="http://schemas.openxmlformats.org/presentationml/2006/main">
+  <p:cSld>
+    <p:spTree>
+      <p:nvGrpSpPr>
+        <p:cNvPr id="1" name=""/>
+        <p:cNvGrpSpPr/>
+        <p:nvPr/>
+      </p:nvGrpSpPr>
+      <p:grpSpPr>
+        <a:xfrm>
+          <a:off x="0" y="0"/>
+          <a:ext cx="0" cy="0"/>
+          <a:chOff x="0" y="0"/>
+          <a:chExt cx="0" cy="0"/>
+        </a:xfrm>
+      </p:grpSpPr>
+      <p:sp>
+        <p:nvSpPr>
+          <p:cNvPr id="2" name="Title 1">
+            <a:extLst>
+              <a:ext uri="{FF2B5EF4-FFF2-40B4-BE49-F238E27FC236}">
+                <a16:creationId xmlns:a16="http://schemas.microsoft.com/office/drawing/2014/main" id="{67EEAC7E-194B-2D6D-94F1-4A15DE9F4377}"/>
+              </a:ext>
+            </a:extLst>
+          </p:cNvPr>
+          <p:cNvSpPr>
+            <a:spLocks noGrp="1"/>
+          </p:cNvSpPr>
+          <p:nvPr>
+            <p:ph type="title"/>
+          </p:nvPr>
+        </p:nvSpPr>
+        <p:spPr/>
+        <p:txBody>
+          <a:bodyPr/>
+          <a:lstStyle/>
+          <a:p>
+            <a:r>
+              <a:rPr lang="en-US" dirty="0"/>
+              <a:t>Data and Performance</a:t>
+            </a:r>
+          </a:p>
+        </p:txBody>
+      </p:sp>
+      <p:sp>
+        <p:nvSpPr>
+          <p:cNvPr id="3" name="Content Placeholder 2">
+            <a:extLst>
+              <a:ext uri="{FF2B5EF4-FFF2-40B4-BE49-F238E27FC236}">
+                <a16:creationId xmlns:a16="http://schemas.microsoft.com/office/drawing/2014/main" id="{EFDDE99D-C154-3653-CF28-73CB524531C7}"/>
+              </a:ext>
+            </a:extLst>
+          </p:cNvPr>
+          <p:cNvSpPr>
+            <a:spLocks noGrp="1"/>
+          </p:cNvSpPr>
+          <p:nvPr>
+            <p:ph idx="1"/>
+          </p:nvPr>
+        </p:nvSpPr>
+        <p:spPr>
+          <a:xfrm>
+            <a:off x="1451579" y="1929468"/>
+            <a:ext cx="9603275" cy="4124013"/>
+          </a:xfrm>
+        </p:spPr>
+        <p:txBody>
+          <a:bodyPr/>
+          <a:lstStyle/>
+          <a:p>
+            <a:r>
+              <a:rPr lang="en-US" dirty="0"/>
+              <a:t>For smaller datasets, the performance of all this doesn’t really matter. </a:t>
+            </a:r>
+          </a:p>
+          <a:p>
+            <a:r>
+              <a:rPr lang="en-US" dirty="0"/>
+              <a:t>With very large data and complex models, that changes. </a:t>
+            </a:r>
+          </a:p>
+          <a:p>
+            <a:r>
+              <a:rPr lang="en-US" dirty="0"/>
+              <a:t>Each ‘step’ takes a while to both setup and perform. </a:t>
+            </a:r>
+          </a:p>
+          <a:p>
+            <a:r>
+              <a:rPr lang="en-US" dirty="0"/>
+              <a:t>Our limiting factor is usually the speed of our GPU, and we can’t change it w/o $$$$. </a:t>
+            </a:r>
+          </a:p>
+          <a:p>
+            <a:r>
+              <a:rPr lang="en-US" dirty="0"/>
+              <a:t>Controlling where/when prep runs, we can keep the GPU busy almost all the time. </a:t>
+            </a:r>
+          </a:p>
+          <a:p>
+            <a:pPr lvl="1"/>
+            <a:r>
+              <a:rPr lang="en-US" dirty="0"/>
+              <a:t>E.g. while the GPU is working on one batch, the next can have transformations done by CPU.</a:t>
+            </a:r>
+          </a:p>
+          <a:p>
+            <a:r>
+              <a:rPr lang="en-US" dirty="0"/>
+              <a:t>Faster training means more trials means more chances at best model. </a:t>
+            </a:r>
+          </a:p>
+          <a:p>
+            <a:pPr lvl="1"/>
+            <a:r>
+              <a:rPr lang="en-US" dirty="0"/>
+              <a:t>Training is often paid by the hour, so maximizing output </a:t>
+            </a:r>
+            <a:r>
+              <a:rPr lang="en-US"/>
+              <a:t>makes sense. </a:t>
+            </a:r>
+            <a:endParaRPr lang="en-US" dirty="0"/>
+          </a:p>
+        </p:txBody>
+      </p:sp>
+    </p:spTree>
+    <p:extLst>
+      <p:ext uri="{BB962C8B-B14F-4D97-AF65-F5344CB8AC3E}">
+        <p14:creationId xmlns:p14="http://schemas.microsoft.com/office/powerpoint/2010/main" val="378168138"/>
+      </p:ext>
+    </p:extLst>
+  </p:cSld>
+  <p:clrMapOvr>
+    <a:masterClrMapping/>
+  </p:clrMapOvr>
+</p:sld>
+</file>
+
+<file path=ppt/slides/slide24.xml><?xml version="1.0" encoding="utf-8"?>
+<p:sld xmlns:a="http://schemas.openxmlformats.org/drawingml/2006/main" xmlns:r="http://schemas.openxmlformats.org/officeDocument/2006/relationships" xmlns:p="http://schemas.openxmlformats.org/presentationml/2006/main">
+  <p:cSld>
+    <p:spTree>
+      <p:nvGrpSpPr>
+        <p:cNvPr id="1" name=""/>
+        <p:cNvGrpSpPr/>
+        <p:nvPr/>
+      </p:nvGrpSpPr>
+      <p:grpSpPr>
+        <a:xfrm>
+          <a:off x="0" y="0"/>
+          <a:ext cx="0" cy="0"/>
+          <a:chOff x="0" y="0"/>
+          <a:chExt cx="0" cy="0"/>
+        </a:xfrm>
+      </p:grpSpPr>
+      <p:sp>
+        <p:nvSpPr>
+          <p:cNvPr id="2" name="Title 1">
+            <a:extLst>
+              <a:ext uri="{FF2B5EF4-FFF2-40B4-BE49-F238E27FC236}">
+                <a16:creationId xmlns:a16="http://schemas.microsoft.com/office/drawing/2014/main" id="{54627F75-BA46-6E76-4AE7-21E5077B9C52}"/>
+              </a:ext>
+            </a:extLst>
+          </p:cNvPr>
+          <p:cNvSpPr>
+            <a:spLocks noGrp="1"/>
+          </p:cNvSpPr>
+          <p:nvPr>
+            <p:ph type="title"/>
+          </p:nvPr>
+        </p:nvSpPr>
+        <p:spPr/>
+        <p:txBody>
+          <a:bodyPr/>
+          <a:lstStyle/>
+          <a:p>
+            <a:r>
+              <a:rPr lang="en-US" dirty="0"/>
+              <a:t>We don’t want this…</a:t>
+            </a:r>
+          </a:p>
+        </p:txBody>
+      </p:sp>
+      <p:sp>
+        <p:nvSpPr>
+          <p:cNvPr id="3" name="Content Placeholder 2">
+            <a:extLst>
+              <a:ext uri="{FF2B5EF4-FFF2-40B4-BE49-F238E27FC236}">
+                <a16:creationId xmlns:a16="http://schemas.microsoft.com/office/drawing/2014/main" id="{D60BD863-5E94-294B-087D-3D3572E27FEE}"/>
+              </a:ext>
+            </a:extLst>
+          </p:cNvPr>
+          <p:cNvSpPr>
+            <a:spLocks noGrp="1"/>
+          </p:cNvSpPr>
+          <p:nvPr>
+            <p:ph idx="1"/>
+          </p:nvPr>
+        </p:nvSpPr>
+        <p:spPr>
+          <a:xfrm>
+            <a:off x="7900737" y="2015732"/>
+            <a:ext cx="3912891" cy="3450613"/>
+          </a:xfrm>
+        </p:spPr>
+        <p:txBody>
+          <a:bodyPr/>
+          <a:lstStyle/>
+          <a:p>
+            <a:r>
+              <a:rPr lang="en-US" dirty="0"/>
+              <a:t>Our GPUs are precious </a:t>
+            </a:r>
+            <a:r>
+              <a:rPr lang="en-US" dirty="0" err="1"/>
+              <a:t>jewls</a:t>
+            </a:r>
+            <a:r>
+              <a:rPr lang="en-US" dirty="0"/>
+              <a:t>. </a:t>
+            </a:r>
+          </a:p>
+          <a:p>
+            <a:pPr lvl="1"/>
+            <a:r>
+              <a:rPr lang="en-US" dirty="0"/>
+              <a:t>Should not be left idle. </a:t>
+            </a:r>
+          </a:p>
+          <a:p>
+            <a:r>
+              <a:rPr lang="en-US" dirty="0"/>
+              <a:t>We’ll look at this in more detail after we cover </a:t>
+            </a:r>
+            <a:r>
+              <a:rPr lang="en-US" dirty="0" err="1"/>
+              <a:t>tensorboard</a:t>
+            </a:r>
+            <a:r>
+              <a:rPr lang="en-US" dirty="0"/>
+              <a:t>. </a:t>
+            </a:r>
+          </a:p>
+          <a:p>
+            <a:pPr lvl="1"/>
+            <a:r>
+              <a:rPr lang="en-US" dirty="0"/>
+              <a:t>A tool to monitor training. </a:t>
+            </a:r>
+          </a:p>
+        </p:txBody>
+      </p:sp>
+      <p:pic>
+        <p:nvPicPr>
+          <p:cNvPr id="4" name="Picture 3" descr="Efficient Deep Learning Model Training in PyTorch | by Francesco Franco |  Artificial Intelligence in Plain English">
+            <a:extLst>
+              <a:ext uri="{FF2B5EF4-FFF2-40B4-BE49-F238E27FC236}">
+                <a16:creationId xmlns:a16="http://schemas.microsoft.com/office/drawing/2014/main" id="{54239785-E0C1-7043-BC46-B14EE346C6B6}"/>
+              </a:ext>
+            </a:extLst>
+          </p:cNvPr>
+          <p:cNvPicPr>
+            <a:picLocks noChangeAspect="1"/>
+          </p:cNvPicPr>
+          <p:nvPr/>
+        </p:nvPicPr>
+        <p:blipFill>
+          <a:blip r:embed="rId2"/>
+          <a:stretch>
+            <a:fillRect/>
+          </a:stretch>
+        </p:blipFill>
+        <p:spPr>
+          <a:xfrm>
+            <a:off x="128337" y="1853754"/>
+            <a:ext cx="7772400" cy="4375861"/>
+          </a:xfrm>
+          <a:prstGeom prst="rect">
+            <a:avLst/>
+          </a:prstGeom>
+        </p:spPr>
+      </p:pic>
+    </p:spTree>
+    <p:extLst>
+      <p:ext uri="{BB962C8B-B14F-4D97-AF65-F5344CB8AC3E}">
+        <p14:creationId xmlns:p14="http://schemas.microsoft.com/office/powerpoint/2010/main" val="3394764183"/>
+      </p:ext>
+    </p:extLst>
+  </p:cSld>
+  <p:clrMapOvr>
+    <a:masterClrMapping/>
+  </p:clrMapOvr>
+</p:sld>
+</file>
+
+<file path=ppt/slides/slide25.xml><?xml version="1.0" encoding="utf-8"?>
+<p:sld xmlns:a="http://schemas.openxmlformats.org/drawingml/2006/main" xmlns:r="http://schemas.openxmlformats.org/officeDocument/2006/relationships" xmlns:p="http://schemas.openxmlformats.org/presentationml/2006/main">
+  <p:cSld>
+    <p:spTree>
+      <p:nvGrpSpPr>
+        <p:cNvPr id="1" name=""/>
+        <p:cNvGrpSpPr/>
+        <p:nvPr/>
+      </p:nvGrpSpPr>
+      <p:grpSpPr>
+        <a:xfrm>
+          <a:off x="0" y="0"/>
+          <a:ext cx="0" cy="0"/>
+          <a:chOff x="0" y="0"/>
+          <a:chExt cx="0" cy="0"/>
+        </a:xfrm>
+      </p:grpSpPr>
+      <p:sp>
+        <p:nvSpPr>
+          <p:cNvPr id="2" name="Title 1">
+            <a:extLst>
+              <a:ext uri="{FF2B5EF4-FFF2-40B4-BE49-F238E27FC236}">
+                <a16:creationId xmlns:a16="http://schemas.microsoft.com/office/drawing/2014/main" id="{5642454E-FD60-8F46-368E-168C88548048}"/>
+              </a:ext>
+            </a:extLst>
+          </p:cNvPr>
+          <p:cNvSpPr>
+            <a:spLocks noGrp="1"/>
+          </p:cNvSpPr>
+          <p:nvPr>
+            <p:ph type="title"/>
+          </p:nvPr>
+        </p:nvSpPr>
+        <p:spPr/>
+        <p:txBody>
+          <a:bodyPr/>
+          <a:lstStyle/>
+          <a:p>
+            <a:r>
+              <a:rPr lang="en-US" dirty="0" err="1"/>
+              <a:t>Dataloader</a:t>
+            </a:r>
+            <a:r>
+              <a:rPr lang="en-US" dirty="0"/>
+              <a:t> Performance</a:t>
+            </a:r>
+          </a:p>
+        </p:txBody>
+      </p:sp>
+      <p:sp>
+        <p:nvSpPr>
+          <p:cNvPr id="3" name="Content Placeholder 2">
+            <a:extLst>
+              <a:ext uri="{FF2B5EF4-FFF2-40B4-BE49-F238E27FC236}">
+                <a16:creationId xmlns:a16="http://schemas.microsoft.com/office/drawing/2014/main" id="{A19766C0-1BD9-DCD4-2512-B21842BD169E}"/>
+              </a:ext>
+            </a:extLst>
+          </p:cNvPr>
+          <p:cNvSpPr>
+            <a:spLocks noGrp="1"/>
+          </p:cNvSpPr>
+          <p:nvPr>
+            <p:ph idx="1"/>
+          </p:nvPr>
+        </p:nvSpPr>
+        <p:spPr>
+          <a:xfrm>
+            <a:off x="1" y="1853754"/>
+            <a:ext cx="8001000" cy="4083162"/>
+          </a:xfrm>
+        </p:spPr>
+        <p:txBody>
+          <a:bodyPr/>
+          <a:lstStyle/>
+          <a:p>
+            <a:r>
+              <a:rPr lang="en-US" dirty="0"/>
+              <a:t>There are several things we can do to manage performance. </a:t>
+            </a:r>
+          </a:p>
+          <a:p>
+            <a:pPr lvl="1"/>
+            <a:r>
+              <a:rPr lang="en-US" dirty="0"/>
+              <a:t>We’ll do more detail later, with </a:t>
+            </a:r>
+            <a:r>
+              <a:rPr lang="en-US" dirty="0" err="1"/>
+              <a:t>tensorboard</a:t>
+            </a:r>
+            <a:r>
+              <a:rPr lang="en-US" dirty="0"/>
+              <a:t>. </a:t>
+            </a:r>
+          </a:p>
+          <a:p>
+            <a:r>
+              <a:rPr lang="en-US" dirty="0"/>
+              <a:t>Some performance things:</a:t>
+            </a:r>
+          </a:p>
+          <a:p>
+            <a:pPr lvl="1"/>
+            <a:r>
+              <a:rPr lang="en-US" dirty="0" err="1"/>
+              <a:t>Num_workers</a:t>
+            </a:r>
+            <a:r>
+              <a:rPr lang="en-US" dirty="0"/>
+              <a:t> – allow more processes to load data (Multithreading) instead of current.</a:t>
+            </a:r>
+          </a:p>
+          <a:p>
+            <a:pPr lvl="1"/>
+            <a:r>
+              <a:rPr lang="en-US" dirty="0" err="1"/>
+              <a:t>Pin_memory</a:t>
+            </a:r>
+            <a:r>
+              <a:rPr lang="en-US" dirty="0"/>
+              <a:t> – force the </a:t>
+            </a:r>
+            <a:r>
+              <a:rPr lang="en-US" dirty="0" err="1"/>
+              <a:t>dataloader</a:t>
+            </a:r>
+            <a:r>
+              <a:rPr lang="en-US" dirty="0"/>
+              <a:t> into non-paging memory (faster). </a:t>
+            </a:r>
+          </a:p>
+          <a:p>
+            <a:pPr lvl="1"/>
+            <a:r>
+              <a:rPr lang="en-US" dirty="0"/>
+              <a:t>Work location – constructor, </a:t>
+            </a:r>
+            <a:r>
+              <a:rPr lang="en-US" dirty="0" err="1"/>
+              <a:t>getitem</a:t>
+            </a:r>
+            <a:r>
+              <a:rPr lang="en-US" dirty="0"/>
+              <a:t>, vs layer, preprocess step, </a:t>
+            </a:r>
+            <a:r>
+              <a:rPr lang="en-US" dirty="0" err="1"/>
+              <a:t>etc</a:t>
+            </a:r>
+            <a:r>
+              <a:rPr lang="en-US" dirty="0"/>
+              <a:t>…</a:t>
+            </a:r>
+          </a:p>
+          <a:p>
+            <a:pPr lvl="1"/>
+            <a:r>
+              <a:rPr lang="en-US" dirty="0"/>
+              <a:t>Device used – is it on the </a:t>
+            </a:r>
+            <a:r>
+              <a:rPr lang="en-US" dirty="0" err="1"/>
+              <a:t>cpu</a:t>
+            </a:r>
+            <a:r>
+              <a:rPr lang="en-US" dirty="0"/>
+              <a:t> or the </a:t>
+            </a:r>
+            <a:r>
+              <a:rPr lang="en-US" dirty="0" err="1"/>
+              <a:t>gpu</a:t>
+            </a:r>
+            <a:r>
+              <a:rPr lang="en-US" dirty="0"/>
+              <a:t>? </a:t>
+            </a:r>
+          </a:p>
+        </p:txBody>
+      </p:sp>
+      <p:pic>
+        <p:nvPicPr>
+          <p:cNvPr id="4" name="Picture 3" descr="A guide on good usage of non_blocking and pin_memory() in PyTorch — PyTorch  Tutorials 2.11.0+cu130 documentation">
+            <a:extLst>
+              <a:ext uri="{FF2B5EF4-FFF2-40B4-BE49-F238E27FC236}">
+                <a16:creationId xmlns:a16="http://schemas.microsoft.com/office/drawing/2014/main" id="{E6F18130-5ED4-6B61-EA7F-A0135AF3905A}"/>
+              </a:ext>
+            </a:extLst>
+          </p:cNvPr>
+          <p:cNvPicPr>
+            <a:picLocks noChangeAspect="1"/>
+          </p:cNvPicPr>
+          <p:nvPr/>
+        </p:nvPicPr>
+        <p:blipFill>
+          <a:blip r:embed="rId2"/>
+          <a:stretch>
+            <a:fillRect/>
+          </a:stretch>
+        </p:blipFill>
+        <p:spPr>
+          <a:xfrm>
+            <a:off x="7886700" y="1161716"/>
+            <a:ext cx="4305300" cy="4775200"/>
+          </a:xfrm>
+          <a:prstGeom prst="rect">
+            <a:avLst/>
+          </a:prstGeom>
+        </p:spPr>
+      </p:pic>
+    </p:spTree>
+    <p:extLst>
+      <p:ext uri="{BB962C8B-B14F-4D97-AF65-F5344CB8AC3E}">
+        <p14:creationId xmlns:p14="http://schemas.microsoft.com/office/powerpoint/2010/main" val="3421139822"/>
+      </p:ext>
+    </p:extLst>
+  </p:cSld>
+  <p:clrMapOvr>
+    <a:masterClrMapping/>
+  </p:clrMapOvr>
+</p:sld>
+</file>
+
+<file path=ppt/slides/slide26.xml><?xml version="1.0" encoding="utf-8"?>
+<p:sld xmlns:a="http://schemas.openxmlformats.org/drawingml/2006/main" xmlns:r="http://schemas.openxmlformats.org/officeDocument/2006/relationships" xmlns:p="http://schemas.openxmlformats.org/presentationml/2006/main">
+  <p:cSld>
+    <p:spTree>
+      <p:nvGrpSpPr>
+        <p:cNvPr id="1" name=""/>
+        <p:cNvGrpSpPr/>
+        <p:nvPr/>
+      </p:nvGrpSpPr>
+      <p:grpSpPr>
+        <a:xfrm>
+          <a:off x="0" y="0"/>
+          <a:ext cx="0" cy="0"/>
+          <a:chOff x="0" y="0"/>
+          <a:chExt cx="0" cy="0"/>
+        </a:xfrm>
+      </p:grpSpPr>
+      <p:sp>
+        <p:nvSpPr>
+          <p:cNvPr id="2" name="Title 1">
+            <a:extLst>
+              <a:ext uri="{FF2B5EF4-FFF2-40B4-BE49-F238E27FC236}">
+                <a16:creationId xmlns:a16="http://schemas.microsoft.com/office/drawing/2014/main" id="{B6EF2947-3F8E-08BE-FF41-FE147DC3D6B4}"/>
+              </a:ext>
+            </a:extLst>
+          </p:cNvPr>
+          <p:cNvSpPr>
+            <a:spLocks noGrp="1"/>
+          </p:cNvSpPr>
+          <p:nvPr>
+            <p:ph type="title"/>
+          </p:nvPr>
+        </p:nvSpPr>
+        <p:spPr/>
+        <p:txBody>
+          <a:bodyPr/>
+          <a:lstStyle/>
+          <a:p>
+            <a:r>
+              <a:rPr lang="en-US" dirty="0"/>
+              <a:t>In </a:t>
+            </a:r>
+            <a:r>
+              <a:rPr lang="en-US" dirty="0" err="1"/>
+              <a:t>Pytorch</a:t>
+            </a:r>
+            <a:r>
+              <a:rPr lang="en-US" dirty="0"/>
+              <a:t>….</a:t>
+            </a:r>
+          </a:p>
+        </p:txBody>
+      </p:sp>
+      <p:sp>
+        <p:nvSpPr>
+          <p:cNvPr id="3" name="Content Placeholder 2">
+            <a:extLst>
+              <a:ext uri="{FF2B5EF4-FFF2-40B4-BE49-F238E27FC236}">
+                <a16:creationId xmlns:a16="http://schemas.microsoft.com/office/drawing/2014/main" id="{AC99CDE0-F0B8-4AC0-D74A-4DDD3654B7FC}"/>
+              </a:ext>
+            </a:extLst>
+          </p:cNvPr>
+          <p:cNvSpPr>
+            <a:spLocks noGrp="1"/>
+          </p:cNvSpPr>
+          <p:nvPr>
+            <p:ph idx="1"/>
+          </p:nvPr>
+        </p:nvSpPr>
+        <p:spPr>
+          <a:xfrm>
+            <a:off x="1451579" y="1853754"/>
+            <a:ext cx="9603275" cy="4199727"/>
+          </a:xfrm>
+        </p:spPr>
+        <p:txBody>
+          <a:bodyPr/>
+          <a:lstStyle/>
+          <a:p>
+            <a:r>
+              <a:rPr lang="en-US" dirty="0"/>
+              <a:t>In </a:t>
+            </a:r>
+            <a:r>
+              <a:rPr lang="en-US" dirty="0" err="1"/>
+              <a:t>PyTorch</a:t>
+            </a:r>
+            <a:r>
+              <a:rPr lang="en-US" dirty="0"/>
+              <a:t>, we get our data from a few different sources, slightly differently. </a:t>
+            </a:r>
+          </a:p>
+          <a:p>
+            <a:r>
+              <a:rPr lang="en-US" dirty="0"/>
+              <a:t>Premade </a:t>
+            </a:r>
+            <a:r>
+              <a:rPr lang="en-US" dirty="0" err="1"/>
+              <a:t>PyTorch</a:t>
+            </a:r>
+            <a:r>
+              <a:rPr lang="en-US" dirty="0"/>
+              <a:t> datasets. </a:t>
+            </a:r>
+          </a:p>
+          <a:p>
+            <a:r>
+              <a:rPr lang="en-US" dirty="0"/>
+              <a:t>Premade other datasets (</a:t>
+            </a:r>
+            <a:r>
+              <a:rPr lang="en-US" dirty="0" err="1"/>
+              <a:t>huggingface</a:t>
+            </a:r>
+            <a:r>
+              <a:rPr lang="en-US" dirty="0"/>
+              <a:t>, Kaggle, </a:t>
+            </a:r>
+            <a:r>
+              <a:rPr lang="en-US" dirty="0" err="1"/>
+              <a:t>tensorflow</a:t>
+            </a:r>
+            <a:r>
+              <a:rPr lang="en-US" dirty="0"/>
+              <a:t>, etc..). </a:t>
+            </a:r>
+          </a:p>
+          <a:p>
+            <a:r>
+              <a:rPr lang="en-US" dirty="0"/>
+              <a:t>Custom data datasets. </a:t>
+            </a:r>
+          </a:p>
+          <a:p>
+            <a:pPr lvl="1"/>
+            <a:r>
+              <a:rPr lang="en-US" dirty="0"/>
+              <a:t>Customized classes. </a:t>
+            </a:r>
+          </a:p>
+          <a:p>
+            <a:pPr lvl="1"/>
+            <a:r>
+              <a:rPr lang="en-US" dirty="0"/>
+              <a:t>“Specialized” dataset creators. (</a:t>
+            </a:r>
+            <a:r>
+              <a:rPr lang="en-US" dirty="0" err="1"/>
+              <a:t>Depricated</a:t>
+            </a:r>
+            <a:r>
+              <a:rPr lang="en-US" dirty="0"/>
+              <a:t>). </a:t>
+            </a:r>
+          </a:p>
+          <a:p>
+            <a:r>
+              <a:rPr lang="en-US" dirty="0"/>
+              <a:t>Once we get to the data loader level, the layers beneath it can be ignored. </a:t>
+            </a:r>
+          </a:p>
+        </p:txBody>
+      </p:sp>
+    </p:spTree>
+    <p:extLst>
+      <p:ext uri="{BB962C8B-B14F-4D97-AF65-F5344CB8AC3E}">
+        <p14:creationId xmlns:p14="http://schemas.microsoft.com/office/powerpoint/2010/main" val="3241805707"/>
+      </p:ext>
+    </p:extLst>
+  </p:cSld>
+  <p:clrMapOvr>
+    <a:masterClrMapping/>
+  </p:clrMapOvr>
+</p:sld>
+</file>
+
+<file path=ppt/slides/slide27.xml><?xml version="1.0" encoding="utf-8"?>
+<p:sld xmlns:a="http://schemas.openxmlformats.org/drawingml/2006/main" xmlns:r="http://schemas.openxmlformats.org/officeDocument/2006/relationships" xmlns:p="http://schemas.openxmlformats.org/presentationml/2006/main" show="0">
+  <p:cSld>
+    <p:spTree>
+      <p:nvGrpSpPr>
+        <p:cNvPr id="1" name=""/>
+        <p:cNvGrpSpPr/>
+        <p:nvPr/>
+      </p:nvGrpSpPr>
+      <p:grpSpPr>
+        <a:xfrm>
+          <a:off x="0" y="0"/>
+          <a:ext cx="0" cy="0"/>
+          <a:chOff x="0" y="0"/>
+          <a:chExt cx="0" cy="0"/>
+        </a:xfrm>
+      </p:grpSpPr>
+      <p:sp>
+        <p:nvSpPr>
+          <p:cNvPr id="2" name="Title 1">
+            <a:extLst>
+              <a:ext uri="{FF2B5EF4-FFF2-40B4-BE49-F238E27FC236}">
+                <a16:creationId xmlns:a16="http://schemas.microsoft.com/office/drawing/2014/main" id="{52D6032F-3B64-1A7B-F7AC-3B6CF4892D42}"/>
+              </a:ext>
+            </a:extLst>
+          </p:cNvPr>
+          <p:cNvSpPr>
+            <a:spLocks noGrp="1"/>
+          </p:cNvSpPr>
+          <p:nvPr>
+            <p:ph type="title"/>
+          </p:nvPr>
+        </p:nvSpPr>
+        <p:spPr/>
+        <p:txBody>
+          <a:bodyPr/>
+          <a:lstStyle/>
+          <a:p>
+            <a:r>
+              <a:rPr lang="en-US" dirty="0"/>
+              <a:t>Monitoring Performance</a:t>
+            </a:r>
+          </a:p>
+        </p:txBody>
+      </p:sp>
+      <p:sp>
+        <p:nvSpPr>
+          <p:cNvPr id="3" name="Content Placeholder 2">
+            <a:extLst>
+              <a:ext uri="{FF2B5EF4-FFF2-40B4-BE49-F238E27FC236}">
+                <a16:creationId xmlns:a16="http://schemas.microsoft.com/office/drawing/2014/main" id="{39DEE616-FDC8-8AB8-5EDC-FC555ADE3B0A}"/>
+              </a:ext>
+            </a:extLst>
+          </p:cNvPr>
+          <p:cNvSpPr>
+            <a:spLocks noGrp="1"/>
+          </p:cNvSpPr>
+          <p:nvPr>
+            <p:ph idx="1"/>
+          </p:nvPr>
+        </p:nvSpPr>
+        <p:spPr>
+          <a:xfrm>
+            <a:off x="1451579" y="1979802"/>
+            <a:ext cx="9603275" cy="3958543"/>
+          </a:xfrm>
+        </p:spPr>
+        <p:txBody>
+          <a:bodyPr/>
+          <a:lstStyle/>
+          <a:p>
+            <a:r>
+              <a:rPr lang="en-US" dirty="0"/>
+              <a:t>For basic stuff, we can just have some print statements in our training loop. </a:t>
+            </a:r>
+          </a:p>
+          <a:p>
+            <a:pPr lvl="1"/>
+            <a:r>
+              <a:rPr lang="en-US" dirty="0"/>
+              <a:t>Loss, epoch, batch, </a:t>
+            </a:r>
+            <a:r>
+              <a:rPr lang="en-US" dirty="0" err="1"/>
+              <a:t>etc</a:t>
+            </a:r>
+            <a:r>
+              <a:rPr lang="en-US" dirty="0"/>
+              <a:t>…</a:t>
+            </a:r>
+          </a:p>
+          <a:p>
+            <a:r>
+              <a:rPr lang="en-US" dirty="0"/>
+              <a:t>For serious management, we want something better. </a:t>
+            </a:r>
+          </a:p>
+          <a:p>
+            <a:pPr lvl="1"/>
+            <a:r>
+              <a:rPr lang="en-US" dirty="0"/>
+              <a:t>Training can take a long time, weeks even. We don’t want to sit there for it. </a:t>
+            </a:r>
+          </a:p>
+          <a:p>
+            <a:pPr lvl="1"/>
+            <a:r>
+              <a:rPr lang="en-US" dirty="0"/>
+              <a:t>If doing trials, being able to compare is nice. </a:t>
+            </a:r>
+          </a:p>
+          <a:p>
+            <a:pPr lvl="1"/>
+            <a:r>
+              <a:rPr lang="en-US" dirty="0"/>
+              <a:t>Our computer that is training may live in a data center somewhere. </a:t>
+            </a:r>
+          </a:p>
+          <a:p>
+            <a:r>
+              <a:rPr lang="en-US" dirty="0"/>
+              <a:t>One option is to use </a:t>
+            </a:r>
+            <a:r>
+              <a:rPr lang="en-US" dirty="0" err="1"/>
+              <a:t>Tensorboard</a:t>
+            </a:r>
+            <a:r>
+              <a:rPr lang="en-US" dirty="0"/>
+              <a:t> – a webpage based monitor package. </a:t>
+            </a:r>
+          </a:p>
+          <a:p>
+            <a:pPr lvl="1"/>
+            <a:r>
+              <a:rPr lang="en-US" dirty="0"/>
+              <a:t>We write logs with updates on progress to disk. </a:t>
+            </a:r>
+          </a:p>
+          <a:p>
+            <a:pPr lvl="1"/>
+            <a:r>
+              <a:rPr lang="en-US" dirty="0" err="1"/>
+              <a:t>Tensorboard</a:t>
+            </a:r>
+            <a:r>
+              <a:rPr lang="en-US" dirty="0"/>
+              <a:t> takes the logs and makes them into a nice webpage. </a:t>
+            </a:r>
+          </a:p>
+        </p:txBody>
+      </p:sp>
+    </p:spTree>
+    <p:extLst>
+      <p:ext uri="{BB962C8B-B14F-4D97-AF65-F5344CB8AC3E}">
+        <p14:creationId xmlns:p14="http://schemas.microsoft.com/office/powerpoint/2010/main" val="3476941931"/>
+      </p:ext>
+    </p:extLst>
+  </p:cSld>
+  <p:clrMapOvr>
+    <a:masterClrMapping/>
+  </p:clrMapOvr>
+</p:sld>
+</file>
+
+<file path=ppt/slides/slide28.xml><?xml version="1.0" encoding="utf-8"?>
+<p:sld xmlns:a="http://schemas.openxmlformats.org/drawingml/2006/main" xmlns:r="http://schemas.openxmlformats.org/officeDocument/2006/relationships" xmlns:p="http://schemas.openxmlformats.org/presentationml/2006/main" show="0">
+  <p:cSld>
+    <p:spTree>
+      <p:nvGrpSpPr>
+        <p:cNvPr id="1" name=""/>
+        <p:cNvGrpSpPr/>
+        <p:nvPr/>
+      </p:nvGrpSpPr>
+      <p:grpSpPr>
+        <a:xfrm>
+          <a:off x="0" y="0"/>
+          <a:ext cx="0" cy="0"/>
+          <a:chOff x="0" y="0"/>
+          <a:chExt cx="0" cy="0"/>
+        </a:xfrm>
+      </p:grpSpPr>
+      <p:sp>
+        <p:nvSpPr>
+          <p:cNvPr id="2" name="Title 1">
+            <a:extLst>
+              <a:ext uri="{FF2B5EF4-FFF2-40B4-BE49-F238E27FC236}">
                 <a16:creationId xmlns:a16="http://schemas.microsoft.com/office/drawing/2014/main" id="{BAEB22F2-67B4-CD48-4741-0C91072D1020}"/>
               </a:ext>
             </a:extLst>
@@ -3868,8 +6939,8 @@
 </p:sld>
 </file>
 
-<file path=ppt/slides/slide11.xml><?xml version="1.0" encoding="utf-8"?>
-<p:sld xmlns:a="http://schemas.openxmlformats.org/drawingml/2006/main" xmlns:r="http://schemas.openxmlformats.org/officeDocument/2006/relationships" xmlns:p="http://schemas.openxmlformats.org/presentationml/2006/main">
+<file path=ppt/slides/slide29.xml><?xml version="1.0" encoding="utf-8"?>
+<p:sld xmlns:a="http://schemas.openxmlformats.org/drawingml/2006/main" xmlns:r="http://schemas.openxmlformats.org/officeDocument/2006/relationships" xmlns:p="http://schemas.openxmlformats.org/presentationml/2006/main" show="0">
   <p:cSld>
     <p:spTree>
       <p:nvGrpSpPr>
@@ -4157,353 +7228,6 @@
 </p:sld>
 </file>
 
-<file path=ppt/slides/slide12.xml><?xml version="1.0" encoding="utf-8"?>
-<p:sld xmlns:a="http://schemas.openxmlformats.org/drawingml/2006/main" xmlns:r="http://schemas.openxmlformats.org/officeDocument/2006/relationships" xmlns:p="http://schemas.openxmlformats.org/presentationml/2006/main">
-  <p:cSld>
-    <p:spTree>
-      <p:nvGrpSpPr>
-        <p:cNvPr id="1" name=""/>
-        <p:cNvGrpSpPr/>
-        <p:nvPr/>
-      </p:nvGrpSpPr>
-      <p:grpSpPr>
-        <a:xfrm>
-          <a:off x="0" y="0"/>
-          <a:ext cx="0" cy="0"/>
-          <a:chOff x="0" y="0"/>
-          <a:chExt cx="0" cy="0"/>
-        </a:xfrm>
-      </p:grpSpPr>
-      <p:sp>
-        <p:nvSpPr>
-          <p:cNvPr id="2" name="Title 1">
-            <a:extLst>
-              <a:ext uri="{FF2B5EF4-FFF2-40B4-BE49-F238E27FC236}">
-                <a16:creationId xmlns:a16="http://schemas.microsoft.com/office/drawing/2014/main" id="{6EE4B42E-4AAF-33C8-EDCC-9D3512BC9508}"/>
-              </a:ext>
-            </a:extLst>
-          </p:cNvPr>
-          <p:cNvSpPr>
-            <a:spLocks noGrp="1"/>
-          </p:cNvSpPr>
-          <p:nvPr>
-            <p:ph type="title"/>
-          </p:nvPr>
-        </p:nvSpPr>
-        <p:spPr/>
-        <p:txBody>
-          <a:bodyPr/>
-          <a:lstStyle/>
-          <a:p>
-            <a:endParaRPr lang="en-US"/>
-          </a:p>
-        </p:txBody>
-      </p:sp>
-      <p:sp>
-        <p:nvSpPr>
-          <p:cNvPr id="3" name="Content Placeholder 2">
-            <a:extLst>
-              <a:ext uri="{FF2B5EF4-FFF2-40B4-BE49-F238E27FC236}">
-                <a16:creationId xmlns:a16="http://schemas.microsoft.com/office/drawing/2014/main" id="{3CF82B5C-A464-5005-460E-9E99C37A9C35}"/>
-              </a:ext>
-            </a:extLst>
-          </p:cNvPr>
-          <p:cNvSpPr>
-            <a:spLocks noGrp="1"/>
-          </p:cNvSpPr>
-          <p:nvPr>
-            <p:ph idx="1"/>
-          </p:nvPr>
-        </p:nvSpPr>
-        <p:spPr/>
-        <p:txBody>
-          <a:bodyPr/>
-          <a:lstStyle/>
-          <a:p>
-            <a:endParaRPr lang="en-US"/>
-          </a:p>
-        </p:txBody>
-      </p:sp>
-    </p:spTree>
-    <p:extLst>
-      <p:ext uri="{BB962C8B-B14F-4D97-AF65-F5344CB8AC3E}">
-        <p14:creationId xmlns:p14="http://schemas.microsoft.com/office/powerpoint/2010/main" val="3233782832"/>
-      </p:ext>
-    </p:extLst>
-  </p:cSld>
-  <p:clrMapOvr>
-    <a:masterClrMapping/>
-  </p:clrMapOvr>
-</p:sld>
-</file>
-
-<file path=ppt/slides/slide13.xml><?xml version="1.0" encoding="utf-8"?>
-<p:sld xmlns:a="http://schemas.openxmlformats.org/drawingml/2006/main" xmlns:r="http://schemas.openxmlformats.org/officeDocument/2006/relationships" xmlns:p="http://schemas.openxmlformats.org/presentationml/2006/main">
-  <p:cSld>
-    <p:spTree>
-      <p:nvGrpSpPr>
-        <p:cNvPr id="1" name=""/>
-        <p:cNvGrpSpPr/>
-        <p:nvPr/>
-      </p:nvGrpSpPr>
-      <p:grpSpPr>
-        <a:xfrm>
-          <a:off x="0" y="0"/>
-          <a:ext cx="0" cy="0"/>
-          <a:chOff x="0" y="0"/>
-          <a:chExt cx="0" cy="0"/>
-        </a:xfrm>
-      </p:grpSpPr>
-      <p:sp>
-        <p:nvSpPr>
-          <p:cNvPr id="2" name="Title 1">
-            <a:extLst>
-              <a:ext uri="{FF2B5EF4-FFF2-40B4-BE49-F238E27FC236}">
-                <a16:creationId xmlns:a16="http://schemas.microsoft.com/office/drawing/2014/main" id="{E67921F0-5A32-C74B-0A9E-39767463FF94}"/>
-              </a:ext>
-            </a:extLst>
-          </p:cNvPr>
-          <p:cNvSpPr>
-            <a:spLocks noGrp="1"/>
-          </p:cNvSpPr>
-          <p:nvPr>
-            <p:ph type="title"/>
-          </p:nvPr>
-        </p:nvSpPr>
-        <p:spPr/>
-        <p:txBody>
-          <a:bodyPr/>
-          <a:lstStyle/>
-          <a:p>
-            <a:r>
-              <a:rPr lang="en-US" dirty="0"/>
-              <a:t>Hyperparameter Tuning</a:t>
-            </a:r>
-          </a:p>
-        </p:txBody>
-      </p:sp>
-      <p:sp>
-        <p:nvSpPr>
-          <p:cNvPr id="3" name="Content Placeholder 2">
-            <a:extLst>
-              <a:ext uri="{FF2B5EF4-FFF2-40B4-BE49-F238E27FC236}">
-                <a16:creationId xmlns:a16="http://schemas.microsoft.com/office/drawing/2014/main" id="{AECD9BBB-AF93-919A-1AD9-5573F4995842}"/>
-              </a:ext>
-            </a:extLst>
-          </p:cNvPr>
-          <p:cNvSpPr>
-            <a:spLocks noGrp="1"/>
-          </p:cNvSpPr>
-          <p:nvPr>
-            <p:ph idx="1"/>
-          </p:nvPr>
-        </p:nvSpPr>
-        <p:spPr/>
-        <p:txBody>
-          <a:bodyPr/>
-          <a:lstStyle/>
-          <a:p>
-            <a:r>
-              <a:rPr lang="en-US" dirty="0"/>
-              <a:t>As with classical models, we want to modify hyperparameters to tune a model. </a:t>
-            </a:r>
-          </a:p>
-          <a:p>
-            <a:pPr lvl="1"/>
-            <a:r>
-              <a:rPr lang="en-US" dirty="0"/>
-              <a:t>Unfortunately, a grid search won’t work here. </a:t>
-            </a:r>
-          </a:p>
-          <a:p>
-            <a:r>
-              <a:rPr lang="en-US" dirty="0"/>
-              <a:t>With </a:t>
-            </a:r>
-            <a:r>
-              <a:rPr lang="en-US" dirty="0" err="1"/>
-              <a:t>pytorch</a:t>
-            </a:r>
-            <a:r>
-              <a:rPr lang="en-US" dirty="0"/>
-              <a:t> models we want to do the same thing, but it is structured differently. </a:t>
-            </a:r>
-          </a:p>
-          <a:p>
-            <a:pPr lvl="1"/>
-            <a:r>
-              <a:rPr lang="en-US" dirty="0"/>
-              <a:t>Setup the set of choices for HPs. </a:t>
-            </a:r>
-          </a:p>
-          <a:p>
-            <a:pPr lvl="1"/>
-            <a:r>
-              <a:rPr lang="en-US" dirty="0"/>
-              <a:t>Train the model, with modifications to do some logging. </a:t>
-            </a:r>
-          </a:p>
-        </p:txBody>
-      </p:sp>
-    </p:spTree>
-    <p:extLst>
-      <p:ext uri="{BB962C8B-B14F-4D97-AF65-F5344CB8AC3E}">
-        <p14:creationId xmlns:p14="http://schemas.microsoft.com/office/powerpoint/2010/main" val="1449264906"/>
-      </p:ext>
-    </p:extLst>
-  </p:cSld>
-  <p:clrMapOvr>
-    <a:masterClrMapping/>
-  </p:clrMapOvr>
-</p:sld>
-</file>
-
-<file path=ppt/slides/slide2.xml><?xml version="1.0" encoding="utf-8"?>
-<p:sld xmlns:a="http://schemas.openxmlformats.org/drawingml/2006/main" xmlns:r="http://schemas.openxmlformats.org/officeDocument/2006/relationships" xmlns:p="http://schemas.openxmlformats.org/presentationml/2006/main">
-  <p:cSld>
-    <p:spTree>
-      <p:nvGrpSpPr>
-        <p:cNvPr id="1" name=""/>
-        <p:cNvGrpSpPr/>
-        <p:nvPr/>
-      </p:nvGrpSpPr>
-      <p:grpSpPr>
-        <a:xfrm>
-          <a:off x="0" y="0"/>
-          <a:ext cx="0" cy="0"/>
-          <a:chOff x="0" y="0"/>
-          <a:chExt cx="0" cy="0"/>
-        </a:xfrm>
-      </p:grpSpPr>
-      <p:sp>
-        <p:nvSpPr>
-          <p:cNvPr id="2" name="Title 1">
-            <a:extLst>
-              <a:ext uri="{FF2B5EF4-FFF2-40B4-BE49-F238E27FC236}">
-                <a16:creationId xmlns:a16="http://schemas.microsoft.com/office/drawing/2014/main" id="{24CCB19B-AC38-DB73-A16D-A5B25B7893A9}"/>
-              </a:ext>
-            </a:extLst>
-          </p:cNvPr>
-          <p:cNvSpPr>
-            <a:spLocks noGrp="1"/>
-          </p:cNvSpPr>
-          <p:nvPr>
-            <p:ph type="title"/>
-          </p:nvPr>
-        </p:nvSpPr>
-        <p:spPr/>
-        <p:txBody>
-          <a:bodyPr/>
-          <a:lstStyle/>
-          <a:p>
-            <a:r>
-              <a:rPr lang="en-US" dirty="0"/>
-              <a:t>Data in Neural Networks</a:t>
-            </a:r>
-          </a:p>
-        </p:txBody>
-      </p:sp>
-      <p:sp>
-        <p:nvSpPr>
-          <p:cNvPr id="3" name="Content Placeholder 2">
-            <a:extLst>
-              <a:ext uri="{FF2B5EF4-FFF2-40B4-BE49-F238E27FC236}">
-                <a16:creationId xmlns:a16="http://schemas.microsoft.com/office/drawing/2014/main" id="{51C4114D-F679-830D-CC5D-C95048043217}"/>
-              </a:ext>
-            </a:extLst>
-          </p:cNvPr>
-          <p:cNvSpPr>
-            <a:spLocks noGrp="1"/>
-          </p:cNvSpPr>
-          <p:nvPr>
-            <p:ph idx="1"/>
-          </p:nvPr>
-        </p:nvSpPr>
-        <p:spPr>
-          <a:xfrm>
-            <a:off x="1451579" y="2015732"/>
-            <a:ext cx="9603275" cy="4037749"/>
-          </a:xfrm>
-        </p:spPr>
-        <p:txBody>
-          <a:bodyPr/>
-          <a:lstStyle/>
-          <a:p>
-            <a:r>
-              <a:rPr lang="en-US" dirty="0"/>
-              <a:t>We can feed our </a:t>
-            </a:r>
-            <a:r>
-              <a:rPr lang="en-US" dirty="0" err="1"/>
-              <a:t>pytorch</a:t>
-            </a:r>
-            <a:r>
-              <a:rPr lang="en-US" dirty="0"/>
-              <a:t> models data in the same way as sklearn models. </a:t>
-            </a:r>
-          </a:p>
-          <a:p>
-            <a:pPr lvl="1"/>
-            <a:r>
-              <a:rPr lang="en-US" dirty="0"/>
-              <a:t>Targets and features are the exact same as before. </a:t>
-            </a:r>
-          </a:p>
-          <a:p>
-            <a:r>
-              <a:rPr lang="en-US" dirty="0"/>
-              <a:t>However…</a:t>
-            </a:r>
-          </a:p>
-          <a:p>
-            <a:pPr lvl="1"/>
-            <a:r>
-              <a:rPr lang="en-US" dirty="0"/>
-              <a:t>Neural networks are mainly targeted at unstructured data, while sklearn at tabular. </a:t>
-            </a:r>
-          </a:p>
-          <a:p>
-            <a:pPr lvl="1"/>
-            <a:r>
-              <a:rPr lang="en-US" dirty="0"/>
-              <a:t>We often deal with large amounts of data, maybe more than we can fit in memory. </a:t>
-            </a:r>
-          </a:p>
-          <a:p>
-            <a:pPr lvl="1"/>
-            <a:r>
-              <a:rPr lang="en-US" dirty="0"/>
-              <a:t>We usually have batches, or subsets of the data that we use one at a time. </a:t>
-            </a:r>
-          </a:p>
-          <a:p>
-            <a:pPr lvl="1"/>
-            <a:r>
-              <a:rPr lang="en-US" dirty="0"/>
-              <a:t>Preparation steps can be ‘moved around’ for performance reasons. </a:t>
-            </a:r>
-          </a:p>
-          <a:p>
-            <a:r>
-              <a:rPr lang="en-US" dirty="0"/>
-              <a:t>Managing the data in a NN model can involve much more work than we are used to. </a:t>
-            </a:r>
-          </a:p>
-        </p:txBody>
-      </p:sp>
-    </p:spTree>
-    <p:extLst>
-      <p:ext uri="{BB962C8B-B14F-4D97-AF65-F5344CB8AC3E}">
-        <p14:creationId xmlns:p14="http://schemas.microsoft.com/office/powerpoint/2010/main" val="3945427673"/>
-      </p:ext>
-    </p:extLst>
-  </p:cSld>
-  <p:clrMapOvr>
-    <a:masterClrMapping/>
-  </p:clrMapOvr>
-</p:sld>
-</file>
-
 <file path=ppt/slides/slide3.xml><?xml version="1.0" encoding="utf-8"?>
 <p:sld xmlns:a="http://schemas.openxmlformats.org/drawingml/2006/main" xmlns:r="http://schemas.openxmlformats.org/officeDocument/2006/relationships" xmlns:p="http://schemas.openxmlformats.org/presentationml/2006/main">
   <p:cSld>
@@ -4526,7 +7250,7 @@
           <p:cNvPr id="2" name="Title 1">
             <a:extLst>
               <a:ext uri="{FF2B5EF4-FFF2-40B4-BE49-F238E27FC236}">
-                <a16:creationId xmlns:a16="http://schemas.microsoft.com/office/drawing/2014/main" id="{0AA66CD4-47EA-F69E-1B29-7A8DDCCE3F39}"/>
+                <a16:creationId xmlns:a16="http://schemas.microsoft.com/office/drawing/2014/main" id="{7E3D1CB9-1E3A-DA11-D7A7-F5480F765F6F}"/>
               </a:ext>
             </a:extLst>
           </p:cNvPr>
@@ -4534,6 +7258,93 @@
             <a:spLocks noGrp="1"/>
           </p:cNvSpPr>
           <p:nvPr>
+            <p:ph type="ctrTitle"/>
+          </p:nvPr>
+        </p:nvSpPr>
+        <p:spPr/>
+        <p:txBody>
+          <a:bodyPr/>
+          <a:lstStyle/>
+          <a:p>
+            <a:r>
+              <a:rPr lang="en-US" dirty="0" err="1"/>
+              <a:t>PyTorch</a:t>
+            </a:r>
+            <a:r>
+              <a:rPr lang="en-US" dirty="0"/>
+              <a:t> Data</a:t>
+            </a:r>
+          </a:p>
+        </p:txBody>
+      </p:sp>
+      <p:sp>
+        <p:nvSpPr>
+          <p:cNvPr id="3" name="Subtitle 2">
+            <a:extLst>
+              <a:ext uri="{FF2B5EF4-FFF2-40B4-BE49-F238E27FC236}">
+                <a16:creationId xmlns:a16="http://schemas.microsoft.com/office/drawing/2014/main" id="{280EC84A-4931-77EC-C6E7-6AD91FB320C4}"/>
+              </a:ext>
+            </a:extLst>
+          </p:cNvPr>
+          <p:cNvSpPr>
+            <a:spLocks noGrp="1"/>
+          </p:cNvSpPr>
+          <p:nvPr>
+            <p:ph type="subTitle" idx="1"/>
+          </p:nvPr>
+        </p:nvSpPr>
+        <p:spPr/>
+        <p:txBody>
+          <a:bodyPr/>
+          <a:lstStyle/>
+          <a:p>
+            <a:endParaRPr lang="en-US"/>
+          </a:p>
+        </p:txBody>
+      </p:sp>
+    </p:spTree>
+    <p:extLst>
+      <p:ext uri="{BB962C8B-B14F-4D97-AF65-F5344CB8AC3E}">
+        <p14:creationId xmlns:p14="http://schemas.microsoft.com/office/powerpoint/2010/main" val="2828267948"/>
+      </p:ext>
+    </p:extLst>
+  </p:cSld>
+  <p:clrMapOvr>
+    <a:masterClrMapping/>
+  </p:clrMapOvr>
+</p:sld>
+</file>
+
+<file path=ppt/slides/slide30.xml><?xml version="1.0" encoding="utf-8"?>
+<p:sld xmlns:a="http://schemas.openxmlformats.org/drawingml/2006/main" xmlns:r="http://schemas.openxmlformats.org/officeDocument/2006/relationships" xmlns:p="http://schemas.openxmlformats.org/presentationml/2006/main" show="0">
+  <p:cSld>
+    <p:spTree>
+      <p:nvGrpSpPr>
+        <p:cNvPr id="1" name=""/>
+        <p:cNvGrpSpPr/>
+        <p:nvPr/>
+      </p:nvGrpSpPr>
+      <p:grpSpPr>
+        <a:xfrm>
+          <a:off x="0" y="0"/>
+          <a:ext cx="0" cy="0"/>
+          <a:chOff x="0" y="0"/>
+          <a:chExt cx="0" cy="0"/>
+        </a:xfrm>
+      </p:grpSpPr>
+      <p:sp>
+        <p:nvSpPr>
+          <p:cNvPr id="2" name="Title 1">
+            <a:extLst>
+              <a:ext uri="{FF2B5EF4-FFF2-40B4-BE49-F238E27FC236}">
+                <a16:creationId xmlns:a16="http://schemas.microsoft.com/office/drawing/2014/main" id="{6EE4B42E-4AAF-33C8-EDCC-9D3512BC9508}"/>
+              </a:ext>
+            </a:extLst>
+          </p:cNvPr>
+          <p:cNvSpPr>
+            <a:spLocks noGrp="1"/>
+          </p:cNvSpPr>
+          <p:nvPr>
             <p:ph type="title"/>
           </p:nvPr>
         </p:nvSpPr>
@@ -4542,10 +7353,7 @@
           <a:bodyPr/>
           <a:lstStyle/>
           <a:p>
-            <a:r>
-              <a:rPr lang="en-US" dirty="0"/>
-              <a:t>Datasets for Neural Networks</a:t>
-            </a:r>
+            <a:endParaRPr lang="en-US"/>
           </a:p>
         </p:txBody>
       </p:sp>
@@ -4554,7 +7362,7 @@
           <p:cNvPr id="3" name="Content Placeholder 2">
             <a:extLst>
               <a:ext uri="{FF2B5EF4-FFF2-40B4-BE49-F238E27FC236}">
-                <a16:creationId xmlns:a16="http://schemas.microsoft.com/office/drawing/2014/main" id="{E2F4168F-5C8C-BC5B-DBB9-5D52AE81DEAC}"/>
+                <a16:creationId xmlns:a16="http://schemas.microsoft.com/office/drawing/2014/main" id="{3CF82B5C-A464-5005-460E-9E99C37A9C35}"/>
               </a:ext>
             </a:extLst>
           </p:cNvPr>
@@ -4565,93 +7373,140 @@
             <p:ph idx="1"/>
           </p:nvPr>
         </p:nvSpPr>
-        <p:spPr>
-          <a:xfrm>
-            <a:off x="1451579" y="1929468"/>
-            <a:ext cx="9603275" cy="4124013"/>
-          </a:xfrm>
-        </p:spPr>
-        <p:txBody>
-          <a:bodyPr/>
-          <a:lstStyle/>
-          <a:p>
-            <a:r>
-              <a:rPr lang="en-US" dirty="0"/>
-              <a:t>Before we feed data into our neural network we construct some helpers:</a:t>
-            </a:r>
-          </a:p>
-          <a:p>
-            <a:pPr lvl="1"/>
-            <a:r>
-              <a:rPr lang="en-US" dirty="0"/>
-              <a:t>Datasets – ‘holds’ the actual data and labels. </a:t>
-            </a:r>
-          </a:p>
-          <a:p>
-            <a:pPr lvl="1"/>
-            <a:r>
-              <a:rPr lang="en-US" dirty="0" err="1"/>
-              <a:t>Dataloaders</a:t>
-            </a:r>
-            <a:r>
-              <a:rPr lang="en-US" dirty="0"/>
-              <a:t> – manages the data loading process, doing things like batches. </a:t>
-            </a:r>
-          </a:p>
-          <a:p>
-            <a:r>
-              <a:rPr lang="en-US" dirty="0"/>
-              <a:t>Instead of handling a raw </a:t>
-            </a:r>
-            <a:r>
-              <a:rPr lang="en-US" dirty="0" err="1"/>
-              <a:t>dataframe</a:t>
-            </a:r>
-            <a:r>
-              <a:rPr lang="en-US" dirty="0"/>
-              <a:t>, we use our data to create these objects. </a:t>
-            </a:r>
-          </a:p>
-          <a:p>
-            <a:r>
-              <a:rPr lang="en-US" dirty="0"/>
-              <a:t>The ‘holding’ bit can be a little variable:</a:t>
-            </a:r>
-          </a:p>
-          <a:p>
-            <a:pPr lvl="1"/>
-            <a:r>
-              <a:rPr lang="en-US" dirty="0"/>
-              <a:t>The dataset can hold the data in memory, like we are used to. </a:t>
-            </a:r>
-          </a:p>
-          <a:p>
-            <a:pPr lvl="1"/>
-            <a:r>
-              <a:rPr lang="en-US" dirty="0"/>
-              <a:t>It doesn’t need to, and is often impossible when we have more data than memory. </a:t>
-            </a:r>
-          </a:p>
-          <a:p>
-            <a:pPr lvl="1"/>
-            <a:r>
-              <a:rPr lang="en-US" dirty="0"/>
-              <a:t>The dataset is just responsible for providing data when asked. </a:t>
-            </a:r>
-          </a:p>
-          <a:p>
-            <a:pPr lvl="1"/>
-            <a:r>
-              <a:rPr lang="en-US" dirty="0"/>
-              <a:t>That data may be saved on disk, and loaded bit by bit. </a:t>
-            </a:r>
+        <p:spPr/>
+        <p:txBody>
+          <a:bodyPr/>
+          <a:lstStyle/>
+          <a:p>
+            <a:endParaRPr lang="en-US"/>
           </a:p>
         </p:txBody>
       </p:sp>
     </p:spTree>
     <p:extLst>
       <p:ext uri="{BB962C8B-B14F-4D97-AF65-F5344CB8AC3E}">
-        <p14:creationId xmlns:p14="http://schemas.microsoft.com/office/powerpoint/2010/main" val="2751657622"/>
+        <p14:creationId xmlns:p14="http://schemas.microsoft.com/office/powerpoint/2010/main" val="3233782832"/>
+      </p:ext>
+    </p:extLst>
+  </p:cSld>
+  <p:clrMapOvr>
+    <a:masterClrMapping/>
+  </p:clrMapOvr>
+</p:sld>
+</file>
+
+<file path=ppt/slides/slide31.xml><?xml version="1.0" encoding="utf-8"?>
+<p:sld xmlns:a="http://schemas.openxmlformats.org/drawingml/2006/main" xmlns:r="http://schemas.openxmlformats.org/officeDocument/2006/relationships" xmlns:p="http://schemas.openxmlformats.org/presentationml/2006/main" show="0">
+  <p:cSld>
+    <p:spTree>
+      <p:nvGrpSpPr>
+        <p:cNvPr id="1" name=""/>
+        <p:cNvGrpSpPr/>
+        <p:nvPr/>
+      </p:nvGrpSpPr>
+      <p:grpSpPr>
+        <a:xfrm>
+          <a:off x="0" y="0"/>
+          <a:ext cx="0" cy="0"/>
+          <a:chOff x="0" y="0"/>
+          <a:chExt cx="0" cy="0"/>
+        </a:xfrm>
+      </p:grpSpPr>
+      <p:sp>
+        <p:nvSpPr>
+          <p:cNvPr id="2" name="Title 1">
+            <a:extLst>
+              <a:ext uri="{FF2B5EF4-FFF2-40B4-BE49-F238E27FC236}">
+                <a16:creationId xmlns:a16="http://schemas.microsoft.com/office/drawing/2014/main" id="{E67921F0-5A32-C74B-0A9E-39767463FF94}"/>
+              </a:ext>
+            </a:extLst>
+          </p:cNvPr>
+          <p:cNvSpPr>
+            <a:spLocks noGrp="1"/>
+          </p:cNvSpPr>
+          <p:nvPr>
+            <p:ph type="title"/>
+          </p:nvPr>
+        </p:nvSpPr>
+        <p:spPr/>
+        <p:txBody>
+          <a:bodyPr/>
+          <a:lstStyle/>
+          <a:p>
+            <a:r>
+              <a:rPr lang="en-US" dirty="0"/>
+              <a:t>Hyperparameter Tuning</a:t>
+            </a:r>
+          </a:p>
+        </p:txBody>
+      </p:sp>
+      <p:sp>
+        <p:nvSpPr>
+          <p:cNvPr id="3" name="Content Placeholder 2">
+            <a:extLst>
+              <a:ext uri="{FF2B5EF4-FFF2-40B4-BE49-F238E27FC236}">
+                <a16:creationId xmlns:a16="http://schemas.microsoft.com/office/drawing/2014/main" id="{AECD9BBB-AF93-919A-1AD9-5573F4995842}"/>
+              </a:ext>
+            </a:extLst>
+          </p:cNvPr>
+          <p:cNvSpPr>
+            <a:spLocks noGrp="1"/>
+          </p:cNvSpPr>
+          <p:nvPr>
+            <p:ph idx="1"/>
+          </p:nvPr>
+        </p:nvSpPr>
+        <p:spPr/>
+        <p:txBody>
+          <a:bodyPr/>
+          <a:lstStyle/>
+          <a:p>
+            <a:r>
+              <a:rPr lang="en-US" dirty="0"/>
+              <a:t>As with classical models, we want to modify hyperparameters to tune a model. </a:t>
+            </a:r>
+          </a:p>
+          <a:p>
+            <a:pPr lvl="1"/>
+            <a:r>
+              <a:rPr lang="en-US" dirty="0"/>
+              <a:t>Unfortunately, a grid search won’t work here. </a:t>
+            </a:r>
+          </a:p>
+          <a:p>
+            <a:r>
+              <a:rPr lang="en-US" dirty="0"/>
+              <a:t>With </a:t>
+            </a:r>
+            <a:r>
+              <a:rPr lang="en-US" dirty="0" err="1"/>
+              <a:t>pytorch</a:t>
+            </a:r>
+            <a:r>
+              <a:rPr lang="en-US" dirty="0"/>
+              <a:t> models we want to do the same thing, but it is structured differently. </a:t>
+            </a:r>
+          </a:p>
+          <a:p>
+            <a:pPr lvl="1"/>
+            <a:r>
+              <a:rPr lang="en-US" dirty="0"/>
+              <a:t>Setup the set of choices for HPs. </a:t>
+            </a:r>
+          </a:p>
+          <a:p>
+            <a:pPr lvl="1"/>
+            <a:r>
+              <a:rPr lang="en-US" dirty="0"/>
+              <a:t>Train the model, with modifications to do some logging. </a:t>
+            </a:r>
+          </a:p>
+        </p:txBody>
+      </p:sp>
+    </p:spTree>
+    <p:extLst>
+      <p:ext uri="{BB962C8B-B14F-4D97-AF65-F5344CB8AC3E}">
+        <p14:creationId xmlns:p14="http://schemas.microsoft.com/office/powerpoint/2010/main" val="1449264906"/>
       </p:ext>
     </p:extLst>
   </p:cSld>
@@ -4683,7 +7538,7 @@
           <p:cNvPr id="2" name="Title 1">
             <a:extLst>
               <a:ext uri="{FF2B5EF4-FFF2-40B4-BE49-F238E27FC236}">
-                <a16:creationId xmlns:a16="http://schemas.microsoft.com/office/drawing/2014/main" id="{8F7B8909-3774-0839-1DF2-8877CABE9F8D}"/>
+                <a16:creationId xmlns:a16="http://schemas.microsoft.com/office/drawing/2014/main" id="{8DD816BC-F271-6D58-EDBE-69485AC24684}"/>
               </a:ext>
             </a:extLst>
           </p:cNvPr>
@@ -4701,7 +7556,7 @@
           <a:p>
             <a:r>
               <a:rPr lang="en-US" dirty="0"/>
-              <a:t>Datasets</a:t>
+              <a:t>Bonus – Gradient Tracking</a:t>
             </a:r>
           </a:p>
         </p:txBody>
@@ -4711,7 +7566,7 @@
           <p:cNvPr id="3" name="Content Placeholder 2">
             <a:extLst>
               <a:ext uri="{FF2B5EF4-FFF2-40B4-BE49-F238E27FC236}">
-                <a16:creationId xmlns:a16="http://schemas.microsoft.com/office/drawing/2014/main" id="{F85FE1AF-B80B-772B-4432-B942257D9AE8}"/>
+                <a16:creationId xmlns:a16="http://schemas.microsoft.com/office/drawing/2014/main" id="{242771E4-504E-DD9A-7BFB-6EC27887CE55}"/>
               </a:ext>
             </a:extLst>
           </p:cNvPr>
@@ -4724,8 +7579,8 @@
         </p:nvSpPr>
         <p:spPr>
           <a:xfrm>
-            <a:off x="1451579" y="1921079"/>
-            <a:ext cx="9603275" cy="4132401"/>
+            <a:off x="1137146" y="1853754"/>
+            <a:ext cx="10035351" cy="4199727"/>
           </a:xfrm>
         </p:spPr>
         <p:txBody>
@@ -4734,51 +7589,78 @@
           <a:p>
             <a:r>
               <a:rPr lang="en-US" dirty="0"/>
-              <a:t>Datasets have 3 mandatory parts:</a:t>
-            </a:r>
-          </a:p>
-          <a:p>
-            <a:pPr lvl="1"/>
-            <a:r>
-              <a:rPr lang="en-US" dirty="0"/>
-              <a:t>Len – returns the number of items in the dataset. </a:t>
-            </a:r>
-          </a:p>
-          <a:p>
-            <a:pPr lvl="1"/>
-            <a:r>
-              <a:rPr lang="en-US" dirty="0"/>
-              <a:t>Init – sets up the data initially – pass in the data or aim at the location of data. </a:t>
-            </a:r>
-          </a:p>
-          <a:p>
-            <a:pPr lvl="1"/>
+              <a:t>One (possibly annoying) thing about </a:t>
+            </a:r>
             <a:r>
               <a:rPr lang="en-US" dirty="0" err="1"/>
-              <a:t>Getitem</a:t>
-            </a:r>
-            <a:r>
-              <a:rPr lang="en-US" dirty="0"/>
-              <a:t> – returns an item from the dataset. </a:t>
-            </a:r>
-          </a:p>
-          <a:p>
-            <a:r>
-              <a:rPr lang="en-US" dirty="0"/>
-              <a:t>In a dataset we don’t look at the entire data and address/select specific items. </a:t>
-            </a:r>
-          </a:p>
-          <a:p>
-            <a:pPr lvl="1"/>
-            <a:r>
-              <a:rPr lang="en-US" dirty="0"/>
-              <a:t>If we want data, we need to request a sample, then manipulate that. </a:t>
-            </a:r>
-          </a:p>
-          <a:p>
-            <a:r>
-              <a:rPr lang="en-US" dirty="0"/>
-              <a:t>We can also build in preparation steps such as transformations. </a:t>
+              <a:t>pytorch</a:t>
+            </a:r>
+            <a:r>
+              <a:rPr lang="en-US" dirty="0"/>
+              <a:t> is that we must manage if gradients are tracked. </a:t>
+            </a:r>
+          </a:p>
+          <a:p>
+            <a:pPr lvl="1"/>
+            <a:r>
+              <a:rPr lang="en-US" dirty="0"/>
+              <a:t>If training, the model needs to calculate gradients to learn. </a:t>
+            </a:r>
+          </a:p>
+          <a:p>
+            <a:pPr lvl="1"/>
+            <a:r>
+              <a:rPr lang="en-US" dirty="0"/>
+              <a:t>If evaluating the model doesn’t, we just need predictions. </a:t>
+            </a:r>
+          </a:p>
+          <a:p>
+            <a:r>
+              <a:rPr lang="en-US" dirty="0"/>
+              <a:t>In code, we normally have two things to do to separate train/not train:</a:t>
+            </a:r>
+          </a:p>
+          <a:p>
+            <a:pPr lvl="1"/>
+            <a:r>
+              <a:rPr lang="en-US" dirty="0"/>
+              <a:t>Use </a:t>
+            </a:r>
+            <a:r>
+              <a:rPr lang="en-US" dirty="0" err="1"/>
+              <a:t>set_grad_enabled</a:t>
+            </a:r>
+            <a:r>
+              <a:rPr lang="en-US" dirty="0"/>
+              <a:t> or </a:t>
+            </a:r>
+            <a:r>
+              <a:rPr lang="en-US" dirty="0" err="1"/>
+              <a:t>no_grad</a:t>
+            </a:r>
+            <a:r>
+              <a:rPr lang="en-US" dirty="0"/>
+              <a:t> to manage if gradient tracking is on.  </a:t>
+            </a:r>
+          </a:p>
+          <a:p>
+            <a:pPr lvl="1"/>
+            <a:r>
+              <a:rPr lang="en-US" dirty="0"/>
+              <a:t>Set the model to train or eval mode to tell layers like dropouts if they should work. </a:t>
+            </a:r>
+          </a:p>
+          <a:p>
+            <a:r>
+              <a:rPr lang="en-US" dirty="0"/>
+              <a:t>This is mostly for context – you should understand it to some degree, but the deeper knowledge of this stuff is for more complex work (i.e. something other than stock layers).</a:t>
+            </a:r>
+          </a:p>
+          <a:p>
+            <a:pPr lvl="1"/>
+            <a:r>
+              <a:rPr lang="en-US" dirty="0"/>
+              <a:t>I think everything defaults to “on”, and will work by default, but don’t quote me. </a:t>
             </a:r>
           </a:p>
         </p:txBody>
@@ -4786,7 +7668,7 @@
     </p:spTree>
     <p:extLst>
       <p:ext uri="{BB962C8B-B14F-4D97-AF65-F5344CB8AC3E}">
-        <p14:creationId xmlns:p14="http://schemas.microsoft.com/office/powerpoint/2010/main" val="3883359744"/>
+        <p14:creationId xmlns:p14="http://schemas.microsoft.com/office/powerpoint/2010/main" val="3703327586"/>
       </p:ext>
     </p:extLst>
   </p:cSld>
@@ -4818,7 +7700,7 @@
           <p:cNvPr id="2" name="Title 1">
             <a:extLst>
               <a:ext uri="{FF2B5EF4-FFF2-40B4-BE49-F238E27FC236}">
-                <a16:creationId xmlns:a16="http://schemas.microsoft.com/office/drawing/2014/main" id="{98EDF7BC-8DDF-D555-337E-001600910EC5}"/>
+                <a16:creationId xmlns:a16="http://schemas.microsoft.com/office/drawing/2014/main" id="{23C8124F-0324-366C-9BF8-24BF613FEA6C}"/>
               </a:ext>
             </a:extLst>
           </p:cNvPr>
@@ -4836,7 +7718,7 @@
           <a:p>
             <a:r>
               <a:rPr lang="en-US" dirty="0" err="1"/>
-              <a:t>Dataloaders</a:t>
+              <a:t>AutoGrad</a:t>
             </a:r>
             <a:endParaRPr lang="en-US" dirty="0"/>
           </a:p>
@@ -4847,7 +7729,7 @@
           <p:cNvPr id="3" name="Content Placeholder 2">
             <a:extLst>
               <a:ext uri="{FF2B5EF4-FFF2-40B4-BE49-F238E27FC236}">
-                <a16:creationId xmlns:a16="http://schemas.microsoft.com/office/drawing/2014/main" id="{881ABB9A-491D-31F7-7C03-3891D012967B}"/>
+                <a16:creationId xmlns:a16="http://schemas.microsoft.com/office/drawing/2014/main" id="{51131315-4FC3-F6F9-F2C6-03222F556A91}"/>
               </a:ext>
             </a:extLst>
           </p:cNvPr>
@@ -4860,96 +7742,109 @@
         </p:nvSpPr>
         <p:spPr>
           <a:xfrm>
-            <a:off x="1451579" y="1963024"/>
-            <a:ext cx="9603275" cy="3942826"/>
+            <a:off x="84083" y="1853754"/>
+            <a:ext cx="6349990" cy="4199727"/>
           </a:xfrm>
         </p:spPr>
         <p:txBody>
-          <a:bodyPr/>
-          <a:lstStyle/>
-          <a:p>
-            <a:r>
-              <a:rPr lang="en-US" dirty="0"/>
-              <a:t>The </a:t>
-            </a:r>
+          <a:bodyPr>
+            <a:normAutofit/>
+          </a:bodyPr>
+          <a:lstStyle/>
+          <a:p>
             <a:r>
               <a:rPr lang="en-US" dirty="0" err="1"/>
-              <a:t>dataloader</a:t>
-            </a:r>
-            <a:r>
-              <a:rPr lang="en-US" dirty="0"/>
-              <a:t> takes in the dataset and provides data in a model friendly way. </a:t>
-            </a:r>
-          </a:p>
-          <a:p>
-            <a:r>
-              <a:rPr lang="en-US" dirty="0"/>
-              <a:t>A dataset provides one item at a time with </a:t>
+              <a:t>Autograd</a:t>
+            </a:r>
+            <a:r>
+              <a:rPr lang="en-US" dirty="0"/>
+              <a:t> is part of </a:t>
             </a:r>
             <a:r>
               <a:rPr lang="en-US" dirty="0" err="1"/>
-              <a:t>getitem</a:t>
-            </a:r>
-            <a:r>
-              <a:rPr lang="en-US" dirty="0"/>
-              <a:t>. </a:t>
-            </a:r>
-          </a:p>
-          <a:p>
-            <a:pPr lvl="1"/>
-            <a:r>
-              <a:rPr lang="en-US" dirty="0"/>
-              <a:t>The </a:t>
-            </a:r>
-            <a:r>
-              <a:rPr lang="en-US" dirty="0" err="1"/>
-              <a:t>dataloader</a:t>
-            </a:r>
-            <a:r>
-              <a:rPr lang="en-US" dirty="0"/>
-              <a:t> can be set to provide one batch at a time. </a:t>
-            </a:r>
-          </a:p>
-          <a:p>
-            <a:pPr lvl="1"/>
-            <a:r>
-              <a:rPr lang="en-US" dirty="0"/>
-              <a:t>We can also tell it to do things like shuffle the data. </a:t>
-            </a:r>
-          </a:p>
-          <a:p>
-            <a:r>
-              <a:rPr lang="en-US" dirty="0"/>
-              <a:t>There are several other things we can do, mostly related to performance. </a:t>
-            </a:r>
-          </a:p>
-          <a:p>
-            <a:r>
-              <a:rPr lang="en-US" dirty="0"/>
-              <a:t>The </a:t>
-            </a:r>
-            <a:r>
-              <a:rPr lang="en-US" dirty="0" err="1"/>
-              <a:t>dataloader</a:t>
-            </a:r>
-            <a:r>
-              <a:rPr lang="en-US" dirty="0"/>
-              <a:t> is provided to the model to train. </a:t>
-            </a:r>
-          </a:p>
-          <a:p>
-            <a:pPr lvl="1"/>
-            <a:r>
-              <a:rPr lang="en-US" dirty="0"/>
-              <a:t>It will provide a batch of data at a time to the training loop. </a:t>
-            </a:r>
-          </a:p>
-        </p:txBody>
-      </p:sp>
+              <a:t>PyTorch</a:t>
+            </a:r>
+            <a:r>
+              <a:rPr lang="en-US" dirty="0"/>
+              <a:t> that, well, automatically calculates gradients. </a:t>
+            </a:r>
+          </a:p>
+          <a:p>
+            <a:pPr lvl="1"/>
+            <a:r>
+              <a:rPr lang="en-US" dirty="0"/>
+              <a:t>This saves work from us, we don’t need to do calculus. </a:t>
+            </a:r>
+          </a:p>
+          <a:p>
+            <a:r>
+              <a:rPr lang="en-US" dirty="0"/>
+              <a:t>Recall in the scratch example, we needed to provide pre-differentiated functions and do gradient calculations. </a:t>
+            </a:r>
+          </a:p>
+          <a:p>
+            <a:pPr lvl="1"/>
+            <a:r>
+              <a:rPr lang="en-US" dirty="0"/>
+              <a:t>Each calculation had an opposite operation. </a:t>
+            </a:r>
+          </a:p>
+          <a:p>
+            <a:pPr lvl="1"/>
+            <a:r>
+              <a:rPr lang="en-US" dirty="0"/>
+              <a:t>E.g. diff loss functions. </a:t>
+            </a:r>
+          </a:p>
+          <a:p>
+            <a:r>
+              <a:rPr lang="en-US" dirty="0"/>
+              <a:t>In this pic, the red is what needs to be done. </a:t>
+            </a:r>
+          </a:p>
+          <a:p>
+            <a:pPr lvl="1"/>
+            <a:r>
+              <a:rPr lang="en-US" dirty="0"/>
+              <a:t>The blue is the set of calculations in the backwards pass that are the opposite of the initial steps. </a:t>
+            </a:r>
+          </a:p>
+        </p:txBody>
+      </p:sp>
+      <p:pic>
+        <p:nvPicPr>
+          <p:cNvPr id="7" name="Picture 6" descr="image">
+            <a:extLst>
+              <a:ext uri="{FF2B5EF4-FFF2-40B4-BE49-F238E27FC236}">
+                <a16:creationId xmlns:a16="http://schemas.microsoft.com/office/drawing/2014/main" id="{59C2232C-105E-4425-4230-EF2FBF5322F8}"/>
+              </a:ext>
+            </a:extLst>
+          </p:cNvPr>
+          <p:cNvPicPr>
+            <a:picLocks noChangeAspect="1"/>
+          </p:cNvPicPr>
+          <p:nvPr/>
+        </p:nvPicPr>
+        <p:blipFill>
+          <a:blip r:embed="rId2"/>
+          <a:stretch>
+            <a:fillRect/>
+          </a:stretch>
+        </p:blipFill>
+        <p:spPr>
+          <a:xfrm>
+            <a:off x="6434072" y="1269777"/>
+            <a:ext cx="5757928" cy="4318446"/>
+          </a:xfrm>
+          <a:prstGeom prst="rect">
+            <a:avLst/>
+          </a:prstGeom>
+        </p:spPr>
+      </p:pic>
     </p:spTree>
     <p:extLst>
       <p:ext uri="{BB962C8B-B14F-4D97-AF65-F5344CB8AC3E}">
-        <p14:creationId xmlns:p14="http://schemas.microsoft.com/office/powerpoint/2010/main" val="3486626440"/>
+        <p14:creationId xmlns:p14="http://schemas.microsoft.com/office/powerpoint/2010/main" val="1083644844"/>
       </p:ext>
     </p:extLst>
   </p:cSld>
@@ -4962,6 +7857,30 @@
 <file path=ppt/slides/slide6.xml><?xml version="1.0" encoding="utf-8"?>
 <p:sld xmlns:a="http://schemas.openxmlformats.org/drawingml/2006/main" xmlns:r="http://schemas.openxmlformats.org/officeDocument/2006/relationships" xmlns:p="http://schemas.openxmlformats.org/presentationml/2006/main">
   <p:cSld>
+    <p:bg>
+      <p:bgPr>
+        <a:gradFill rotWithShape="1">
+          <a:gsLst>
+            <a:gs pos="0">
+              <a:schemeClr val="bg2">
+                <a:tint val="94000"/>
+                <a:satMod val="80000"/>
+                <a:lumMod val="106000"/>
+              </a:schemeClr>
+            </a:gs>
+            <a:gs pos="100000">
+              <a:schemeClr val="bg2">
+                <a:shade val="80000"/>
+              </a:schemeClr>
+            </a:gs>
+          </a:gsLst>
+          <a:path path="circle">
+            <a:fillToRect l="43000" r="43000" b="100000"/>
+          </a:path>
+        </a:gradFill>
+        <a:effectLst/>
+      </p:bgPr>
+    </p:bg>
     <p:spTree>
       <p:nvGrpSpPr>
         <p:cNvPr id="1" name=""/>
@@ -4976,12 +7895,120 @@
           <a:chExt cx="0" cy="0"/>
         </a:xfrm>
       </p:grpSpPr>
+      <p:sp useBgFill="1">
+        <p:nvSpPr>
+          <p:cNvPr id="9" name="Rectangle 8">
+            <a:extLst>
+              <a:ext uri="{FF2B5EF4-FFF2-40B4-BE49-F238E27FC236}">
+                <a16:creationId xmlns:a16="http://schemas.microsoft.com/office/drawing/2014/main" id="{35C3D674-3D59-4E93-80CA-0C0A9095E816}"/>
+              </a:ext>
+              <a:ext uri="{C183D7F6-B498-43B3-948B-1728B52AA6E4}">
+                <adec:decorative xmlns:adec="http://schemas.microsoft.com/office/drawing/2017/decorative" val="1"/>
+              </a:ext>
+            </a:extLst>
+          </p:cNvPr>
+          <p:cNvSpPr>
+            <a:spLocks noGrp="1" noRot="1" noChangeAspect="1" noMove="1" noResize="1" noEditPoints="1" noAdjustHandles="1" noChangeArrowheads="1" noChangeShapeType="1" noTextEdit="1"/>
+          </p:cNvSpPr>
+          <p:nvPr>
+            <p:extLst>
+              <p:ext uri="{386F3935-93C4-4BCD-93E2-E3B085C9AB24}">
+                <p16:designElem xmlns:p16="http://schemas.microsoft.com/office/powerpoint/2015/main" val="1"/>
+              </p:ext>
+            </p:extLst>
+          </p:nvPr>
+        </p:nvSpPr>
+        <p:spPr>
+          <a:xfrm>
+            <a:off x="2" y="0"/>
+            <a:ext cx="12191695" cy="6858000"/>
+          </a:xfrm>
+          <a:prstGeom prst="rect">
+            <a:avLst/>
+          </a:prstGeom>
+          <a:ln>
+            <a:noFill/>
+          </a:ln>
+        </p:spPr>
+        <p:style>
+          <a:lnRef idx="2">
+            <a:schemeClr val="accent1">
+              <a:shade val="50000"/>
+            </a:schemeClr>
+          </a:lnRef>
+          <a:fillRef idx="1">
+            <a:schemeClr val="accent1"/>
+          </a:fillRef>
+          <a:effectRef idx="0">
+            <a:schemeClr val="accent1"/>
+          </a:effectRef>
+          <a:fontRef idx="minor">
+            <a:schemeClr val="lt1"/>
+          </a:fontRef>
+        </p:style>
+        <p:txBody>
+          <a:bodyPr rtlCol="0" anchor="ctr"/>
+          <a:lstStyle/>
+          <a:p>
+            <a:pPr algn="ctr"/>
+            <a:endParaRPr lang="en-US"/>
+          </a:p>
+        </p:txBody>
+      </p:sp>
+      <p:cxnSp>
+        <p:nvCxnSpPr>
+          <p:cNvPr id="11" name="Straight Connector 10">
+            <a:extLst>
+              <a:ext uri="{FF2B5EF4-FFF2-40B4-BE49-F238E27FC236}">
+                <a16:creationId xmlns:a16="http://schemas.microsoft.com/office/drawing/2014/main" id="{C884B8F8-FDC9-498B-9960-5D7260AFCB03}"/>
+              </a:ext>
+              <a:ext uri="{C183D7F6-B498-43B3-948B-1728B52AA6E4}">
+                <adec:decorative xmlns:adec="http://schemas.microsoft.com/office/drawing/2017/decorative" val="1"/>
+              </a:ext>
+            </a:extLst>
+          </p:cNvPr>
+          <p:cNvCxnSpPr>
+            <a:cxnSpLocks noGrp="1" noRot="1" noChangeAspect="1" noMove="1" noResize="1" noEditPoints="1" noAdjustHandles="1" noChangeArrowheads="1" noChangeShapeType="1"/>
+          </p:cNvCxnSpPr>
+          <p:nvPr>
+            <p:extLst>
+              <p:ext uri="{386F3935-93C4-4BCD-93E2-E3B085C9AB24}">
+                <p16:designElem xmlns:p16="http://schemas.microsoft.com/office/powerpoint/2015/main" val="1"/>
+              </p:ext>
+            </p:extLst>
+          </p:nvPr>
+        </p:nvCxnSpPr>
+        <p:spPr>
+          <a:xfrm>
+            <a:off x="1453896" y="1847088"/>
+            <a:ext cx="4177373" cy="0"/>
+          </a:xfrm>
+          <a:prstGeom prst="line">
+            <a:avLst/>
+          </a:prstGeom>
+          <a:ln w="31750"/>
+        </p:spPr>
+        <p:style>
+          <a:lnRef idx="3">
+            <a:schemeClr val="accent1"/>
+          </a:lnRef>
+          <a:fillRef idx="0">
+            <a:schemeClr val="accent1"/>
+          </a:fillRef>
+          <a:effectRef idx="2">
+            <a:schemeClr val="accent1"/>
+          </a:effectRef>
+          <a:fontRef idx="minor">
+            <a:schemeClr val="tx1"/>
+          </a:fontRef>
+        </p:style>
+      </p:cxnSp>
       <p:sp>
         <p:nvSpPr>
           <p:cNvPr id="2" name="Title 1">
             <a:extLst>
               <a:ext uri="{FF2B5EF4-FFF2-40B4-BE49-F238E27FC236}">
-                <a16:creationId xmlns:a16="http://schemas.microsoft.com/office/drawing/2014/main" id="{CD517989-57C5-833E-EB5F-4F5040A80D36}"/>
+                <a16:creationId xmlns:a16="http://schemas.microsoft.com/office/drawing/2014/main" id="{CFA5D5EA-8849-C735-2C1C-4CD47A02B715}"/>
               </a:ext>
             </a:extLst>
           </p:cNvPr>
@@ -4992,15 +8019,96 @@
             <p:ph type="title"/>
           </p:nvPr>
         </p:nvSpPr>
-        <p:spPr/>
-        <p:txBody>
-          <a:bodyPr/>
-          <a:lstStyle/>
-          <a:p>
-            <a:r>
-              <a:rPr lang="en-US" dirty="0"/>
-              <a:t>The Pipeline</a:t>
-            </a:r>
+        <p:spPr>
+          <a:xfrm>
+            <a:off x="1451580" y="804520"/>
+            <a:ext cx="4176511" cy="1049235"/>
+          </a:xfrm>
+        </p:spPr>
+        <p:txBody>
+          <a:bodyPr>
+            <a:normAutofit/>
+          </a:bodyPr>
+          <a:lstStyle/>
+          <a:p>
+            <a:r>
+              <a:rPr lang="en-US" dirty="0"/>
+              <a:t>Graph</a:t>
+            </a:r>
+          </a:p>
+        </p:txBody>
+      </p:sp>
+      <p:sp>
+        <p:nvSpPr>
+          <p:cNvPr id="13" name="Rectangle 12">
+            <a:extLst>
+              <a:ext uri="{FF2B5EF4-FFF2-40B4-BE49-F238E27FC236}">
+                <a16:creationId xmlns:a16="http://schemas.microsoft.com/office/drawing/2014/main" id="{EF2A81E1-BCBE-426B-8C09-33274E69409D}"/>
+              </a:ext>
+              <a:ext uri="{C183D7F6-B498-43B3-948B-1728B52AA6E4}">
+                <adec:decorative xmlns:adec="http://schemas.microsoft.com/office/drawing/2017/decorative" val="1"/>
+              </a:ext>
+            </a:extLst>
+          </p:cNvPr>
+          <p:cNvSpPr>
+            <a:spLocks noGrp="1" noRot="1" noChangeAspect="1" noMove="1" noResize="1" noEditPoints="1" noAdjustHandles="1" noChangeArrowheads="1" noChangeShapeType="1" noTextEdit="1"/>
+          </p:cNvSpPr>
+          <p:nvPr>
+            <p:extLst>
+              <p:ext uri="{386F3935-93C4-4BCD-93E2-E3B085C9AB24}">
+                <p16:designElem xmlns:p16="http://schemas.microsoft.com/office/powerpoint/2015/main" val="1"/>
+              </p:ext>
+            </p:extLst>
+          </p:nvPr>
+        </p:nvSpPr>
+        <p:spPr>
+          <a:xfrm>
+            <a:off x="0" y="2019476"/>
+            <a:ext cx="12192000" cy="4105941"/>
+          </a:xfrm>
+          <a:prstGeom prst="rect">
+            <a:avLst/>
+          </a:prstGeom>
+          <a:gradFill flip="none" rotWithShape="1">
+            <a:gsLst>
+              <a:gs pos="0">
+                <a:schemeClr val="bg2">
+                  <a:alpha val="0"/>
+                </a:schemeClr>
+              </a:gs>
+              <a:gs pos="100000">
+                <a:schemeClr val="bg2"/>
+              </a:gs>
+            </a:gsLst>
+            <a:lin ang="5400000" scaled="0"/>
+            <a:tileRect/>
+          </a:gradFill>
+          <a:ln>
+            <a:noFill/>
+          </a:ln>
+        </p:spPr>
+        <p:style>
+          <a:lnRef idx="2">
+            <a:schemeClr val="accent1">
+              <a:shade val="50000"/>
+            </a:schemeClr>
+          </a:lnRef>
+          <a:fillRef idx="1">
+            <a:schemeClr val="accent1"/>
+          </a:fillRef>
+          <a:effectRef idx="0">
+            <a:schemeClr val="accent1"/>
+          </a:effectRef>
+          <a:fontRef idx="minor">
+            <a:schemeClr val="lt1"/>
+          </a:fontRef>
+        </p:style>
+        <p:txBody>
+          <a:bodyPr rtlCol="0" anchor="ctr"/>
+          <a:lstStyle/>
+          <a:p>
+            <a:pPr lvl="0" algn="ctr"/>
+            <a:endParaRPr lang="en-US"/>
           </a:p>
         </p:txBody>
       </p:sp>
@@ -5009,7 +8117,7 @@
           <p:cNvPr id="3" name="Content Placeholder 2">
             <a:extLst>
               <a:ext uri="{FF2B5EF4-FFF2-40B4-BE49-F238E27FC236}">
-                <a16:creationId xmlns:a16="http://schemas.microsoft.com/office/drawing/2014/main" id="{635966C6-22A5-ADCA-0E20-979C815D4FA9}"/>
+                <a16:creationId xmlns:a16="http://schemas.microsoft.com/office/drawing/2014/main" id="{4206B1D2-C89B-0A5F-3CD2-AFB995B033C0}"/>
               </a:ext>
             </a:extLst>
           </p:cNvPr>
@@ -5022,99 +8130,231 @@
         </p:nvSpPr>
         <p:spPr>
           <a:xfrm>
-            <a:off x="6897249" y="2015732"/>
-            <a:ext cx="5214824" cy="4037749"/>
+            <a:off x="0" y="1890463"/>
+            <a:ext cx="5318234" cy="4163005"/>
           </a:xfrm>
         </p:spPr>
         <p:txBody>
-          <a:bodyPr/>
-          <a:lstStyle/>
-          <a:p>
-            <a:r>
-              <a:rPr lang="en-US" dirty="0"/>
-              <a:t>The dataset/loader can do most pipeline stuff.</a:t>
-            </a:r>
-          </a:p>
-          <a:p>
-            <a:r>
-              <a:rPr lang="en-US" dirty="0"/>
-              <a:t>The dataset interacts with actual data/labels.</a:t>
-            </a:r>
-          </a:p>
-          <a:p>
-            <a:pPr lvl="1"/>
-            <a:r>
-              <a:rPr lang="en-US" dirty="0"/>
-              <a:t>It can apply transformations to data. </a:t>
-            </a:r>
-          </a:p>
-          <a:p>
-            <a:r>
-              <a:rPr lang="en-US" dirty="0"/>
-              <a:t>The </a:t>
+          <a:bodyPr>
+            <a:normAutofit/>
+          </a:bodyPr>
+          <a:lstStyle/>
+          <a:p>
+            <a:r>
+              <a:rPr lang="en-US" dirty="0"/>
+              <a:t>Internally, </a:t>
             </a:r>
             <a:r>
               <a:rPr lang="en-US" dirty="0" err="1"/>
-              <a:t>dataloader</a:t>
-            </a:r>
-            <a:r>
-              <a:rPr lang="en-US" dirty="0"/>
-              <a:t> takes that prepared data and manages providing it as needed </a:t>
+              <a:t>PyTorch</a:t>
+            </a:r>
+            <a:r>
+              <a:rPr lang="en-US" dirty="0"/>
+              <a:t> builds a graph of the executions and tensors in the model. </a:t>
+            </a:r>
+          </a:p>
+          <a:p>
+            <a:pPr lvl="1"/>
+            <a:r>
+              <a:rPr lang="en-US" dirty="0"/>
+              <a:t>As it goes forward, inverse </a:t>
+            </a:r>
+            <a:r>
+              <a:rPr lang="en-US" dirty="0" err="1"/>
+              <a:t>opps</a:t>
+            </a:r>
+            <a:r>
+              <a:rPr lang="en-US" dirty="0"/>
+              <a:t> are added.</a:t>
+            </a:r>
+          </a:p>
+          <a:p>
+            <a:r>
+              <a:rPr lang="en-US" dirty="0" err="1"/>
+              <a:t>PyTorch</a:t>
+            </a:r>
+            <a:r>
+              <a:rPr lang="en-US" dirty="0"/>
+              <a:t> does this dynamically (</a:t>
+            </a:r>
+            <a:r>
+              <a:rPr lang="en-US" dirty="0" err="1"/>
+              <a:t>tf</a:t>
+            </a:r>
+            <a:r>
+              <a:rPr lang="en-US" dirty="0"/>
+              <a:t> doesn’t). </a:t>
+            </a:r>
+          </a:p>
+          <a:p>
+            <a:pPr lvl="1"/>
+            <a:r>
+              <a:rPr lang="en-US" dirty="0"/>
+              <a:t>This is one of </a:t>
+            </a:r>
+            <a:r>
+              <a:rPr lang="en-US" dirty="0" err="1"/>
+              <a:t>PyTorch’s</a:t>
+            </a:r>
+            <a:r>
+              <a:rPr lang="en-US" dirty="0"/>
+              <a:t> big things. </a:t>
+            </a:r>
+          </a:p>
+          <a:p>
+            <a:pPr lvl="1"/>
+            <a:r>
+              <a:rPr lang="en-US" dirty="0"/>
+              <a:t>Allows for changes to model structure. </a:t>
+            </a:r>
+          </a:p>
+          <a:p>
+            <a:r>
+              <a:rPr lang="en-US" dirty="0"/>
+              <a:t>More flexible and easier to debug. </a:t>
+            </a:r>
+          </a:p>
+          <a:p>
+            <a:pPr lvl="1"/>
+            <a:r>
+              <a:rPr lang="en-US" dirty="0"/>
+              <a:t>Below our level of focus. </a:t>
             </a:r>
           </a:p>
         </p:txBody>
       </p:sp>
       <p:pic>
         <p:nvPicPr>
-          <p:cNvPr id="1026" name="Picture 2" descr="Do You Visualize DataLoaders for Deep Neural Networks?">
+          <p:cNvPr id="4" name="Picture 3" descr="Overview of PyTorch Autograd Engine – PyTorch">
             <a:extLst>
               <a:ext uri="{FF2B5EF4-FFF2-40B4-BE49-F238E27FC236}">
-                <a16:creationId xmlns:a16="http://schemas.microsoft.com/office/drawing/2014/main" id="{A06C68C4-A2C2-CE55-6127-D6D818D9ADF3}"/>
+                <a16:creationId xmlns:a16="http://schemas.microsoft.com/office/drawing/2014/main" id="{1FBDDE87-1C20-2C24-250A-775AE3851187}"/>
               </a:ext>
             </a:extLst>
           </p:cNvPr>
           <p:cNvPicPr>
-            <a:picLocks noChangeAspect="1" noChangeArrowheads="1"/>
+            <a:picLocks noChangeAspect="1"/>
           </p:cNvPicPr>
           <p:nvPr/>
         </p:nvPicPr>
-        <p:blipFill rotWithShape="1">
-          <a:blip r:embed="rId2">
-            <a:extLst>
-              <a:ext uri="{28A0092B-C50C-407E-A947-70E740481C1C}">
-                <a14:useLocalDpi xmlns:a14="http://schemas.microsoft.com/office/drawing/2010/main" val="0"/>
-              </a:ext>
-            </a:extLst>
-          </a:blip>
-          <a:srcRect t="9348" b="8046"/>
+        <p:blipFill>
+          <a:blip r:embed="rId2"/>
           <a:stretch>
             <a:fillRect/>
           </a:stretch>
         </p:blipFill>
-        <p:spPr bwMode="auto">
+        <p:spPr>
           <a:xfrm>
-            <a:off x="79927" y="2015732"/>
-            <a:ext cx="6817323" cy="3857297"/>
+            <a:off x="5162342" y="43374"/>
+            <a:ext cx="7029355" cy="6010097"/>
           </a:xfrm>
           <a:prstGeom prst="rect">
             <a:avLst/>
           </a:prstGeom>
-          <a:noFill/>
-          <a:extLst>
-            <a:ext uri="{909E8E84-426E-40DD-AFC4-6F175D3DCCD1}">
-              <a14:hiddenFill xmlns:a14="http://schemas.microsoft.com/office/drawing/2010/main">
-                <a:solidFill>
-                  <a:srgbClr val="FFFFFF"/>
-                </a:solidFill>
-              </a14:hiddenFill>
-            </a:ext>
-          </a:extLst>
         </p:spPr>
       </p:pic>
+      <p:pic>
+        <p:nvPicPr>
+          <p:cNvPr id="15" name="Picture 14">
+            <a:extLst>
+              <a:ext uri="{FF2B5EF4-FFF2-40B4-BE49-F238E27FC236}">
+                <a16:creationId xmlns:a16="http://schemas.microsoft.com/office/drawing/2014/main" id="{39D1DDD4-5BB3-45BA-B9B3-06B62299AD79}"/>
+              </a:ext>
+              <a:ext uri="{C183D7F6-B498-43B3-948B-1728B52AA6E4}">
+                <adec:decorative xmlns:adec="http://schemas.microsoft.com/office/drawing/2017/decorative" val="1"/>
+              </a:ext>
+            </a:extLst>
+          </p:cNvPr>
+          <p:cNvPicPr>
+            <a:picLocks noGrp="1" noRot="1" noChangeAspect="1" noMove="1" noResize="1" noEditPoints="1" noAdjustHandles="1" noChangeArrowheads="1" noChangeShapeType="1" noCrop="1"/>
+          </p:cNvPicPr>
+          <p:nvPr>
+            <p:extLst>
+              <p:ext uri="{386F3935-93C4-4BCD-93E2-E3B085C9AB24}">
+                <p16:designElem xmlns:p16="http://schemas.microsoft.com/office/powerpoint/2015/main" val="1"/>
+              </p:ext>
+            </p:extLst>
+          </p:nvPr>
+        </p:nvPicPr>
+        <p:blipFill rotWithShape="1">
+          <a:blip r:embed="rId3">
+            <a:extLst>
+              <a:ext uri="{28A0092B-C50C-407E-A947-70E740481C1C}">
+                <a14:useLocalDpi xmlns:a14="http://schemas.microsoft.com/office/drawing/2010/main" val="0"/>
+              </a:ext>
+            </a:extLst>
+          </a:blip>
+          <a:srcRect t="1538" b="-1538"/>
+          <a:stretch/>
+        </p:blipFill>
+        <p:spPr bwMode="black">
+          <a:xfrm>
+            <a:off x="0" y="6126480"/>
+            <a:ext cx="12192000" cy="742950"/>
+          </a:xfrm>
+          <a:prstGeom prst="rect">
+            <a:avLst/>
+          </a:prstGeom>
+        </p:spPr>
+      </p:pic>
+      <p:cxnSp>
+        <p:nvCxnSpPr>
+          <p:cNvPr id="17" name="Straight Connector 16">
+            <a:extLst>
+              <a:ext uri="{FF2B5EF4-FFF2-40B4-BE49-F238E27FC236}">
+                <a16:creationId xmlns:a16="http://schemas.microsoft.com/office/drawing/2014/main" id="{A24DAE64-2302-42EA-8239-F2F0775CA5AD}"/>
+              </a:ext>
+              <a:ext uri="{C183D7F6-B498-43B3-948B-1728B52AA6E4}">
+                <adec:decorative xmlns:adec="http://schemas.microsoft.com/office/drawing/2017/decorative" val="1"/>
+              </a:ext>
+            </a:extLst>
+          </p:cNvPr>
+          <p:cNvCxnSpPr>
+            <a:cxnSpLocks noGrp="1" noRot="1" noChangeAspect="1" noMove="1" noResize="1" noEditPoints="1" noAdjustHandles="1" noChangeArrowheads="1" noChangeShapeType="1"/>
+          </p:cNvCxnSpPr>
+          <p:nvPr>
+            <p:extLst>
+              <p:ext uri="{386F3935-93C4-4BCD-93E2-E3B085C9AB24}">
+                <p16:designElem xmlns:p16="http://schemas.microsoft.com/office/powerpoint/2015/main" val="1"/>
+              </p:ext>
+            </p:extLst>
+          </p:nvPr>
+        </p:nvCxnSpPr>
+        <p:spPr>
+          <a:xfrm>
+            <a:off x="0" y="6128413"/>
+            <a:ext cx="12192000" cy="0"/>
+          </a:xfrm>
+          <a:prstGeom prst="line">
+            <a:avLst/>
+          </a:prstGeom>
+          <a:ln w="12700">
+            <a:solidFill>
+              <a:srgbClr val="000001">
+                <a:alpha val="20000"/>
+              </a:srgbClr>
+            </a:solidFill>
+          </a:ln>
+        </p:spPr>
+        <p:style>
+          <a:lnRef idx="1">
+            <a:schemeClr val="accent1"/>
+          </a:lnRef>
+          <a:fillRef idx="0">
+            <a:schemeClr val="accent1"/>
+          </a:fillRef>
+          <a:effectRef idx="0">
+            <a:schemeClr val="accent1"/>
+          </a:effectRef>
+          <a:fontRef idx="minor">
+            <a:schemeClr val="tx1"/>
+          </a:fontRef>
+        </p:style>
+      </p:cxnSp>
     </p:spTree>
     <p:extLst>
       <p:ext uri="{BB962C8B-B14F-4D97-AF65-F5344CB8AC3E}">
-        <p14:creationId xmlns:p14="http://schemas.microsoft.com/office/powerpoint/2010/main" val="2583314663"/>
+        <p14:creationId xmlns:p14="http://schemas.microsoft.com/office/powerpoint/2010/main" val="1243931540"/>
       </p:ext>
     </p:extLst>
   </p:cSld>
@@ -5146,7 +8386,7 @@
           <p:cNvPr id="2" name="Title 1">
             <a:extLst>
               <a:ext uri="{FF2B5EF4-FFF2-40B4-BE49-F238E27FC236}">
-                <a16:creationId xmlns:a16="http://schemas.microsoft.com/office/drawing/2014/main" id="{67EEAC7E-194B-2D6D-94F1-4A15DE9F4377}"/>
+                <a16:creationId xmlns:a16="http://schemas.microsoft.com/office/drawing/2014/main" id="{C0D4A913-AF55-03F6-9BF5-6CA78236A83B}"/>
               </a:ext>
             </a:extLst>
           </p:cNvPr>
@@ -5157,14 +8397,19 @@
             <p:ph type="title"/>
           </p:nvPr>
         </p:nvSpPr>
-        <p:spPr/>
-        <p:txBody>
-          <a:bodyPr/>
-          <a:lstStyle/>
-          <a:p>
-            <a:r>
-              <a:rPr lang="en-US" dirty="0"/>
-              <a:t>Data and Performance</a:t>
+        <p:spPr>
+          <a:xfrm>
+            <a:off x="6680547" y="804519"/>
+            <a:ext cx="5399157" cy="1049235"/>
+          </a:xfrm>
+        </p:spPr>
+        <p:txBody>
+          <a:bodyPr/>
+          <a:lstStyle/>
+          <a:p>
+            <a:r>
+              <a:rPr lang="en-US" dirty="0"/>
+              <a:t>Doing it with Grads</a:t>
             </a:r>
           </a:p>
         </p:txBody>
@@ -5174,7 +8419,7 @@
           <p:cNvPr id="3" name="Content Placeholder 2">
             <a:extLst>
               <a:ext uri="{FF2B5EF4-FFF2-40B4-BE49-F238E27FC236}">
-                <a16:creationId xmlns:a16="http://schemas.microsoft.com/office/drawing/2014/main" id="{EFDDE99D-C154-3653-CF28-73CB524531C7}"/>
+                <a16:creationId xmlns:a16="http://schemas.microsoft.com/office/drawing/2014/main" id="{BACCEB77-B295-7839-463A-35857217FD27}"/>
               </a:ext>
             </a:extLst>
           </p:cNvPr>
@@ -5187,8 +8432,8 @@
         </p:nvSpPr>
         <p:spPr>
           <a:xfrm>
-            <a:off x="1451579" y="1929468"/>
-            <a:ext cx="9603275" cy="4124013"/>
+            <a:off x="6680548" y="1853754"/>
+            <a:ext cx="5399156" cy="4273777"/>
           </a:xfrm>
         </p:spPr>
         <p:txBody>
@@ -5197,64 +8442,111 @@
           <a:p>
             <a:r>
               <a:rPr lang="en-US" dirty="0"/>
-              <a:t>For smaller datasets, the performance of all this doesn’t really matter. </a:t>
-            </a:r>
-          </a:p>
-          <a:p>
-            <a:r>
-              <a:rPr lang="en-US" dirty="0"/>
-              <a:t>With very large data and complex models, that changes. </a:t>
-            </a:r>
-          </a:p>
-          <a:p>
-            <a:r>
-              <a:rPr lang="en-US" dirty="0"/>
-              <a:t>Each ‘step’ takes a while to both setup and perform. </a:t>
-            </a:r>
-          </a:p>
-          <a:p>
-            <a:r>
-              <a:rPr lang="en-US" dirty="0"/>
-              <a:t>Our limiting factor is usually the speed of our GPU, and we can’t change it w/o $$$$. </a:t>
-            </a:r>
-          </a:p>
-          <a:p>
-            <a:r>
-              <a:rPr lang="en-US" dirty="0"/>
-              <a:t>Controlling where/when prep runs, we can keep the GPU busy almost all the time. </a:t>
-            </a:r>
-          </a:p>
-          <a:p>
-            <a:pPr lvl="1"/>
-            <a:r>
-              <a:rPr lang="en-US" dirty="0"/>
-              <a:t>E.g. while the GPU is working on one batch, the next can have transformations done by CPU.</a:t>
-            </a:r>
-          </a:p>
-          <a:p>
-            <a:r>
-              <a:rPr lang="en-US" dirty="0"/>
-              <a:t>Faster training means more trials means more chances at best model. </a:t>
-            </a:r>
-          </a:p>
-          <a:p>
-            <a:pPr lvl="1"/>
-            <a:r>
-              <a:rPr lang="en-US" dirty="0"/>
-              <a:t>Training is often paid by the hour, so maximizing output </a:t>
-            </a:r>
-            <a:r>
-              <a:rPr lang="en-US"/>
-              <a:t>makes sense. </a:t>
-            </a:r>
+              <a:t>We can use these commands to control gradient tracking. </a:t>
+            </a:r>
+          </a:p>
+          <a:p>
+            <a:r>
+              <a:rPr lang="en-US" dirty="0"/>
+              <a:t>The </a:t>
+            </a:r>
+            <a:r>
+              <a:rPr lang="en-US" dirty="0" err="1"/>
+              <a:t>set_grad_enabled</a:t>
+            </a:r>
+            <a:r>
+              <a:rPr lang="en-US" dirty="0"/>
+              <a:t> can be used with False as well, that’s the same as the </a:t>
+            </a:r>
+            <a:r>
+              <a:rPr lang="en-US" dirty="0" err="1"/>
+              <a:t>no_grad</a:t>
+            </a:r>
+            <a:r>
+              <a:rPr lang="en-US" dirty="0"/>
+              <a:t> call. </a:t>
+            </a:r>
+          </a:p>
+          <a:p>
+            <a:r>
+              <a:rPr lang="en-US" dirty="0"/>
+              <a:t>Not calculating gradients is faster for inference. </a:t>
+            </a:r>
+          </a:p>
+          <a:p>
+            <a:pPr lvl="1"/>
+            <a:r>
+              <a:rPr lang="en-US" dirty="0"/>
+              <a:t>Also inference mode which is even less “</a:t>
+            </a:r>
+            <a:r>
+              <a:rPr lang="en-US" dirty="0" err="1"/>
+              <a:t>learny</a:t>
+            </a:r>
+            <a:r>
+              <a:rPr lang="en-US" dirty="0"/>
+              <a:t>”. </a:t>
+            </a:r>
+          </a:p>
+          <a:p>
+            <a:r>
+              <a:rPr lang="en-US" dirty="0"/>
+              <a:t>Can also be used to fine tune. </a:t>
+            </a:r>
+          </a:p>
+          <a:p>
+            <a:pPr lvl="1"/>
+            <a:r>
+              <a:rPr lang="en-US" dirty="0"/>
+              <a:t>Control which weights can be updated. </a:t>
+            </a:r>
+          </a:p>
+          <a:p>
+            <a:pPr lvl="1"/>
+            <a:r>
+              <a:rPr lang="en-US" dirty="0"/>
+              <a:t>Transfer one model to different data. </a:t>
+            </a:r>
+          </a:p>
+          <a:p>
             <a:endParaRPr lang="en-US" dirty="0"/>
           </a:p>
         </p:txBody>
       </p:sp>
+      <p:pic>
+        <p:nvPicPr>
+          <p:cNvPr id="4" name="Picture 3">
+            <a:extLst>
+              <a:ext uri="{FF2B5EF4-FFF2-40B4-BE49-F238E27FC236}">
+                <a16:creationId xmlns:a16="http://schemas.microsoft.com/office/drawing/2014/main" id="{0E476E85-8E86-1A71-D201-A4C28BDC5FC6}"/>
+              </a:ext>
+            </a:extLst>
+          </p:cNvPr>
+          <p:cNvPicPr>
+            <a:picLocks noChangeAspect="1"/>
+          </p:cNvPicPr>
+          <p:nvPr/>
+        </p:nvPicPr>
+        <p:blipFill>
+          <a:blip r:embed="rId2"/>
+          <a:stretch>
+            <a:fillRect/>
+          </a:stretch>
+        </p:blipFill>
+        <p:spPr>
+          <a:xfrm>
+            <a:off x="0" y="0"/>
+            <a:ext cx="6680548" cy="6858000"/>
+          </a:xfrm>
+          <a:prstGeom prst="rect">
+            <a:avLst/>
+          </a:prstGeom>
+        </p:spPr>
+      </p:pic>
     </p:spTree>
     <p:extLst>
       <p:ext uri="{BB962C8B-B14F-4D97-AF65-F5344CB8AC3E}">
-        <p14:creationId xmlns:p14="http://schemas.microsoft.com/office/powerpoint/2010/main" val="378168138"/>
+        <p14:creationId xmlns:p14="http://schemas.microsoft.com/office/powerpoint/2010/main" val="1389921544"/>
       </p:ext>
     </p:extLst>
   </p:cSld>
@@ -5286,7 +8578,7 @@
           <p:cNvPr id="2" name="Title 1">
             <a:extLst>
               <a:ext uri="{FF2B5EF4-FFF2-40B4-BE49-F238E27FC236}">
-                <a16:creationId xmlns:a16="http://schemas.microsoft.com/office/drawing/2014/main" id="{0F70A6B3-2007-4839-5F43-6DDB22137C78}"/>
+                <a16:creationId xmlns:a16="http://schemas.microsoft.com/office/drawing/2014/main" id="{8334FE99-2EB3-C869-3AB4-74B38B3D7817}"/>
               </a:ext>
             </a:extLst>
           </p:cNvPr>
@@ -5302,7 +8594,10 @@
           <a:bodyPr/>
           <a:lstStyle/>
           <a:p>
-            <a:endParaRPr lang="en-US"/>
+            <a:r>
+              <a:rPr lang="en-US" dirty="0"/>
+              <a:t>Graph Building</a:t>
+            </a:r>
           </a:p>
         </p:txBody>
       </p:sp>
@@ -5311,7 +8606,7 @@
           <p:cNvPr id="3" name="Content Placeholder 2">
             <a:extLst>
               <a:ext uri="{FF2B5EF4-FFF2-40B4-BE49-F238E27FC236}">
-                <a16:creationId xmlns:a16="http://schemas.microsoft.com/office/drawing/2014/main" id="{D415E3B6-A8F6-CA64-3527-20F9389E94EF}"/>
+                <a16:creationId xmlns:a16="http://schemas.microsoft.com/office/drawing/2014/main" id="{6DCB3276-E4B2-E38F-1FE5-9A0E14FEBA06}"/>
               </a:ext>
             </a:extLst>
           </p:cNvPr>
@@ -5322,19 +8617,103 @@
             <p:ph idx="1"/>
           </p:nvPr>
         </p:nvSpPr>
-        <p:spPr/>
-        <p:txBody>
-          <a:bodyPr/>
-          <a:lstStyle/>
-          <a:p>
-            <a:endParaRPr lang="en-US"/>
-          </a:p>
-        </p:txBody>
-      </p:sp>
+        <p:spPr>
+          <a:xfrm>
+            <a:off x="7176815" y="2015732"/>
+            <a:ext cx="5015185" cy="3984049"/>
+          </a:xfrm>
+        </p:spPr>
+        <p:txBody>
+          <a:bodyPr/>
+          <a:lstStyle/>
+          <a:p>
+            <a:r>
+              <a:rPr lang="en-US" dirty="0"/>
+              <a:t>This graph is generated at run time. </a:t>
+            </a:r>
+          </a:p>
+          <a:p>
+            <a:r>
+              <a:rPr lang="en-US" dirty="0"/>
+              <a:t>This means things can be changed in code. </a:t>
+            </a:r>
+          </a:p>
+          <a:p>
+            <a:pPr lvl="1"/>
+            <a:r>
+              <a:rPr lang="en-US" dirty="0"/>
+              <a:t>Sizes and shapes can be changed*.</a:t>
+            </a:r>
+          </a:p>
+          <a:p>
+            <a:r>
+              <a:rPr lang="en-US" dirty="0"/>
+              <a:t>For specialized models, this allows flexibility. </a:t>
+            </a:r>
+          </a:p>
+          <a:p>
+            <a:pPr lvl="1"/>
+            <a:r>
+              <a:rPr lang="en-US" dirty="0"/>
+              <a:t>NLP – length of a document. </a:t>
+            </a:r>
+          </a:p>
+          <a:p>
+            <a:pPr lvl="1"/>
+            <a:r>
+              <a:rPr lang="en-US" dirty="0"/>
+              <a:t>CNN – image size.  </a:t>
+            </a:r>
+          </a:p>
+          <a:p>
+            <a:pPr lvl="1"/>
+            <a:r>
+              <a:rPr lang="en-US" dirty="0"/>
+              <a:t>Some other condition…</a:t>
+            </a:r>
+          </a:p>
+          <a:p>
+            <a:r>
+              <a:rPr lang="en-US" dirty="0"/>
+              <a:t>The steps that are constructed are navigated in reverse automatically. </a:t>
+            </a:r>
+          </a:p>
+        </p:txBody>
+      </p:sp>
+      <p:pic>
+        <p:nvPicPr>
+          <p:cNvPr id="5" name="Picture 4" descr="PyTorch - Computation graph | Shivam Mehta">
+            <a:extLst>
+              <a:ext uri="{FF2B5EF4-FFF2-40B4-BE49-F238E27FC236}">
+                <a16:creationId xmlns:a16="http://schemas.microsoft.com/office/drawing/2014/main" id="{42DAF420-631C-5960-C724-163646ED3C48}"/>
+              </a:ext>
+            </a:extLst>
+          </p:cNvPr>
+          <p:cNvPicPr>
+            <a:picLocks noChangeAspect="1"/>
+          </p:cNvPicPr>
+          <p:nvPr/>
+        </p:nvPicPr>
+        <p:blipFill>
+          <a:blip r:embed="rId2"/>
+          <a:stretch>
+            <a:fillRect/>
+          </a:stretch>
+        </p:blipFill>
+        <p:spPr>
+          <a:xfrm>
+            <a:off x="96253" y="2015732"/>
+            <a:ext cx="7080562" cy="3984049"/>
+          </a:xfrm>
+          <a:prstGeom prst="rect">
+            <a:avLst/>
+          </a:prstGeom>
+        </p:spPr>
+      </p:pic>
     </p:spTree>
     <p:extLst>
       <p:ext uri="{BB962C8B-B14F-4D97-AF65-F5344CB8AC3E}">
-        <p14:creationId xmlns:p14="http://schemas.microsoft.com/office/powerpoint/2010/main" val="1839931894"/>
+        <p14:creationId xmlns:p14="http://schemas.microsoft.com/office/powerpoint/2010/main" val="4269103806"/>
       </p:ext>
     </p:extLst>
   </p:cSld>
@@ -5366,7 +8745,7 @@
           <p:cNvPr id="2" name="Title 1">
             <a:extLst>
               <a:ext uri="{FF2B5EF4-FFF2-40B4-BE49-F238E27FC236}">
-                <a16:creationId xmlns:a16="http://schemas.microsoft.com/office/drawing/2014/main" id="{52D6032F-3B64-1A7B-F7AC-3B6CF4892D42}"/>
+                <a16:creationId xmlns:a16="http://schemas.microsoft.com/office/drawing/2014/main" id="{CB49DE94-24CE-9A0D-AA2C-0B9A1D20BA15}"/>
               </a:ext>
             </a:extLst>
           </p:cNvPr>
@@ -5382,10 +8761,7 @@
           <a:bodyPr/>
           <a:lstStyle/>
           <a:p>
-            <a:r>
-              <a:rPr lang="en-US" dirty="0"/>
-              <a:t>Monitoring Performance</a:t>
-            </a:r>
+            <a:endParaRPr lang="en-US"/>
           </a:p>
         </p:txBody>
       </p:sp>
@@ -5394,7 +8770,7 @@
           <p:cNvPr id="3" name="Content Placeholder 2">
             <a:extLst>
               <a:ext uri="{FF2B5EF4-FFF2-40B4-BE49-F238E27FC236}">
-                <a16:creationId xmlns:a16="http://schemas.microsoft.com/office/drawing/2014/main" id="{39DEE616-FDC8-8AB8-5EDC-FC555ADE3B0A}"/>
+                <a16:creationId xmlns:a16="http://schemas.microsoft.com/office/drawing/2014/main" id="{A2537DEF-A99C-A4EF-B845-349943B104DF}"/>
               </a:ext>
             </a:extLst>
           </p:cNvPr>
@@ -5405,101 +8781,79 @@
             <p:ph idx="1"/>
           </p:nvPr>
         </p:nvSpPr>
+        <p:spPr/>
+        <p:txBody>
+          <a:bodyPr/>
+          <a:lstStyle/>
+          <a:p>
+            <a:endParaRPr lang="en-US"/>
+          </a:p>
+        </p:txBody>
+      </p:sp>
+      <p:pic>
+        <p:nvPicPr>
+          <p:cNvPr id="4" name="Picture 3" descr="How to Visualize PyTorch Neural Networks - GeeksforGeeks">
+            <a:extLst>
+              <a:ext uri="{FF2B5EF4-FFF2-40B4-BE49-F238E27FC236}">
+                <a16:creationId xmlns:a16="http://schemas.microsoft.com/office/drawing/2014/main" id="{69F95D74-80AA-967A-9F23-DDAF5F02F356}"/>
+              </a:ext>
+            </a:extLst>
+          </p:cNvPr>
+          <p:cNvPicPr>
+            <a:picLocks noChangeAspect="1"/>
+          </p:cNvPicPr>
+          <p:nvPr/>
+        </p:nvPicPr>
+        <p:blipFill>
+          <a:blip r:embed="rId2"/>
+          <a:stretch>
+            <a:fillRect/>
+          </a:stretch>
+        </p:blipFill>
         <p:spPr>
           <a:xfrm>
-            <a:off x="1451579" y="1979802"/>
-            <a:ext cx="9603275" cy="3958543"/>
+            <a:off x="950494" y="18847"/>
+            <a:ext cx="3962400" cy="6845300"/>
           </a:xfrm>
+          <a:prstGeom prst="rect">
+            <a:avLst/>
+          </a:prstGeom>
         </p:spPr>
-        <p:txBody>
-          <a:bodyPr/>
-          <a:lstStyle/>
-          <a:p>
-            <a:r>
-              <a:rPr lang="en-US" dirty="0"/>
-              <a:t>For basic stuff, we can just have some print statements in our training loop. </a:t>
-            </a:r>
-          </a:p>
-          <a:p>
-            <a:pPr lvl="1"/>
-            <a:r>
-              <a:rPr lang="en-US" dirty="0"/>
-              <a:t>Loss, epoch, batch, </a:t>
-            </a:r>
-            <a:r>
-              <a:rPr lang="en-US" dirty="0" err="1"/>
-              <a:t>etc</a:t>
-            </a:r>
-            <a:r>
-              <a:rPr lang="en-US" dirty="0"/>
-              <a:t>…</a:t>
-            </a:r>
-          </a:p>
-          <a:p>
-            <a:r>
-              <a:rPr lang="en-US" dirty="0"/>
-              <a:t>For serious management, we want something better. </a:t>
-            </a:r>
-          </a:p>
-          <a:p>
-            <a:pPr lvl="1"/>
-            <a:r>
-              <a:rPr lang="en-US" dirty="0"/>
-              <a:t>Training can take a long time, weeks even. We don’t want to sit there for it. </a:t>
-            </a:r>
-          </a:p>
-          <a:p>
-            <a:pPr lvl="1"/>
-            <a:r>
-              <a:rPr lang="en-US" dirty="0"/>
-              <a:t>If doing trials, being able to compare is nice. </a:t>
-            </a:r>
-          </a:p>
-          <a:p>
-            <a:pPr lvl="1"/>
-            <a:r>
-              <a:rPr lang="en-US" dirty="0"/>
-              <a:t>Our computer that is training may live in a data center somewhere. </a:t>
-            </a:r>
-          </a:p>
-          <a:p>
-            <a:r>
-              <a:rPr lang="en-US" dirty="0"/>
-              <a:t>One option is to use </a:t>
-            </a:r>
-            <a:r>
-              <a:rPr lang="en-US" dirty="0" err="1"/>
-              <a:t>Tensorboard</a:t>
-            </a:r>
-            <a:r>
-              <a:rPr lang="en-US" dirty="0"/>
-              <a:t> – a webpage based monitor package. </a:t>
-            </a:r>
-          </a:p>
-          <a:p>
-            <a:pPr lvl="1"/>
-            <a:r>
-              <a:rPr lang="en-US" dirty="0"/>
-              <a:t>We write logs with updates on progress to disk. </a:t>
-            </a:r>
-          </a:p>
-          <a:p>
-            <a:pPr lvl="1"/>
-            <a:r>
-              <a:rPr lang="en-US" dirty="0" err="1"/>
-              <a:t>Tensorboard</a:t>
-            </a:r>
-            <a:r>
-              <a:rPr lang="en-US" dirty="0"/>
-              <a:t> takes the logs and makes them into a nice webpage. </a:t>
-            </a:r>
-          </a:p>
-        </p:txBody>
-      </p:sp>
+      </p:pic>
+      <p:pic>
+        <p:nvPicPr>
+          <p:cNvPr id="5" name="Picture 4" descr="Computational graph example in TensorFlow (Source: Tensorflow Graph Guide)">
+            <a:extLst>
+              <a:ext uri="{FF2B5EF4-FFF2-40B4-BE49-F238E27FC236}">
+                <a16:creationId xmlns:a16="http://schemas.microsoft.com/office/drawing/2014/main" id="{926226D3-A3FD-E231-F571-CEE0A6DEBB4C}"/>
+              </a:ext>
+            </a:extLst>
+          </p:cNvPr>
+          <p:cNvPicPr>
+            <a:picLocks noChangeAspect="1"/>
+          </p:cNvPicPr>
+          <p:nvPr/>
+        </p:nvPicPr>
+        <p:blipFill>
+          <a:blip r:embed="rId3"/>
+          <a:stretch>
+            <a:fillRect/>
+          </a:stretch>
+        </p:blipFill>
+        <p:spPr>
+          <a:xfrm>
+            <a:off x="6705600" y="25216"/>
+            <a:ext cx="3846095" cy="6837502"/>
+          </a:xfrm>
+          <a:prstGeom prst="rect">
+            <a:avLst/>
+          </a:prstGeom>
+        </p:spPr>
+      </p:pic>
     </p:spTree>
     <p:extLst>
       <p:ext uri="{BB962C8B-B14F-4D97-AF65-F5344CB8AC3E}">
-        <p14:creationId xmlns:p14="http://schemas.microsoft.com/office/powerpoint/2010/main" val="3476941931"/>
+        <p14:creationId xmlns:p14="http://schemas.microsoft.com/office/powerpoint/2010/main" val="2895205234"/>
       </p:ext>
     </p:extLst>
   </p:cSld>

--- a/reference_content/Slides/pytorch_data.pptx
+++ b/reference_content/Slides/pytorch_data.pptx
@@ -6,36 +6,40 @@
   </p:sldMasterIdLst>
   <p:sldIdLst>
     <p:sldId id="269" r:id="rId2"/>
-    <p:sldId id="275" r:id="rId3"/>
-    <p:sldId id="256" r:id="rId4"/>
-    <p:sldId id="279" r:id="rId5"/>
-    <p:sldId id="280" r:id="rId6"/>
-    <p:sldId id="281" r:id="rId7"/>
-    <p:sldId id="282" r:id="rId8"/>
-    <p:sldId id="283" r:id="rId9"/>
-    <p:sldId id="285" r:id="rId10"/>
-    <p:sldId id="287" r:id="rId11"/>
-    <p:sldId id="277" r:id="rId12"/>
-    <p:sldId id="257" r:id="rId13"/>
-    <p:sldId id="258" r:id="rId14"/>
-    <p:sldId id="273" r:id="rId15"/>
-    <p:sldId id="259" r:id="rId16"/>
-    <p:sldId id="284" r:id="rId17"/>
-    <p:sldId id="260" r:id="rId18"/>
-    <p:sldId id="263" r:id="rId19"/>
-    <p:sldId id="276" r:id="rId20"/>
-    <p:sldId id="261" r:id="rId21"/>
-    <p:sldId id="271" r:id="rId22"/>
-    <p:sldId id="272" r:id="rId23"/>
-    <p:sldId id="262" r:id="rId24"/>
-    <p:sldId id="278" r:id="rId25"/>
-    <p:sldId id="286" r:id="rId26"/>
-    <p:sldId id="270" r:id="rId27"/>
-    <p:sldId id="264" r:id="rId28"/>
-    <p:sldId id="265" r:id="rId29"/>
-    <p:sldId id="266" r:id="rId30"/>
-    <p:sldId id="267" r:id="rId31"/>
-    <p:sldId id="268" r:id="rId32"/>
+    <p:sldId id="290" r:id="rId3"/>
+    <p:sldId id="288" r:id="rId4"/>
+    <p:sldId id="275" r:id="rId5"/>
+    <p:sldId id="256" r:id="rId6"/>
+    <p:sldId id="279" r:id="rId7"/>
+    <p:sldId id="280" r:id="rId8"/>
+    <p:sldId id="281" r:id="rId9"/>
+    <p:sldId id="282" r:id="rId10"/>
+    <p:sldId id="283" r:id="rId11"/>
+    <p:sldId id="285" r:id="rId12"/>
+    <p:sldId id="287" r:id="rId13"/>
+    <p:sldId id="277" r:id="rId14"/>
+    <p:sldId id="257" r:id="rId15"/>
+    <p:sldId id="258" r:id="rId16"/>
+    <p:sldId id="273" r:id="rId17"/>
+    <p:sldId id="259" r:id="rId18"/>
+    <p:sldId id="291" r:id="rId19"/>
+    <p:sldId id="284" r:id="rId20"/>
+    <p:sldId id="260" r:id="rId21"/>
+    <p:sldId id="263" r:id="rId22"/>
+    <p:sldId id="276" r:id="rId23"/>
+    <p:sldId id="261" r:id="rId24"/>
+    <p:sldId id="271" r:id="rId25"/>
+    <p:sldId id="272" r:id="rId26"/>
+    <p:sldId id="262" r:id="rId27"/>
+    <p:sldId id="278" r:id="rId28"/>
+    <p:sldId id="286" r:id="rId29"/>
+    <p:sldId id="289" r:id="rId30"/>
+    <p:sldId id="270" r:id="rId31"/>
+    <p:sldId id="264" r:id="rId32"/>
+    <p:sldId id="265" r:id="rId33"/>
+    <p:sldId id="266" r:id="rId34"/>
+    <p:sldId id="267" r:id="rId35"/>
+    <p:sldId id="268" r:id="rId36"/>
   </p:sldIdLst>
   <p:sldSz cx="12192000" cy="6858000"/>
   <p:notesSz cx="6858000" cy="9144000"/>
@@ -3706,14 +3710,19 @@
             <p:ph idx="1"/>
           </p:nvPr>
         </p:nvSpPr>
-        <p:spPr/>
-        <p:txBody>
-          <a:bodyPr/>
-          <a:lstStyle/>
-          <a:p>
-            <a:r>
-              <a:rPr lang="en-US" dirty="0"/>
-              <a:t>Today</a:t>
+        <p:spPr>
+          <a:xfrm>
+            <a:off x="1451579" y="1853754"/>
+            <a:ext cx="9603275" cy="4199727"/>
+          </a:xfrm>
+        </p:spPr>
+        <p:txBody>
+          <a:bodyPr/>
+          <a:lstStyle/>
+          <a:p>
+            <a:r>
+              <a:rPr lang="en-US" dirty="0"/>
+              <a:t>Today (pull for updates). </a:t>
             </a:r>
           </a:p>
           <a:p>
@@ -3731,13 +3740,33 @@
             <a:pPr lvl="1"/>
             <a:r>
               <a:rPr lang="en-US" dirty="0"/>
-              <a:t>Depending on time, first part of CNNs (image models). </a:t>
+              <a:t>Computation graph basics. </a:t>
+            </a:r>
+          </a:p>
+          <a:p>
+            <a:pPr lvl="1"/>
+            <a:r>
+              <a:rPr lang="en-US" dirty="0"/>
+              <a:t>Imbalanced data in a neural network. </a:t>
+            </a:r>
+          </a:p>
+          <a:p>
+            <a:pPr lvl="1"/>
+            <a:r>
+              <a:rPr lang="en-US" dirty="0"/>
+              <a:t>Depending on time, theory of convolutional models (image models). </a:t>
             </a:r>
           </a:p>
           <a:p>
             <a:r>
               <a:rPr lang="en-US" dirty="0"/>
               <a:t>Next week – tuning models and monitoring training. </a:t>
+            </a:r>
+          </a:p>
+          <a:p>
+            <a:r>
+              <a:rPr lang="en-US" dirty="0"/>
+              <a:t>*The mechanics are mostly in chapter 5 and 6, you want to read those first and after. </a:t>
             </a:r>
           </a:p>
         </p:txBody>
@@ -3777,6 +3806,313 @@
           <p:cNvPr id="2" name="Title 1">
             <a:extLst>
               <a:ext uri="{FF2B5EF4-FFF2-40B4-BE49-F238E27FC236}">
+                <a16:creationId xmlns:a16="http://schemas.microsoft.com/office/drawing/2014/main" id="{8334FE99-2EB3-C869-3AB4-74B38B3D7817}"/>
+              </a:ext>
+            </a:extLst>
+          </p:cNvPr>
+          <p:cNvSpPr>
+            <a:spLocks noGrp="1"/>
+          </p:cNvSpPr>
+          <p:nvPr>
+            <p:ph type="title"/>
+          </p:nvPr>
+        </p:nvSpPr>
+        <p:spPr/>
+        <p:txBody>
+          <a:bodyPr/>
+          <a:lstStyle/>
+          <a:p>
+            <a:r>
+              <a:rPr lang="en-US" dirty="0"/>
+              <a:t>Graph Building</a:t>
+            </a:r>
+          </a:p>
+        </p:txBody>
+      </p:sp>
+      <p:sp>
+        <p:nvSpPr>
+          <p:cNvPr id="3" name="Content Placeholder 2">
+            <a:extLst>
+              <a:ext uri="{FF2B5EF4-FFF2-40B4-BE49-F238E27FC236}">
+                <a16:creationId xmlns:a16="http://schemas.microsoft.com/office/drawing/2014/main" id="{6DCB3276-E4B2-E38F-1FE5-9A0E14FEBA06}"/>
+              </a:ext>
+            </a:extLst>
+          </p:cNvPr>
+          <p:cNvSpPr>
+            <a:spLocks noGrp="1"/>
+          </p:cNvSpPr>
+          <p:nvPr>
+            <p:ph idx="1"/>
+          </p:nvPr>
+        </p:nvSpPr>
+        <p:spPr>
+          <a:xfrm>
+            <a:off x="7176815" y="2015732"/>
+            <a:ext cx="5015185" cy="3984049"/>
+          </a:xfrm>
+        </p:spPr>
+        <p:txBody>
+          <a:bodyPr/>
+          <a:lstStyle/>
+          <a:p>
+            <a:r>
+              <a:rPr lang="en-US" dirty="0"/>
+              <a:t>This graph is generated at run time. </a:t>
+            </a:r>
+          </a:p>
+          <a:p>
+            <a:r>
+              <a:rPr lang="en-US" dirty="0"/>
+              <a:t>This means things can be changed in code. </a:t>
+            </a:r>
+          </a:p>
+          <a:p>
+            <a:pPr lvl="1"/>
+            <a:r>
+              <a:rPr lang="en-US" dirty="0"/>
+              <a:t>Sizes and shapes can be changed*.</a:t>
+            </a:r>
+          </a:p>
+          <a:p>
+            <a:r>
+              <a:rPr lang="en-US" dirty="0"/>
+              <a:t>For specialized models, this allows flexibility. </a:t>
+            </a:r>
+          </a:p>
+          <a:p>
+            <a:pPr lvl="1"/>
+            <a:r>
+              <a:rPr lang="en-US" dirty="0"/>
+              <a:t>NLP – length of a document. </a:t>
+            </a:r>
+          </a:p>
+          <a:p>
+            <a:pPr lvl="1"/>
+            <a:r>
+              <a:rPr lang="en-US" dirty="0"/>
+              <a:t>CNN – image size.  </a:t>
+            </a:r>
+          </a:p>
+          <a:p>
+            <a:pPr lvl="1"/>
+            <a:r>
+              <a:rPr lang="en-US" dirty="0"/>
+              <a:t>Some other condition…</a:t>
+            </a:r>
+          </a:p>
+          <a:p>
+            <a:r>
+              <a:rPr lang="en-US" dirty="0"/>
+              <a:t>The steps that are constructed are navigated in reverse automatically. </a:t>
+            </a:r>
+          </a:p>
+        </p:txBody>
+      </p:sp>
+      <p:pic>
+        <p:nvPicPr>
+          <p:cNvPr id="5" name="Picture 4" descr="PyTorch - Computation graph | Shivam Mehta">
+            <a:extLst>
+              <a:ext uri="{FF2B5EF4-FFF2-40B4-BE49-F238E27FC236}">
+                <a16:creationId xmlns:a16="http://schemas.microsoft.com/office/drawing/2014/main" id="{42DAF420-631C-5960-C724-163646ED3C48}"/>
+              </a:ext>
+            </a:extLst>
+          </p:cNvPr>
+          <p:cNvPicPr>
+            <a:picLocks noChangeAspect="1"/>
+          </p:cNvPicPr>
+          <p:nvPr/>
+        </p:nvPicPr>
+        <p:blipFill>
+          <a:blip r:embed="rId2"/>
+          <a:stretch>
+            <a:fillRect/>
+          </a:stretch>
+        </p:blipFill>
+        <p:spPr>
+          <a:xfrm>
+            <a:off x="96253" y="2015732"/>
+            <a:ext cx="7080562" cy="3984049"/>
+          </a:xfrm>
+          <a:prstGeom prst="rect">
+            <a:avLst/>
+          </a:prstGeom>
+        </p:spPr>
+      </p:pic>
+    </p:spTree>
+    <p:extLst>
+      <p:ext uri="{BB962C8B-B14F-4D97-AF65-F5344CB8AC3E}">
+        <p14:creationId xmlns:p14="http://schemas.microsoft.com/office/powerpoint/2010/main" val="4269103806"/>
+      </p:ext>
+    </p:extLst>
+  </p:cSld>
+  <p:clrMapOvr>
+    <a:masterClrMapping/>
+  </p:clrMapOvr>
+</p:sld>
+</file>
+
+<file path=ppt/slides/slide11.xml><?xml version="1.0" encoding="utf-8"?>
+<p:sld xmlns:a="http://schemas.openxmlformats.org/drawingml/2006/main" xmlns:r="http://schemas.openxmlformats.org/officeDocument/2006/relationships" xmlns:p="http://schemas.openxmlformats.org/presentationml/2006/main">
+  <p:cSld>
+    <p:spTree>
+      <p:nvGrpSpPr>
+        <p:cNvPr id="1" name=""/>
+        <p:cNvGrpSpPr/>
+        <p:nvPr/>
+      </p:nvGrpSpPr>
+      <p:grpSpPr>
+        <a:xfrm>
+          <a:off x="0" y="0"/>
+          <a:ext cx="0" cy="0"/>
+          <a:chOff x="0" y="0"/>
+          <a:chExt cx="0" cy="0"/>
+        </a:xfrm>
+      </p:grpSpPr>
+      <p:sp>
+        <p:nvSpPr>
+          <p:cNvPr id="2" name="Title 1">
+            <a:extLst>
+              <a:ext uri="{FF2B5EF4-FFF2-40B4-BE49-F238E27FC236}">
+                <a16:creationId xmlns:a16="http://schemas.microsoft.com/office/drawing/2014/main" id="{CB49DE94-24CE-9A0D-AA2C-0B9A1D20BA15}"/>
+              </a:ext>
+            </a:extLst>
+          </p:cNvPr>
+          <p:cNvSpPr>
+            <a:spLocks noGrp="1"/>
+          </p:cNvSpPr>
+          <p:nvPr>
+            <p:ph type="title"/>
+          </p:nvPr>
+        </p:nvSpPr>
+        <p:spPr/>
+        <p:txBody>
+          <a:bodyPr/>
+          <a:lstStyle/>
+          <a:p>
+            <a:endParaRPr lang="en-US"/>
+          </a:p>
+        </p:txBody>
+      </p:sp>
+      <p:sp>
+        <p:nvSpPr>
+          <p:cNvPr id="3" name="Content Placeholder 2">
+            <a:extLst>
+              <a:ext uri="{FF2B5EF4-FFF2-40B4-BE49-F238E27FC236}">
+                <a16:creationId xmlns:a16="http://schemas.microsoft.com/office/drawing/2014/main" id="{A2537DEF-A99C-A4EF-B845-349943B104DF}"/>
+              </a:ext>
+            </a:extLst>
+          </p:cNvPr>
+          <p:cNvSpPr>
+            <a:spLocks noGrp="1"/>
+          </p:cNvSpPr>
+          <p:nvPr>
+            <p:ph idx="1"/>
+          </p:nvPr>
+        </p:nvSpPr>
+        <p:spPr/>
+        <p:txBody>
+          <a:bodyPr/>
+          <a:lstStyle/>
+          <a:p>
+            <a:endParaRPr lang="en-US"/>
+          </a:p>
+        </p:txBody>
+      </p:sp>
+      <p:pic>
+        <p:nvPicPr>
+          <p:cNvPr id="4" name="Picture 3" descr="How to Visualize PyTorch Neural Networks - GeeksforGeeks">
+            <a:extLst>
+              <a:ext uri="{FF2B5EF4-FFF2-40B4-BE49-F238E27FC236}">
+                <a16:creationId xmlns:a16="http://schemas.microsoft.com/office/drawing/2014/main" id="{69F95D74-80AA-967A-9F23-DDAF5F02F356}"/>
+              </a:ext>
+            </a:extLst>
+          </p:cNvPr>
+          <p:cNvPicPr>
+            <a:picLocks noChangeAspect="1"/>
+          </p:cNvPicPr>
+          <p:nvPr/>
+        </p:nvPicPr>
+        <p:blipFill>
+          <a:blip r:embed="rId2"/>
+          <a:stretch>
+            <a:fillRect/>
+          </a:stretch>
+        </p:blipFill>
+        <p:spPr>
+          <a:xfrm>
+            <a:off x="950494" y="18847"/>
+            <a:ext cx="3962400" cy="6845300"/>
+          </a:xfrm>
+          <a:prstGeom prst="rect">
+            <a:avLst/>
+          </a:prstGeom>
+        </p:spPr>
+      </p:pic>
+      <p:pic>
+        <p:nvPicPr>
+          <p:cNvPr id="5" name="Picture 4" descr="Computational graph example in TensorFlow (Source: Tensorflow Graph Guide)">
+            <a:extLst>
+              <a:ext uri="{FF2B5EF4-FFF2-40B4-BE49-F238E27FC236}">
+                <a16:creationId xmlns:a16="http://schemas.microsoft.com/office/drawing/2014/main" id="{926226D3-A3FD-E231-F571-CEE0A6DEBB4C}"/>
+              </a:ext>
+            </a:extLst>
+          </p:cNvPr>
+          <p:cNvPicPr>
+            <a:picLocks noChangeAspect="1"/>
+          </p:cNvPicPr>
+          <p:nvPr/>
+        </p:nvPicPr>
+        <p:blipFill>
+          <a:blip r:embed="rId3"/>
+          <a:stretch>
+            <a:fillRect/>
+          </a:stretch>
+        </p:blipFill>
+        <p:spPr>
+          <a:xfrm>
+            <a:off x="6705600" y="25216"/>
+            <a:ext cx="3846095" cy="6837502"/>
+          </a:xfrm>
+          <a:prstGeom prst="rect">
+            <a:avLst/>
+          </a:prstGeom>
+        </p:spPr>
+      </p:pic>
+    </p:spTree>
+    <p:extLst>
+      <p:ext uri="{BB962C8B-B14F-4D97-AF65-F5344CB8AC3E}">
+        <p14:creationId xmlns:p14="http://schemas.microsoft.com/office/powerpoint/2010/main" val="2895205234"/>
+      </p:ext>
+    </p:extLst>
+  </p:cSld>
+  <p:clrMapOvr>
+    <a:masterClrMapping/>
+  </p:clrMapOvr>
+</p:sld>
+</file>
+
+<file path=ppt/slides/slide12.xml><?xml version="1.0" encoding="utf-8"?>
+<p:sld xmlns:a="http://schemas.openxmlformats.org/drawingml/2006/main" xmlns:r="http://schemas.openxmlformats.org/officeDocument/2006/relationships" xmlns:p="http://schemas.openxmlformats.org/presentationml/2006/main">
+  <p:cSld>
+    <p:spTree>
+      <p:nvGrpSpPr>
+        <p:cNvPr id="1" name=""/>
+        <p:cNvGrpSpPr/>
+        <p:nvPr/>
+      </p:nvGrpSpPr>
+      <p:grpSpPr>
+        <a:xfrm>
+          <a:off x="0" y="0"/>
+          <a:ext cx="0" cy="0"/>
+          <a:chOff x="0" y="0"/>
+          <a:chExt cx="0" cy="0"/>
+        </a:xfrm>
+      </p:grpSpPr>
+      <p:sp>
+        <p:nvSpPr>
+          <p:cNvPr id="2" name="Title 1">
+            <a:extLst>
+              <a:ext uri="{FF2B5EF4-FFF2-40B4-BE49-F238E27FC236}">
                 <a16:creationId xmlns:a16="http://schemas.microsoft.com/office/drawing/2014/main" id="{320C3B62-4D61-9768-403B-82944925D54A}"/>
               </a:ext>
             </a:extLst>
@@ -3883,13 +4219,8 @@
             <a:pPr lvl="1"/>
             <a:r>
               <a:rPr lang="en-US" dirty="0"/>
-              <a:t>Flexibility is useful, but it makes it harder </a:t>
-            </a:r>
-            <a:r>
-              <a:rPr lang="en-US"/>
-              <a:t>when starting. </a:t>
-            </a:r>
-            <a:endParaRPr lang="en-US" dirty="0"/>
+              <a:t>Flexibility is useful, but it makes it harder when starting. </a:t>
+            </a:r>
           </a:p>
         </p:txBody>
       </p:sp>
@@ -3906,7 +4237,7 @@
 </p:sld>
 </file>
 
-<file path=ppt/slides/slide11.xml><?xml version="1.0" encoding="utf-8"?>
+<file path=ppt/slides/slide13.xml><?xml version="1.0" encoding="utf-8"?>
 <p:sld xmlns:a="http://schemas.openxmlformats.org/drawingml/2006/main" xmlns:r="http://schemas.openxmlformats.org/officeDocument/2006/relationships" xmlns:p="http://schemas.openxmlformats.org/presentationml/2006/main">
   <p:cSld>
     <p:spTree>
@@ -4019,7 +4350,7 @@
 </p:sld>
 </file>
 
-<file path=ppt/slides/slide12.xml><?xml version="1.0" encoding="utf-8"?>
+<file path=ppt/slides/slide14.xml><?xml version="1.0" encoding="utf-8"?>
 <p:sld xmlns:a="http://schemas.openxmlformats.org/drawingml/2006/main" xmlns:r="http://schemas.openxmlformats.org/officeDocument/2006/relationships" xmlns:p="http://schemas.openxmlformats.org/presentationml/2006/main">
   <p:cSld>
     <p:spTree>
@@ -4165,7 +4496,7 @@
 </p:sld>
 </file>
 
-<file path=ppt/slides/slide13.xml><?xml version="1.0" encoding="utf-8"?>
+<file path=ppt/slides/slide15.xml><?xml version="1.0" encoding="utf-8"?>
 <p:sld xmlns:a="http://schemas.openxmlformats.org/drawingml/2006/main" xmlns:r="http://schemas.openxmlformats.org/officeDocument/2006/relationships" xmlns:p="http://schemas.openxmlformats.org/presentationml/2006/main">
   <p:cSld>
     <p:spTree>
@@ -4322,7 +4653,7 @@
 </p:sld>
 </file>
 
-<file path=ppt/slides/slide14.xml><?xml version="1.0" encoding="utf-8"?>
+<file path=ppt/slides/slide16.xml><?xml version="1.0" encoding="utf-8"?>
 <p:sld xmlns:a="http://schemas.openxmlformats.org/drawingml/2006/main" xmlns:r="http://schemas.openxmlformats.org/officeDocument/2006/relationships" xmlns:p="http://schemas.openxmlformats.org/presentationml/2006/main">
   <p:cSld>
     <p:spTree>
@@ -4507,7 +4838,7 @@
 </p:sld>
 </file>
 
-<file path=ppt/slides/slide15.xml><?xml version="1.0" encoding="utf-8"?>
+<file path=ppt/slides/slide17.xml><?xml version="1.0" encoding="utf-8"?>
 <p:sld xmlns:a="http://schemas.openxmlformats.org/drawingml/2006/main" xmlns:r="http://schemas.openxmlformats.org/officeDocument/2006/relationships" xmlns:p="http://schemas.openxmlformats.org/presentationml/2006/main">
   <p:cSld>
     <p:spTree>
@@ -4655,7 +4986,117 @@
 </p:sld>
 </file>
 
-<file path=ppt/slides/slide16.xml><?xml version="1.0" encoding="utf-8"?>
+<file path=ppt/slides/slide18.xml><?xml version="1.0" encoding="utf-8"?>
+<p:sld xmlns:a="http://schemas.openxmlformats.org/drawingml/2006/main" xmlns:r="http://schemas.openxmlformats.org/officeDocument/2006/relationships" xmlns:p="http://schemas.openxmlformats.org/presentationml/2006/main">
+  <p:cSld>
+    <p:spTree>
+      <p:nvGrpSpPr>
+        <p:cNvPr id="1" name=""/>
+        <p:cNvGrpSpPr/>
+        <p:nvPr/>
+      </p:nvGrpSpPr>
+      <p:grpSpPr>
+        <a:xfrm>
+          <a:off x="0" y="0"/>
+          <a:ext cx="0" cy="0"/>
+          <a:chOff x="0" y="0"/>
+          <a:chExt cx="0" cy="0"/>
+        </a:xfrm>
+      </p:grpSpPr>
+      <p:sp>
+        <p:nvSpPr>
+          <p:cNvPr id="2" name="Title 1">
+            <a:extLst>
+              <a:ext uri="{FF2B5EF4-FFF2-40B4-BE49-F238E27FC236}">
+                <a16:creationId xmlns:a16="http://schemas.microsoft.com/office/drawing/2014/main" id="{7D0AE662-DDE2-43B1-7154-722A2AB51B2E}"/>
+              </a:ext>
+            </a:extLst>
+          </p:cNvPr>
+          <p:cNvSpPr>
+            <a:spLocks noGrp="1"/>
+          </p:cNvSpPr>
+          <p:nvPr>
+            <p:ph type="title"/>
+          </p:nvPr>
+        </p:nvSpPr>
+        <p:spPr/>
+        <p:txBody>
+          <a:bodyPr/>
+          <a:lstStyle/>
+          <a:p>
+            <a:endParaRPr lang="en-US"/>
+          </a:p>
+        </p:txBody>
+      </p:sp>
+      <p:sp>
+        <p:nvSpPr>
+          <p:cNvPr id="3" name="Content Placeholder 2">
+            <a:extLst>
+              <a:ext uri="{FF2B5EF4-FFF2-40B4-BE49-F238E27FC236}">
+                <a16:creationId xmlns:a16="http://schemas.microsoft.com/office/drawing/2014/main" id="{B8444516-6811-3A07-44BC-3063D18CC91F}"/>
+              </a:ext>
+            </a:extLst>
+          </p:cNvPr>
+          <p:cNvSpPr>
+            <a:spLocks noGrp="1"/>
+          </p:cNvSpPr>
+          <p:nvPr>
+            <p:ph idx="1"/>
+          </p:nvPr>
+        </p:nvSpPr>
+        <p:spPr/>
+        <p:txBody>
+          <a:bodyPr/>
+          <a:lstStyle/>
+          <a:p>
+            <a:endParaRPr lang="en-US"/>
+          </a:p>
+        </p:txBody>
+      </p:sp>
+      <p:pic>
+        <p:nvPicPr>
+          <p:cNvPr id="4" name="Picture 3" descr="Epoch in Machine Learning - GeeksforGeeks">
+            <a:extLst>
+              <a:ext uri="{FF2B5EF4-FFF2-40B4-BE49-F238E27FC236}">
+                <a16:creationId xmlns:a16="http://schemas.microsoft.com/office/drawing/2014/main" id="{33604C67-7710-8ECD-5C9A-467D1B8C03D5}"/>
+              </a:ext>
+            </a:extLst>
+          </p:cNvPr>
+          <p:cNvPicPr>
+            <a:picLocks noChangeAspect="1"/>
+          </p:cNvPicPr>
+          <p:nvPr/>
+        </p:nvPicPr>
+        <p:blipFill>
+          <a:blip r:embed="rId2"/>
+          <a:stretch>
+            <a:fillRect/>
+          </a:stretch>
+        </p:blipFill>
+        <p:spPr>
+          <a:xfrm>
+            <a:off x="313566" y="279514"/>
+            <a:ext cx="11564868" cy="5782434"/>
+          </a:xfrm>
+          <a:prstGeom prst="rect">
+            <a:avLst/>
+          </a:prstGeom>
+        </p:spPr>
+      </p:pic>
+    </p:spTree>
+    <p:extLst>
+      <p:ext uri="{BB962C8B-B14F-4D97-AF65-F5344CB8AC3E}">
+        <p14:creationId xmlns:p14="http://schemas.microsoft.com/office/powerpoint/2010/main" val="380068743"/>
+      </p:ext>
+    </p:extLst>
+  </p:cSld>
+  <p:clrMapOvr>
+    <a:masterClrMapping/>
+  </p:clrMapOvr>
+</p:sld>
+</file>
+
+<file path=ppt/slides/slide19.xml><?xml version="1.0" encoding="utf-8"?>
 <p:sld xmlns:a="http://schemas.openxmlformats.org/drawingml/2006/main" xmlns:r="http://schemas.openxmlformats.org/officeDocument/2006/relationships" xmlns:p="http://schemas.openxmlformats.org/presentationml/2006/main">
   <p:cSld>
     <p:spTree>
@@ -4852,7 +5293,7 @@
 </p:sld>
 </file>
 
-<file path=ppt/slides/slide17.xml><?xml version="1.0" encoding="utf-8"?>
+<file path=ppt/slides/slide2.xml><?xml version="1.0" encoding="utf-8"?>
 <p:sld xmlns:a="http://schemas.openxmlformats.org/drawingml/2006/main" xmlns:r="http://schemas.openxmlformats.org/officeDocument/2006/relationships" xmlns:p="http://schemas.openxmlformats.org/presentationml/2006/main">
   <p:cSld>
     <p:spTree>
@@ -4874,6 +5315,160 @@
           <p:cNvPr id="2" name="Title 1">
             <a:extLst>
               <a:ext uri="{FF2B5EF4-FFF2-40B4-BE49-F238E27FC236}">
+                <a16:creationId xmlns:a16="http://schemas.microsoft.com/office/drawing/2014/main" id="{89F088D0-BC0F-0369-85A4-1ED030B62B60}"/>
+              </a:ext>
+            </a:extLst>
+          </p:cNvPr>
+          <p:cNvSpPr>
+            <a:spLocks noGrp="1"/>
+          </p:cNvSpPr>
+          <p:nvPr>
+            <p:ph type="title"/>
+          </p:nvPr>
+        </p:nvSpPr>
+        <p:spPr/>
+        <p:txBody>
+          <a:bodyPr/>
+          <a:lstStyle/>
+          <a:p>
+            <a:r>
+              <a:rPr lang="en-US" dirty="0"/>
+              <a:t>Thus Far in Neural Networking…</a:t>
+            </a:r>
+          </a:p>
+        </p:txBody>
+      </p:sp>
+      <p:sp>
+        <p:nvSpPr>
+          <p:cNvPr id="3" name="Content Placeholder 2">
+            <a:extLst>
+              <a:ext uri="{FF2B5EF4-FFF2-40B4-BE49-F238E27FC236}">
+                <a16:creationId xmlns:a16="http://schemas.microsoft.com/office/drawing/2014/main" id="{A62802FF-C8C4-7EFF-C031-088688A40F55}"/>
+              </a:ext>
+            </a:extLst>
+          </p:cNvPr>
+          <p:cNvSpPr>
+            <a:spLocks noGrp="1"/>
+          </p:cNvSpPr>
+          <p:nvPr>
+            <p:ph idx="1"/>
+          </p:nvPr>
+        </p:nvSpPr>
+        <p:spPr/>
+        <p:txBody>
+          <a:bodyPr/>
+          <a:lstStyle/>
+          <a:p>
+            <a:r>
+              <a:rPr lang="en-US" dirty="0"/>
+              <a:t>Self check – you get a dataset, can you predict it? </a:t>
+            </a:r>
+          </a:p>
+          <a:p>
+            <a:pPr lvl="1"/>
+            <a:r>
+              <a:rPr lang="en-US" dirty="0"/>
+              <a:t>Any of the samples – MINST, flowers, CIFAR, </a:t>
+            </a:r>
+            <a:r>
+              <a:rPr lang="en-US" dirty="0" err="1"/>
+              <a:t>etc</a:t>
+            </a:r>
+            <a:r>
+              <a:rPr lang="en-US" dirty="0"/>
+              <a:t>…</a:t>
+            </a:r>
+          </a:p>
+          <a:p>
+            <a:r>
+              <a:rPr lang="en-US" dirty="0"/>
+              <a:t>You all generally seem to be ok with things. </a:t>
+            </a:r>
+          </a:p>
+          <a:p>
+            <a:pPr lvl="1"/>
+            <a:r>
+              <a:rPr lang="en-US" dirty="0" err="1"/>
+              <a:t>PyTorch</a:t>
+            </a:r>
+            <a:r>
+              <a:rPr lang="en-US" dirty="0"/>
+              <a:t> has lots of specific details (which is annoying), is that manageable?</a:t>
+            </a:r>
+          </a:p>
+          <a:p>
+            <a:pPr lvl="1"/>
+            <a:r>
+              <a:rPr lang="en-US" dirty="0"/>
+              <a:t>Do the larger concepts (model, train loop, </a:t>
+            </a:r>
+            <a:r>
+              <a:rPr lang="en-US" dirty="0" err="1"/>
+              <a:t>gd</a:t>
+            </a:r>
+            <a:r>
+              <a:rPr lang="en-US" dirty="0"/>
+              <a:t>, </a:t>
+            </a:r>
+            <a:r>
+              <a:rPr lang="en-US" dirty="0" err="1"/>
+              <a:t>etc</a:t>
+            </a:r>
+            <a:r>
+              <a:rPr lang="en-US" dirty="0"/>
+              <a:t>…) mostly make sense?</a:t>
+            </a:r>
+          </a:p>
+          <a:p>
+            <a:pPr lvl="1"/>
+            <a:r>
+              <a:rPr lang="en-US" dirty="0"/>
+              <a:t>The code is more variable, is that manageable? </a:t>
+            </a:r>
+          </a:p>
+          <a:p>
+            <a:r>
+              <a:rPr lang="en-US" dirty="0"/>
+              <a:t>Is this doable, slow and boring, or too fast? </a:t>
+            </a:r>
+          </a:p>
+        </p:txBody>
+      </p:sp>
+    </p:spTree>
+    <p:extLst>
+      <p:ext uri="{BB962C8B-B14F-4D97-AF65-F5344CB8AC3E}">
+        <p14:creationId xmlns:p14="http://schemas.microsoft.com/office/powerpoint/2010/main" val="1993705214"/>
+      </p:ext>
+    </p:extLst>
+  </p:cSld>
+  <p:clrMapOvr>
+    <a:masterClrMapping/>
+  </p:clrMapOvr>
+</p:sld>
+</file>
+
+<file path=ppt/slides/slide20.xml><?xml version="1.0" encoding="utf-8"?>
+<p:sld xmlns:a="http://schemas.openxmlformats.org/drawingml/2006/main" xmlns:r="http://schemas.openxmlformats.org/officeDocument/2006/relationships" xmlns:p="http://schemas.openxmlformats.org/presentationml/2006/main">
+  <p:cSld>
+    <p:spTree>
+      <p:nvGrpSpPr>
+        <p:cNvPr id="1" name=""/>
+        <p:cNvGrpSpPr/>
+        <p:nvPr/>
+      </p:nvGrpSpPr>
+      <p:grpSpPr>
+        <a:xfrm>
+          <a:off x="0" y="0"/>
+          <a:ext cx="0" cy="0"/>
+          <a:chOff x="0" y="0"/>
+          <a:chExt cx="0" cy="0"/>
+        </a:xfrm>
+      </p:grpSpPr>
+      <p:sp>
+        <p:nvSpPr>
+          <p:cNvPr id="2" name="Title 1">
+            <a:extLst>
+              <a:ext uri="{FF2B5EF4-FFF2-40B4-BE49-F238E27FC236}">
                 <a16:creationId xmlns:a16="http://schemas.microsoft.com/office/drawing/2014/main" id="{98EDF7BC-8DDF-D555-337E-001600910EC5}"/>
               </a:ext>
             </a:extLst>
@@ -5030,7 +5625,7 @@
 </p:sld>
 </file>
 
-<file path=ppt/slides/slide18.xml><?xml version="1.0" encoding="utf-8"?>
+<file path=ppt/slides/slide21.xml><?xml version="1.0" encoding="utf-8"?>
 <p:sld xmlns:a="http://schemas.openxmlformats.org/drawingml/2006/main" xmlns:r="http://schemas.openxmlformats.org/officeDocument/2006/relationships" xmlns:p="http://schemas.openxmlformats.org/presentationml/2006/main">
   <p:cSld>
     <p:spTree>
@@ -5218,7 +5813,7 @@
 </p:sld>
 </file>
 
-<file path=ppt/slides/slide19.xml><?xml version="1.0" encoding="utf-8"?>
+<file path=ppt/slides/slide22.xml><?xml version="1.0" encoding="utf-8"?>
 <p:sld xmlns:a="http://schemas.openxmlformats.org/drawingml/2006/main" xmlns:r="http://schemas.openxmlformats.org/officeDocument/2006/relationships" xmlns:p="http://schemas.openxmlformats.org/presentationml/2006/main">
   <p:cSld>
     <p:spTree>
@@ -5301,146 +5896,7 @@
 </p:sld>
 </file>
 
-<file path=ppt/slides/slide2.xml><?xml version="1.0" encoding="utf-8"?>
-<p:sld xmlns:a="http://schemas.openxmlformats.org/drawingml/2006/main" xmlns:r="http://schemas.openxmlformats.org/officeDocument/2006/relationships" xmlns:p="http://schemas.openxmlformats.org/presentationml/2006/main">
-  <p:cSld>
-    <p:spTree>
-      <p:nvGrpSpPr>
-        <p:cNvPr id="1" name=""/>
-        <p:cNvGrpSpPr/>
-        <p:nvPr/>
-      </p:nvGrpSpPr>
-      <p:grpSpPr>
-        <a:xfrm>
-          <a:off x="0" y="0"/>
-          <a:ext cx="0" cy="0"/>
-          <a:chOff x="0" y="0"/>
-          <a:chExt cx="0" cy="0"/>
-        </a:xfrm>
-      </p:grpSpPr>
-      <p:sp>
-        <p:nvSpPr>
-          <p:cNvPr id="2" name="Title 1">
-            <a:extLst>
-              <a:ext uri="{FF2B5EF4-FFF2-40B4-BE49-F238E27FC236}">
-                <a16:creationId xmlns:a16="http://schemas.microsoft.com/office/drawing/2014/main" id="{6E94FE75-CDF8-8409-E665-03B5C89F431A}"/>
-              </a:ext>
-            </a:extLst>
-          </p:cNvPr>
-          <p:cNvSpPr>
-            <a:spLocks noGrp="1"/>
-          </p:cNvSpPr>
-          <p:nvPr>
-            <p:ph type="title"/>
-          </p:nvPr>
-        </p:nvSpPr>
-        <p:spPr/>
-        <p:txBody>
-          <a:bodyPr/>
-          <a:lstStyle/>
-          <a:p>
-            <a:r>
-              <a:rPr lang="en-US" dirty="0"/>
-              <a:t>Fun Project Idea!</a:t>
-            </a:r>
-          </a:p>
-        </p:txBody>
-      </p:sp>
-      <p:sp>
-        <p:nvSpPr>
-          <p:cNvPr id="3" name="Content Placeholder 2">
-            <a:extLst>
-              <a:ext uri="{FF2B5EF4-FFF2-40B4-BE49-F238E27FC236}">
-                <a16:creationId xmlns:a16="http://schemas.microsoft.com/office/drawing/2014/main" id="{C53C85BE-7A01-98D8-39CA-C251B16A8B13}"/>
-              </a:ext>
-            </a:extLst>
-          </p:cNvPr>
-          <p:cNvSpPr>
-            <a:spLocks noGrp="1"/>
-          </p:cNvSpPr>
-          <p:nvPr>
-            <p:ph idx="1"/>
-          </p:nvPr>
-        </p:nvSpPr>
-        <p:spPr>
-          <a:xfrm>
-            <a:off x="1219201" y="1933903"/>
-            <a:ext cx="9835654" cy="4119577"/>
-          </a:xfrm>
-        </p:spPr>
-        <p:txBody>
-          <a:bodyPr/>
-          <a:lstStyle/>
-          <a:p>
-            <a:r>
-              <a:rPr lang="en-US" dirty="0"/>
-              <a:t>For the real estate thing, you have image URLs. </a:t>
-            </a:r>
-          </a:p>
-          <a:p>
-            <a:r>
-              <a:rPr lang="en-US" dirty="0"/>
-              <a:t>Grab the images, create a dataset to process and prepare them, and use them as some features to make a model. </a:t>
-            </a:r>
-          </a:p>
-          <a:p>
-            <a:pPr lvl="1"/>
-            <a:r>
-              <a:rPr lang="en-US" dirty="0"/>
-              <a:t>This will require a bit of thinking to plan a good way and order to do it.</a:t>
-            </a:r>
-          </a:p>
-          <a:p>
-            <a:pPr lvl="1"/>
-            <a:r>
-              <a:rPr lang="en-US" dirty="0"/>
-              <a:t>We’ll cover the image specific bits by next time. </a:t>
-            </a:r>
-          </a:p>
-          <a:p>
-            <a:r>
-              <a:rPr lang="en-US" dirty="0"/>
-              <a:t>Also, with the tabular stuff, I’d throw it all into a deep regression NN to predict the price and see what happens. </a:t>
-            </a:r>
-          </a:p>
-          <a:p>
-            <a:pPr lvl="1"/>
-            <a:r>
-              <a:rPr lang="en-US" dirty="0"/>
-              <a:t>You’ll need to do some clean up (e.g. large number of </a:t>
-            </a:r>
-            <a:r>
-              <a:rPr lang="en-US" dirty="0" err="1"/>
-              <a:t>vals</a:t>
-            </a:r>
-            <a:r>
-              <a:rPr lang="en-US" dirty="0"/>
-              <a:t> in categorical) but I would just see how it works out. </a:t>
-            </a:r>
-          </a:p>
-          <a:p>
-            <a:pPr lvl="1"/>
-            <a:r>
-              <a:rPr lang="en-US" dirty="0"/>
-              <a:t>I’d also try separate features for year and season, as well as something for “momentum”. </a:t>
-            </a:r>
-          </a:p>
-        </p:txBody>
-      </p:sp>
-    </p:spTree>
-    <p:extLst>
-      <p:ext uri="{BB962C8B-B14F-4D97-AF65-F5344CB8AC3E}">
-        <p14:creationId xmlns:p14="http://schemas.microsoft.com/office/powerpoint/2010/main" val="2453275796"/>
-      </p:ext>
-    </p:extLst>
-  </p:cSld>
-  <p:clrMapOvr>
-    <a:masterClrMapping/>
-  </p:clrMapOvr>
-</p:sld>
-</file>
-
-<file path=ppt/slides/slide20.xml><?xml version="1.0" encoding="utf-8"?>
+<file path=ppt/slides/slide23.xml><?xml version="1.0" encoding="utf-8"?>
 <p:sld xmlns:a="http://schemas.openxmlformats.org/drawingml/2006/main" xmlns:r="http://schemas.openxmlformats.org/officeDocument/2006/relationships" xmlns:p="http://schemas.openxmlformats.org/presentationml/2006/main">
   <p:cSld>
     <p:spTree>
@@ -5618,7 +6074,7 @@
 </p:sld>
 </file>
 
-<file path=ppt/slides/slide21.xml><?xml version="1.0" encoding="utf-8"?>
+<file path=ppt/slides/slide24.xml><?xml version="1.0" encoding="utf-8"?>
 <p:sld xmlns:a="http://schemas.openxmlformats.org/drawingml/2006/main" xmlns:r="http://schemas.openxmlformats.org/officeDocument/2006/relationships" xmlns:p="http://schemas.openxmlformats.org/presentationml/2006/main">
   <p:cSld>
     <p:spTree>
@@ -5776,7 +6232,7 @@
 </p:sld>
 </file>
 
-<file path=ppt/slides/slide22.xml><?xml version="1.0" encoding="utf-8"?>
+<file path=ppt/slides/slide25.xml><?xml version="1.0" encoding="utf-8"?>
 <p:sld xmlns:a="http://schemas.openxmlformats.org/drawingml/2006/main" xmlns:r="http://schemas.openxmlformats.org/officeDocument/2006/relationships" xmlns:p="http://schemas.openxmlformats.org/presentationml/2006/main">
   <p:cSld>
     <p:spTree>
@@ -5924,7 +6380,7 @@
 </p:sld>
 </file>
 
-<file path=ppt/slides/slide23.xml><?xml version="1.0" encoding="utf-8"?>
+<file path=ppt/slides/slide26.xml><?xml version="1.0" encoding="utf-8"?>
 <p:sld xmlns:a="http://schemas.openxmlformats.org/drawingml/2006/main" xmlns:r="http://schemas.openxmlformats.org/officeDocument/2006/relationships" xmlns:p="http://schemas.openxmlformats.org/presentationml/2006/main">
   <p:cSld>
     <p:spTree>
@@ -6064,7 +6520,7 @@
 </p:sld>
 </file>
 
-<file path=ppt/slides/slide24.xml><?xml version="1.0" encoding="utf-8"?>
+<file path=ppt/slides/slide27.xml><?xml version="1.0" encoding="utf-8"?>
 <p:sld xmlns:a="http://schemas.openxmlformats.org/drawingml/2006/main" xmlns:r="http://schemas.openxmlformats.org/officeDocument/2006/relationships" xmlns:p="http://schemas.openxmlformats.org/presentationml/2006/main">
   <p:cSld>
     <p:spTree>
@@ -6221,7 +6677,7 @@
 </p:sld>
 </file>
 
-<file path=ppt/slides/slide25.xml><?xml version="1.0" encoding="utf-8"?>
+<file path=ppt/slides/slide28.xml><?xml version="1.0" encoding="utf-8"?>
 <p:sld xmlns:a="http://schemas.openxmlformats.org/drawingml/2006/main" xmlns:r="http://schemas.openxmlformats.org/officeDocument/2006/relationships" xmlns:p="http://schemas.openxmlformats.org/presentationml/2006/main">
   <p:cSld>
     <p:spTree>
@@ -6443,7 +6899,7 @@
 </p:sld>
 </file>
 
-<file path=ppt/slides/slide26.xml><?xml version="1.0" encoding="utf-8"?>
+<file path=ppt/slides/slide29.xml><?xml version="1.0" encoding="utf-8"?>
 <p:sld xmlns:a="http://schemas.openxmlformats.org/drawingml/2006/main" xmlns:r="http://schemas.openxmlformats.org/officeDocument/2006/relationships" xmlns:p="http://schemas.openxmlformats.org/presentationml/2006/main">
   <p:cSld>
     <p:spTree>
@@ -6465,6 +6921,335 @@
           <p:cNvPr id="2" name="Title 1">
             <a:extLst>
               <a:ext uri="{FF2B5EF4-FFF2-40B4-BE49-F238E27FC236}">
+                <a16:creationId xmlns:a16="http://schemas.microsoft.com/office/drawing/2014/main" id="{7AAF08BE-B82D-72B0-347A-EDE43EC4313D}"/>
+              </a:ext>
+            </a:extLst>
+          </p:cNvPr>
+          <p:cNvSpPr>
+            <a:spLocks noGrp="1"/>
+          </p:cNvSpPr>
+          <p:nvPr>
+            <p:ph type="title"/>
+          </p:nvPr>
+        </p:nvSpPr>
+        <p:spPr/>
+        <p:txBody>
+          <a:bodyPr/>
+          <a:lstStyle/>
+          <a:p>
+            <a:r>
+              <a:rPr lang="en-US" dirty="0"/>
+              <a:t>I lost my Balance!!</a:t>
+            </a:r>
+          </a:p>
+        </p:txBody>
+      </p:sp>
+      <p:sp>
+        <p:nvSpPr>
+          <p:cNvPr id="3" name="Content Placeholder 2">
+            <a:extLst>
+              <a:ext uri="{FF2B5EF4-FFF2-40B4-BE49-F238E27FC236}">
+                <a16:creationId xmlns:a16="http://schemas.microsoft.com/office/drawing/2014/main" id="{DF65F1FB-0A8E-318E-D190-0E979DE6B979}"/>
+              </a:ext>
+            </a:extLst>
+          </p:cNvPr>
+          <p:cNvSpPr>
+            <a:spLocks noGrp="1"/>
+          </p:cNvSpPr>
+          <p:nvPr>
+            <p:ph idx="1"/>
+          </p:nvPr>
+        </p:nvSpPr>
+        <p:spPr>
+          <a:xfrm>
+            <a:off x="1451580" y="1853754"/>
+            <a:ext cx="8457994" cy="4199727"/>
+          </a:xfrm>
+        </p:spPr>
+        <p:txBody>
+          <a:bodyPr/>
+          <a:lstStyle/>
+          <a:p>
+            <a:r>
+              <a:rPr lang="en-US" dirty="0"/>
+              <a:t>There are a couple of simple things we can add to address a class imbalance. </a:t>
+            </a:r>
+          </a:p>
+          <a:p>
+            <a:r>
+              <a:rPr lang="en-US" dirty="0"/>
+              <a:t>Weighting:</a:t>
+            </a:r>
+          </a:p>
+          <a:p>
+            <a:pPr lvl="1"/>
+            <a:r>
+              <a:rPr lang="en-US" dirty="0"/>
+              <a:t>Can add weight to loss function to increase impact of less common classes. </a:t>
+            </a:r>
+          </a:p>
+          <a:p>
+            <a:r>
+              <a:rPr lang="en-US" dirty="0"/>
+              <a:t>Stratification:</a:t>
+            </a:r>
+          </a:p>
+          <a:p>
+            <a:pPr lvl="1"/>
+            <a:r>
+              <a:rPr lang="en-US" dirty="0"/>
+              <a:t>Change training record selection to increase minority. </a:t>
+            </a:r>
+          </a:p>
+          <a:p>
+            <a:pPr lvl="1"/>
+            <a:r>
+              <a:rPr lang="en-US" dirty="0"/>
+              <a:t>Can feed </a:t>
+            </a:r>
+            <a:r>
+              <a:rPr lang="en-US" dirty="0" err="1"/>
+              <a:t>dataloader</a:t>
+            </a:r>
+            <a:r>
+              <a:rPr lang="en-US" dirty="0"/>
+              <a:t> a new sampler. </a:t>
+            </a:r>
+          </a:p>
+          <a:p>
+            <a:pPr lvl="1"/>
+            <a:r>
+              <a:rPr lang="en-US" dirty="0"/>
+              <a:t>The sampler gives a non-random selection, to favor minority class. </a:t>
+            </a:r>
+          </a:p>
+          <a:p>
+            <a:r>
+              <a:rPr lang="en-US" dirty="0"/>
+              <a:t>In my personal observation on examples in this class, the most common improvement is to prevent any class's performance from being “too bad”. </a:t>
+            </a:r>
+          </a:p>
+        </p:txBody>
+      </p:sp>
+      <p:pic>
+        <p:nvPicPr>
+          <p:cNvPr id="4" name="Picture 3" descr="Balance Fail GIFs | Tenor">
+            <a:extLst>
+              <a:ext uri="{FF2B5EF4-FFF2-40B4-BE49-F238E27FC236}">
+                <a16:creationId xmlns:a16="http://schemas.microsoft.com/office/drawing/2014/main" id="{48D53FA6-50A2-2C6A-FCE1-14BC6CEDD493}"/>
+              </a:ext>
+            </a:extLst>
+          </p:cNvPr>
+          <p:cNvPicPr>
+            <a:picLocks noChangeAspect="1"/>
+          </p:cNvPicPr>
+          <p:nvPr/>
+        </p:nvPicPr>
+        <p:blipFill>
+          <a:blip r:embed="rId2"/>
+          <a:stretch>
+            <a:fillRect/>
+          </a:stretch>
+        </p:blipFill>
+        <p:spPr>
+          <a:xfrm>
+            <a:off x="9909573" y="2194091"/>
+            <a:ext cx="2190739" cy="2967455"/>
+          </a:xfrm>
+          <a:prstGeom prst="rect">
+            <a:avLst/>
+          </a:prstGeom>
+        </p:spPr>
+      </p:pic>
+    </p:spTree>
+    <p:extLst>
+      <p:ext uri="{BB962C8B-B14F-4D97-AF65-F5344CB8AC3E}">
+        <p14:creationId xmlns:p14="http://schemas.microsoft.com/office/powerpoint/2010/main" val="1268087694"/>
+      </p:ext>
+    </p:extLst>
+  </p:cSld>
+  <p:clrMapOvr>
+    <a:masterClrMapping/>
+  </p:clrMapOvr>
+</p:sld>
+</file>
+
+<file path=ppt/slides/slide3.xml><?xml version="1.0" encoding="utf-8"?>
+<p:sld xmlns:a="http://schemas.openxmlformats.org/drawingml/2006/main" xmlns:r="http://schemas.openxmlformats.org/officeDocument/2006/relationships" xmlns:p="http://schemas.openxmlformats.org/presentationml/2006/main">
+  <p:cSld>
+    <p:spTree>
+      <p:nvGrpSpPr>
+        <p:cNvPr id="1" name=""/>
+        <p:cNvGrpSpPr/>
+        <p:nvPr/>
+      </p:nvGrpSpPr>
+      <p:grpSpPr>
+        <a:xfrm>
+          <a:off x="0" y="0"/>
+          <a:ext cx="0" cy="0"/>
+          <a:chOff x="0" y="0"/>
+          <a:chExt cx="0" cy="0"/>
+        </a:xfrm>
+      </p:grpSpPr>
+      <p:sp>
+        <p:nvSpPr>
+          <p:cNvPr id="2" name="Title 1">
+            <a:extLst>
+              <a:ext uri="{FF2B5EF4-FFF2-40B4-BE49-F238E27FC236}">
+                <a16:creationId xmlns:a16="http://schemas.microsoft.com/office/drawing/2014/main" id="{6565BFC3-E2DA-3C86-F906-B534C6C29CBF}"/>
+              </a:ext>
+            </a:extLst>
+          </p:cNvPr>
+          <p:cNvSpPr>
+            <a:spLocks noGrp="1"/>
+          </p:cNvSpPr>
+          <p:nvPr>
+            <p:ph type="title"/>
+          </p:nvPr>
+        </p:nvSpPr>
+        <p:spPr/>
+        <p:txBody>
+          <a:bodyPr/>
+          <a:lstStyle/>
+          <a:p>
+            <a:r>
+              <a:rPr lang="en-US" dirty="0"/>
+              <a:t>Memorize Stuff, Or Don’t</a:t>
+            </a:r>
+          </a:p>
+        </p:txBody>
+      </p:sp>
+      <p:sp>
+        <p:nvSpPr>
+          <p:cNvPr id="3" name="Content Placeholder 2">
+            <a:extLst>
+              <a:ext uri="{FF2B5EF4-FFF2-40B4-BE49-F238E27FC236}">
+                <a16:creationId xmlns:a16="http://schemas.microsoft.com/office/drawing/2014/main" id="{193B21B9-5A46-ABA3-2871-BBF52A69CA02}"/>
+              </a:ext>
+            </a:extLst>
+          </p:cNvPr>
+          <p:cNvSpPr>
+            <a:spLocks noGrp="1"/>
+          </p:cNvSpPr>
+          <p:nvPr>
+            <p:ph idx="1"/>
+          </p:nvPr>
+        </p:nvSpPr>
+        <p:spPr>
+          <a:xfrm>
+            <a:off x="1451579" y="2015732"/>
+            <a:ext cx="9603275" cy="4122309"/>
+          </a:xfrm>
+        </p:spPr>
+        <p:txBody>
+          <a:bodyPr/>
+          <a:lstStyle/>
+          <a:p>
+            <a:r>
+              <a:rPr lang="en-US" dirty="0"/>
+              <a:t>The </a:t>
+            </a:r>
+            <a:r>
+              <a:rPr lang="en-US" dirty="0" err="1"/>
+              <a:t>PyTorch</a:t>
+            </a:r>
+            <a:r>
+              <a:rPr lang="en-US" dirty="0"/>
+              <a:t> content has a pretty large amount of “required stuff”. </a:t>
+            </a:r>
+          </a:p>
+          <a:p>
+            <a:pPr lvl="1"/>
+            <a:r>
+              <a:rPr lang="en-US" dirty="0"/>
+              <a:t>Training loops, gradient calculations, dataset structure, </a:t>
+            </a:r>
+            <a:r>
+              <a:rPr lang="en-US" dirty="0" err="1"/>
+              <a:t>etc</a:t>
+            </a:r>
+            <a:r>
+              <a:rPr lang="en-US" dirty="0"/>
+              <a:t>…</a:t>
+            </a:r>
+          </a:p>
+          <a:p>
+            <a:r>
+              <a:rPr lang="en-US" dirty="0"/>
+              <a:t>Don’t focus on memorizing each bit, it is hard and not that useful. </a:t>
+            </a:r>
+          </a:p>
+          <a:p>
+            <a:r>
+              <a:rPr lang="en-US" dirty="0"/>
+              <a:t>Focus on the concepts, we can look up the details. </a:t>
+            </a:r>
+          </a:p>
+          <a:p>
+            <a:pPr lvl="1"/>
+            <a:r>
+              <a:rPr lang="en-US" dirty="0"/>
+              <a:t>What are our data and labels?</a:t>
+            </a:r>
+          </a:p>
+          <a:p>
+            <a:pPr lvl="1"/>
+            <a:r>
+              <a:rPr lang="en-US" dirty="0"/>
+              <a:t>What is the model structure?</a:t>
+            </a:r>
+          </a:p>
+          <a:p>
+            <a:pPr lvl="1"/>
+            <a:r>
+              <a:rPr lang="en-US" dirty="0"/>
+              <a:t>What do we need/want to do to train it? </a:t>
+            </a:r>
+          </a:p>
+          <a:p>
+            <a:pPr lvl="2"/>
+            <a:r>
+              <a:rPr lang="en-US" dirty="0"/>
+              <a:t>Zero gradients, get loss, backwards propagate, step optimizer, repeat. </a:t>
+            </a:r>
+          </a:p>
+        </p:txBody>
+      </p:sp>
+    </p:spTree>
+    <p:extLst>
+      <p:ext uri="{BB962C8B-B14F-4D97-AF65-F5344CB8AC3E}">
+        <p14:creationId xmlns:p14="http://schemas.microsoft.com/office/powerpoint/2010/main" val="1054097066"/>
+      </p:ext>
+    </p:extLst>
+  </p:cSld>
+  <p:clrMapOvr>
+    <a:masterClrMapping/>
+  </p:clrMapOvr>
+</p:sld>
+</file>
+
+<file path=ppt/slides/slide30.xml><?xml version="1.0" encoding="utf-8"?>
+<p:sld xmlns:a="http://schemas.openxmlformats.org/drawingml/2006/main" xmlns:r="http://schemas.openxmlformats.org/officeDocument/2006/relationships" xmlns:p="http://schemas.openxmlformats.org/presentationml/2006/main">
+  <p:cSld>
+    <p:spTree>
+      <p:nvGrpSpPr>
+        <p:cNvPr id="1" name=""/>
+        <p:cNvGrpSpPr/>
+        <p:nvPr/>
+      </p:nvGrpSpPr>
+      <p:grpSpPr>
+        <a:xfrm>
+          <a:off x="0" y="0"/>
+          <a:ext cx="0" cy="0"/>
+          <a:chOff x="0" y="0"/>
+          <a:chExt cx="0" cy="0"/>
+        </a:xfrm>
+      </p:grpSpPr>
+      <p:sp>
+        <p:nvSpPr>
+          <p:cNvPr id="2" name="Title 1">
+            <a:extLst>
+              <a:ext uri="{FF2B5EF4-FFF2-40B4-BE49-F238E27FC236}">
                 <a16:creationId xmlns:a16="http://schemas.microsoft.com/office/drawing/2014/main" id="{B6EF2947-3F8E-08BE-FF41-FE147DC3D6B4}"/>
               </a:ext>
             </a:extLst>
@@ -6620,7 +7405,7 @@
 </p:sld>
 </file>
 
-<file path=ppt/slides/slide27.xml><?xml version="1.0" encoding="utf-8"?>
+<file path=ppt/slides/slide31.xml><?xml version="1.0" encoding="utf-8"?>
 <p:sld xmlns:a="http://schemas.openxmlformats.org/drawingml/2006/main" xmlns:r="http://schemas.openxmlformats.org/officeDocument/2006/relationships" xmlns:p="http://schemas.openxmlformats.org/presentationml/2006/main" show="0">
   <p:cSld>
     <p:spTree>
@@ -6785,7 +7570,7 @@
 </p:sld>
 </file>
 
-<file path=ppt/slides/slide28.xml><?xml version="1.0" encoding="utf-8"?>
+<file path=ppt/slides/slide32.xml><?xml version="1.0" encoding="utf-8"?>
 <p:sld xmlns:a="http://schemas.openxmlformats.org/drawingml/2006/main" xmlns:r="http://schemas.openxmlformats.org/officeDocument/2006/relationships" xmlns:p="http://schemas.openxmlformats.org/presentationml/2006/main" show="0">
   <p:cSld>
     <p:spTree>
@@ -6939,7 +7724,7 @@
 </p:sld>
 </file>
 
-<file path=ppt/slides/slide29.xml><?xml version="1.0" encoding="utf-8"?>
+<file path=ppt/slides/slide33.xml><?xml version="1.0" encoding="utf-8"?>
 <p:sld xmlns:a="http://schemas.openxmlformats.org/drawingml/2006/main" xmlns:r="http://schemas.openxmlformats.org/officeDocument/2006/relationships" xmlns:p="http://schemas.openxmlformats.org/presentationml/2006/main" show="0">
   <p:cSld>
     <p:spTree>
@@ -7228,94 +8013,7 @@
 </p:sld>
 </file>
 
-<file path=ppt/slides/slide3.xml><?xml version="1.0" encoding="utf-8"?>
-<p:sld xmlns:a="http://schemas.openxmlformats.org/drawingml/2006/main" xmlns:r="http://schemas.openxmlformats.org/officeDocument/2006/relationships" xmlns:p="http://schemas.openxmlformats.org/presentationml/2006/main">
-  <p:cSld>
-    <p:spTree>
-      <p:nvGrpSpPr>
-        <p:cNvPr id="1" name=""/>
-        <p:cNvGrpSpPr/>
-        <p:nvPr/>
-      </p:nvGrpSpPr>
-      <p:grpSpPr>
-        <a:xfrm>
-          <a:off x="0" y="0"/>
-          <a:ext cx="0" cy="0"/>
-          <a:chOff x="0" y="0"/>
-          <a:chExt cx="0" cy="0"/>
-        </a:xfrm>
-      </p:grpSpPr>
-      <p:sp>
-        <p:nvSpPr>
-          <p:cNvPr id="2" name="Title 1">
-            <a:extLst>
-              <a:ext uri="{FF2B5EF4-FFF2-40B4-BE49-F238E27FC236}">
-                <a16:creationId xmlns:a16="http://schemas.microsoft.com/office/drawing/2014/main" id="{7E3D1CB9-1E3A-DA11-D7A7-F5480F765F6F}"/>
-              </a:ext>
-            </a:extLst>
-          </p:cNvPr>
-          <p:cNvSpPr>
-            <a:spLocks noGrp="1"/>
-          </p:cNvSpPr>
-          <p:nvPr>
-            <p:ph type="ctrTitle"/>
-          </p:nvPr>
-        </p:nvSpPr>
-        <p:spPr/>
-        <p:txBody>
-          <a:bodyPr/>
-          <a:lstStyle/>
-          <a:p>
-            <a:r>
-              <a:rPr lang="en-US" dirty="0" err="1"/>
-              <a:t>PyTorch</a:t>
-            </a:r>
-            <a:r>
-              <a:rPr lang="en-US" dirty="0"/>
-              <a:t> Data</a:t>
-            </a:r>
-          </a:p>
-        </p:txBody>
-      </p:sp>
-      <p:sp>
-        <p:nvSpPr>
-          <p:cNvPr id="3" name="Subtitle 2">
-            <a:extLst>
-              <a:ext uri="{FF2B5EF4-FFF2-40B4-BE49-F238E27FC236}">
-                <a16:creationId xmlns:a16="http://schemas.microsoft.com/office/drawing/2014/main" id="{280EC84A-4931-77EC-C6E7-6AD91FB320C4}"/>
-              </a:ext>
-            </a:extLst>
-          </p:cNvPr>
-          <p:cNvSpPr>
-            <a:spLocks noGrp="1"/>
-          </p:cNvSpPr>
-          <p:nvPr>
-            <p:ph type="subTitle" idx="1"/>
-          </p:nvPr>
-        </p:nvSpPr>
-        <p:spPr/>
-        <p:txBody>
-          <a:bodyPr/>
-          <a:lstStyle/>
-          <a:p>
-            <a:endParaRPr lang="en-US"/>
-          </a:p>
-        </p:txBody>
-      </p:sp>
-    </p:spTree>
-    <p:extLst>
-      <p:ext uri="{BB962C8B-B14F-4D97-AF65-F5344CB8AC3E}">
-        <p14:creationId xmlns:p14="http://schemas.microsoft.com/office/powerpoint/2010/main" val="2828267948"/>
-      </p:ext>
-    </p:extLst>
-  </p:cSld>
-  <p:clrMapOvr>
-    <a:masterClrMapping/>
-  </p:clrMapOvr>
-</p:sld>
-</file>
-
-<file path=ppt/slides/slide30.xml><?xml version="1.0" encoding="utf-8"?>
+<file path=ppt/slides/slide34.xml><?xml version="1.0" encoding="utf-8"?>
 <p:sld xmlns:a="http://schemas.openxmlformats.org/drawingml/2006/main" xmlns:r="http://schemas.openxmlformats.org/officeDocument/2006/relationships" xmlns:p="http://schemas.openxmlformats.org/presentationml/2006/main" show="0">
   <p:cSld>
     <p:spTree>
@@ -7395,7 +8093,7 @@
 </p:sld>
 </file>
 
-<file path=ppt/slides/slide31.xml><?xml version="1.0" encoding="utf-8"?>
+<file path=ppt/slides/slide35.xml><?xml version="1.0" encoding="utf-8"?>
 <p:sld xmlns:a="http://schemas.openxmlformats.org/drawingml/2006/main" xmlns:r="http://schemas.openxmlformats.org/officeDocument/2006/relationships" xmlns:p="http://schemas.openxmlformats.org/presentationml/2006/main" show="0">
   <p:cSld>
     <p:spTree>
@@ -7538,6 +8236,232 @@
           <p:cNvPr id="2" name="Title 1">
             <a:extLst>
               <a:ext uri="{FF2B5EF4-FFF2-40B4-BE49-F238E27FC236}">
+                <a16:creationId xmlns:a16="http://schemas.microsoft.com/office/drawing/2014/main" id="{6E94FE75-CDF8-8409-E665-03B5C89F431A}"/>
+              </a:ext>
+            </a:extLst>
+          </p:cNvPr>
+          <p:cNvSpPr>
+            <a:spLocks noGrp="1"/>
+          </p:cNvSpPr>
+          <p:nvPr>
+            <p:ph type="title"/>
+          </p:nvPr>
+        </p:nvSpPr>
+        <p:spPr/>
+        <p:txBody>
+          <a:bodyPr/>
+          <a:lstStyle/>
+          <a:p>
+            <a:r>
+              <a:rPr lang="en-US" dirty="0"/>
+              <a:t>Fun Project Idea!</a:t>
+            </a:r>
+          </a:p>
+        </p:txBody>
+      </p:sp>
+      <p:sp>
+        <p:nvSpPr>
+          <p:cNvPr id="3" name="Content Placeholder 2">
+            <a:extLst>
+              <a:ext uri="{FF2B5EF4-FFF2-40B4-BE49-F238E27FC236}">
+                <a16:creationId xmlns:a16="http://schemas.microsoft.com/office/drawing/2014/main" id="{C53C85BE-7A01-98D8-39CA-C251B16A8B13}"/>
+              </a:ext>
+            </a:extLst>
+          </p:cNvPr>
+          <p:cNvSpPr>
+            <a:spLocks noGrp="1"/>
+          </p:cNvSpPr>
+          <p:nvPr>
+            <p:ph idx="1"/>
+          </p:nvPr>
+        </p:nvSpPr>
+        <p:spPr>
+          <a:xfrm>
+            <a:off x="1219201" y="1853755"/>
+            <a:ext cx="9835654" cy="4199726"/>
+          </a:xfrm>
+        </p:spPr>
+        <p:txBody>
+          <a:bodyPr/>
+          <a:lstStyle/>
+          <a:p>
+            <a:r>
+              <a:rPr lang="en-US" dirty="0"/>
+              <a:t>For the real estate thing, you have image URLs. </a:t>
+            </a:r>
+          </a:p>
+          <a:p>
+            <a:r>
+              <a:rPr lang="en-US" dirty="0"/>
+              <a:t>Grab the images, create a dataset to process and prepare them, and use them as some features to make a model. </a:t>
+            </a:r>
+          </a:p>
+          <a:p>
+            <a:pPr lvl="1"/>
+            <a:r>
+              <a:rPr lang="en-US" dirty="0"/>
+              <a:t>This will require a bit of thinking to plan a good way and order to do it.</a:t>
+            </a:r>
+          </a:p>
+          <a:p>
+            <a:pPr lvl="1"/>
+            <a:r>
+              <a:rPr lang="en-US" dirty="0"/>
+              <a:t>We’ll cover the image specific bits by next time. </a:t>
+            </a:r>
+          </a:p>
+          <a:p>
+            <a:pPr lvl="1"/>
+            <a:r>
+              <a:rPr lang="en-US" dirty="0"/>
+              <a:t>This isn’t all that hard, but it is not trivial – there will be odd issues to resolve. </a:t>
+            </a:r>
+          </a:p>
+          <a:p>
+            <a:r>
+              <a:rPr lang="en-US" dirty="0"/>
+              <a:t>I’d also try separate features for year and season, as well as something for “momentum”, interest rates/lending costs, relative status in hood (cheapest house on best street), distance from stuff, </a:t>
+            </a:r>
+            <a:r>
+              <a:rPr lang="en-US" dirty="0" err="1"/>
+              <a:t>etc</a:t>
+            </a:r>
+            <a:r>
+              <a:rPr lang="en-US" dirty="0"/>
+              <a:t>….</a:t>
+            </a:r>
+          </a:p>
+          <a:p>
+            <a:pPr lvl="1"/>
+            <a:r>
+              <a:rPr lang="en-US" dirty="0"/>
+              <a:t>You probably don’t have a great set of predictors by default, you likely need to build. </a:t>
+            </a:r>
+          </a:p>
+        </p:txBody>
+      </p:sp>
+    </p:spTree>
+    <p:extLst>
+      <p:ext uri="{BB962C8B-B14F-4D97-AF65-F5344CB8AC3E}">
+        <p14:creationId xmlns:p14="http://schemas.microsoft.com/office/powerpoint/2010/main" val="2453275796"/>
+      </p:ext>
+    </p:extLst>
+  </p:cSld>
+  <p:clrMapOvr>
+    <a:masterClrMapping/>
+  </p:clrMapOvr>
+</p:sld>
+</file>
+
+<file path=ppt/slides/slide5.xml><?xml version="1.0" encoding="utf-8"?>
+<p:sld xmlns:a="http://schemas.openxmlformats.org/drawingml/2006/main" xmlns:r="http://schemas.openxmlformats.org/officeDocument/2006/relationships" xmlns:p="http://schemas.openxmlformats.org/presentationml/2006/main">
+  <p:cSld>
+    <p:spTree>
+      <p:nvGrpSpPr>
+        <p:cNvPr id="1" name=""/>
+        <p:cNvGrpSpPr/>
+        <p:nvPr/>
+      </p:nvGrpSpPr>
+      <p:grpSpPr>
+        <a:xfrm>
+          <a:off x="0" y="0"/>
+          <a:ext cx="0" cy="0"/>
+          <a:chOff x="0" y="0"/>
+          <a:chExt cx="0" cy="0"/>
+        </a:xfrm>
+      </p:grpSpPr>
+      <p:sp>
+        <p:nvSpPr>
+          <p:cNvPr id="2" name="Title 1">
+            <a:extLst>
+              <a:ext uri="{FF2B5EF4-FFF2-40B4-BE49-F238E27FC236}">
+                <a16:creationId xmlns:a16="http://schemas.microsoft.com/office/drawing/2014/main" id="{7E3D1CB9-1E3A-DA11-D7A7-F5480F765F6F}"/>
+              </a:ext>
+            </a:extLst>
+          </p:cNvPr>
+          <p:cNvSpPr>
+            <a:spLocks noGrp="1"/>
+          </p:cNvSpPr>
+          <p:nvPr>
+            <p:ph type="ctrTitle"/>
+          </p:nvPr>
+        </p:nvSpPr>
+        <p:spPr/>
+        <p:txBody>
+          <a:bodyPr/>
+          <a:lstStyle/>
+          <a:p>
+            <a:r>
+              <a:rPr lang="en-US" dirty="0" err="1"/>
+              <a:t>PyTorch</a:t>
+            </a:r>
+            <a:r>
+              <a:rPr lang="en-US" dirty="0"/>
+              <a:t> Data</a:t>
+            </a:r>
+          </a:p>
+        </p:txBody>
+      </p:sp>
+      <p:sp>
+        <p:nvSpPr>
+          <p:cNvPr id="3" name="Subtitle 2">
+            <a:extLst>
+              <a:ext uri="{FF2B5EF4-FFF2-40B4-BE49-F238E27FC236}">
+                <a16:creationId xmlns:a16="http://schemas.microsoft.com/office/drawing/2014/main" id="{280EC84A-4931-77EC-C6E7-6AD91FB320C4}"/>
+              </a:ext>
+            </a:extLst>
+          </p:cNvPr>
+          <p:cNvSpPr>
+            <a:spLocks noGrp="1"/>
+          </p:cNvSpPr>
+          <p:nvPr>
+            <p:ph type="subTitle" idx="1"/>
+          </p:nvPr>
+        </p:nvSpPr>
+        <p:spPr/>
+        <p:txBody>
+          <a:bodyPr/>
+          <a:lstStyle/>
+          <a:p>
+            <a:endParaRPr lang="en-US"/>
+          </a:p>
+        </p:txBody>
+      </p:sp>
+    </p:spTree>
+    <p:extLst>
+      <p:ext uri="{BB962C8B-B14F-4D97-AF65-F5344CB8AC3E}">
+        <p14:creationId xmlns:p14="http://schemas.microsoft.com/office/powerpoint/2010/main" val="2828267948"/>
+      </p:ext>
+    </p:extLst>
+  </p:cSld>
+  <p:clrMapOvr>
+    <a:masterClrMapping/>
+  </p:clrMapOvr>
+</p:sld>
+</file>
+
+<file path=ppt/slides/slide6.xml><?xml version="1.0" encoding="utf-8"?>
+<p:sld xmlns:a="http://schemas.openxmlformats.org/drawingml/2006/main" xmlns:r="http://schemas.openxmlformats.org/officeDocument/2006/relationships" xmlns:p="http://schemas.openxmlformats.org/presentationml/2006/main">
+  <p:cSld>
+    <p:spTree>
+      <p:nvGrpSpPr>
+        <p:cNvPr id="1" name=""/>
+        <p:cNvGrpSpPr/>
+        <p:nvPr/>
+      </p:nvGrpSpPr>
+      <p:grpSpPr>
+        <a:xfrm>
+          <a:off x="0" y="0"/>
+          <a:ext cx="0" cy="0"/>
+          <a:chOff x="0" y="0"/>
+          <a:chExt cx="0" cy="0"/>
+        </a:xfrm>
+      </p:grpSpPr>
+      <p:sp>
+        <p:nvSpPr>
+          <p:cNvPr id="2" name="Title 1">
+            <a:extLst>
+              <a:ext uri="{FF2B5EF4-FFF2-40B4-BE49-F238E27FC236}">
                 <a16:creationId xmlns:a16="http://schemas.microsoft.com/office/drawing/2014/main" id="{8DD816BC-F271-6D58-EDBE-69485AC24684}"/>
               </a:ext>
             </a:extLst>
@@ -7678,7 +8602,7 @@
 </p:sld>
 </file>
 
-<file path=ppt/slides/slide5.xml><?xml version="1.0" encoding="utf-8"?>
+<file path=ppt/slides/slide7.xml><?xml version="1.0" encoding="utf-8"?>
 <p:sld xmlns:a="http://schemas.openxmlformats.org/drawingml/2006/main" xmlns:r="http://schemas.openxmlformats.org/officeDocument/2006/relationships" xmlns:p="http://schemas.openxmlformats.org/presentationml/2006/main">
   <p:cSld>
     <p:spTree>
@@ -7854,7 +8778,7 @@
 </p:sld>
 </file>
 
-<file path=ppt/slides/slide6.xml><?xml version="1.0" encoding="utf-8"?>
+<file path=ppt/slides/slide8.xml><?xml version="1.0" encoding="utf-8"?>
 <p:sld xmlns:a="http://schemas.openxmlformats.org/drawingml/2006/main" xmlns:r="http://schemas.openxmlformats.org/officeDocument/2006/relationships" xmlns:p="http://schemas.openxmlformats.org/presentationml/2006/main">
   <p:cSld>
     <p:bg>
@@ -8364,7 +9288,7 @@
 </p:sld>
 </file>
 
-<file path=ppt/slides/slide7.xml><?xml version="1.0" encoding="utf-8"?>
+<file path=ppt/slides/slide9.xml><?xml version="1.0" encoding="utf-8"?>
 <p:sld xmlns:a="http://schemas.openxmlformats.org/drawingml/2006/main" xmlns:r="http://schemas.openxmlformats.org/officeDocument/2006/relationships" xmlns:p="http://schemas.openxmlformats.org/presentationml/2006/main">
   <p:cSld>
     <p:spTree>
@@ -8547,313 +9471,6 @@
     <p:extLst>
       <p:ext uri="{BB962C8B-B14F-4D97-AF65-F5344CB8AC3E}">
         <p14:creationId xmlns:p14="http://schemas.microsoft.com/office/powerpoint/2010/main" val="1389921544"/>
-      </p:ext>
-    </p:extLst>
-  </p:cSld>
-  <p:clrMapOvr>
-    <a:masterClrMapping/>
-  </p:clrMapOvr>
-</p:sld>
-</file>
-
-<file path=ppt/slides/slide8.xml><?xml version="1.0" encoding="utf-8"?>
-<p:sld xmlns:a="http://schemas.openxmlformats.org/drawingml/2006/main" xmlns:r="http://schemas.openxmlformats.org/officeDocument/2006/relationships" xmlns:p="http://schemas.openxmlformats.org/presentationml/2006/main">
-  <p:cSld>
-    <p:spTree>
-      <p:nvGrpSpPr>
-        <p:cNvPr id="1" name=""/>
-        <p:cNvGrpSpPr/>
-        <p:nvPr/>
-      </p:nvGrpSpPr>
-      <p:grpSpPr>
-        <a:xfrm>
-          <a:off x="0" y="0"/>
-          <a:ext cx="0" cy="0"/>
-          <a:chOff x="0" y="0"/>
-          <a:chExt cx="0" cy="0"/>
-        </a:xfrm>
-      </p:grpSpPr>
-      <p:sp>
-        <p:nvSpPr>
-          <p:cNvPr id="2" name="Title 1">
-            <a:extLst>
-              <a:ext uri="{FF2B5EF4-FFF2-40B4-BE49-F238E27FC236}">
-                <a16:creationId xmlns:a16="http://schemas.microsoft.com/office/drawing/2014/main" id="{8334FE99-2EB3-C869-3AB4-74B38B3D7817}"/>
-              </a:ext>
-            </a:extLst>
-          </p:cNvPr>
-          <p:cNvSpPr>
-            <a:spLocks noGrp="1"/>
-          </p:cNvSpPr>
-          <p:nvPr>
-            <p:ph type="title"/>
-          </p:nvPr>
-        </p:nvSpPr>
-        <p:spPr/>
-        <p:txBody>
-          <a:bodyPr/>
-          <a:lstStyle/>
-          <a:p>
-            <a:r>
-              <a:rPr lang="en-US" dirty="0"/>
-              <a:t>Graph Building</a:t>
-            </a:r>
-          </a:p>
-        </p:txBody>
-      </p:sp>
-      <p:sp>
-        <p:nvSpPr>
-          <p:cNvPr id="3" name="Content Placeholder 2">
-            <a:extLst>
-              <a:ext uri="{FF2B5EF4-FFF2-40B4-BE49-F238E27FC236}">
-                <a16:creationId xmlns:a16="http://schemas.microsoft.com/office/drawing/2014/main" id="{6DCB3276-E4B2-E38F-1FE5-9A0E14FEBA06}"/>
-              </a:ext>
-            </a:extLst>
-          </p:cNvPr>
-          <p:cNvSpPr>
-            <a:spLocks noGrp="1"/>
-          </p:cNvSpPr>
-          <p:nvPr>
-            <p:ph idx="1"/>
-          </p:nvPr>
-        </p:nvSpPr>
-        <p:spPr>
-          <a:xfrm>
-            <a:off x="7176815" y="2015732"/>
-            <a:ext cx="5015185" cy="3984049"/>
-          </a:xfrm>
-        </p:spPr>
-        <p:txBody>
-          <a:bodyPr/>
-          <a:lstStyle/>
-          <a:p>
-            <a:r>
-              <a:rPr lang="en-US" dirty="0"/>
-              <a:t>This graph is generated at run time. </a:t>
-            </a:r>
-          </a:p>
-          <a:p>
-            <a:r>
-              <a:rPr lang="en-US" dirty="0"/>
-              <a:t>This means things can be changed in code. </a:t>
-            </a:r>
-          </a:p>
-          <a:p>
-            <a:pPr lvl="1"/>
-            <a:r>
-              <a:rPr lang="en-US" dirty="0"/>
-              <a:t>Sizes and shapes can be changed*.</a:t>
-            </a:r>
-          </a:p>
-          <a:p>
-            <a:r>
-              <a:rPr lang="en-US" dirty="0"/>
-              <a:t>For specialized models, this allows flexibility. </a:t>
-            </a:r>
-          </a:p>
-          <a:p>
-            <a:pPr lvl="1"/>
-            <a:r>
-              <a:rPr lang="en-US" dirty="0"/>
-              <a:t>NLP – length of a document. </a:t>
-            </a:r>
-          </a:p>
-          <a:p>
-            <a:pPr lvl="1"/>
-            <a:r>
-              <a:rPr lang="en-US" dirty="0"/>
-              <a:t>CNN – image size.  </a:t>
-            </a:r>
-          </a:p>
-          <a:p>
-            <a:pPr lvl="1"/>
-            <a:r>
-              <a:rPr lang="en-US" dirty="0"/>
-              <a:t>Some other condition…</a:t>
-            </a:r>
-          </a:p>
-          <a:p>
-            <a:r>
-              <a:rPr lang="en-US" dirty="0"/>
-              <a:t>The steps that are constructed are navigated in reverse automatically. </a:t>
-            </a:r>
-          </a:p>
-        </p:txBody>
-      </p:sp>
-      <p:pic>
-        <p:nvPicPr>
-          <p:cNvPr id="5" name="Picture 4" descr="PyTorch - Computation graph | Shivam Mehta">
-            <a:extLst>
-              <a:ext uri="{FF2B5EF4-FFF2-40B4-BE49-F238E27FC236}">
-                <a16:creationId xmlns:a16="http://schemas.microsoft.com/office/drawing/2014/main" id="{42DAF420-631C-5960-C724-163646ED3C48}"/>
-              </a:ext>
-            </a:extLst>
-          </p:cNvPr>
-          <p:cNvPicPr>
-            <a:picLocks noChangeAspect="1"/>
-          </p:cNvPicPr>
-          <p:nvPr/>
-        </p:nvPicPr>
-        <p:blipFill>
-          <a:blip r:embed="rId2"/>
-          <a:stretch>
-            <a:fillRect/>
-          </a:stretch>
-        </p:blipFill>
-        <p:spPr>
-          <a:xfrm>
-            <a:off x="96253" y="2015732"/>
-            <a:ext cx="7080562" cy="3984049"/>
-          </a:xfrm>
-          <a:prstGeom prst="rect">
-            <a:avLst/>
-          </a:prstGeom>
-        </p:spPr>
-      </p:pic>
-    </p:spTree>
-    <p:extLst>
-      <p:ext uri="{BB962C8B-B14F-4D97-AF65-F5344CB8AC3E}">
-        <p14:creationId xmlns:p14="http://schemas.microsoft.com/office/powerpoint/2010/main" val="4269103806"/>
-      </p:ext>
-    </p:extLst>
-  </p:cSld>
-  <p:clrMapOvr>
-    <a:masterClrMapping/>
-  </p:clrMapOvr>
-</p:sld>
-</file>
-
-<file path=ppt/slides/slide9.xml><?xml version="1.0" encoding="utf-8"?>
-<p:sld xmlns:a="http://schemas.openxmlformats.org/drawingml/2006/main" xmlns:r="http://schemas.openxmlformats.org/officeDocument/2006/relationships" xmlns:p="http://schemas.openxmlformats.org/presentationml/2006/main">
-  <p:cSld>
-    <p:spTree>
-      <p:nvGrpSpPr>
-        <p:cNvPr id="1" name=""/>
-        <p:cNvGrpSpPr/>
-        <p:nvPr/>
-      </p:nvGrpSpPr>
-      <p:grpSpPr>
-        <a:xfrm>
-          <a:off x="0" y="0"/>
-          <a:ext cx="0" cy="0"/>
-          <a:chOff x="0" y="0"/>
-          <a:chExt cx="0" cy="0"/>
-        </a:xfrm>
-      </p:grpSpPr>
-      <p:sp>
-        <p:nvSpPr>
-          <p:cNvPr id="2" name="Title 1">
-            <a:extLst>
-              <a:ext uri="{FF2B5EF4-FFF2-40B4-BE49-F238E27FC236}">
-                <a16:creationId xmlns:a16="http://schemas.microsoft.com/office/drawing/2014/main" id="{CB49DE94-24CE-9A0D-AA2C-0B9A1D20BA15}"/>
-              </a:ext>
-            </a:extLst>
-          </p:cNvPr>
-          <p:cNvSpPr>
-            <a:spLocks noGrp="1"/>
-          </p:cNvSpPr>
-          <p:nvPr>
-            <p:ph type="title"/>
-          </p:nvPr>
-        </p:nvSpPr>
-        <p:spPr/>
-        <p:txBody>
-          <a:bodyPr/>
-          <a:lstStyle/>
-          <a:p>
-            <a:endParaRPr lang="en-US"/>
-          </a:p>
-        </p:txBody>
-      </p:sp>
-      <p:sp>
-        <p:nvSpPr>
-          <p:cNvPr id="3" name="Content Placeholder 2">
-            <a:extLst>
-              <a:ext uri="{FF2B5EF4-FFF2-40B4-BE49-F238E27FC236}">
-                <a16:creationId xmlns:a16="http://schemas.microsoft.com/office/drawing/2014/main" id="{A2537DEF-A99C-A4EF-B845-349943B104DF}"/>
-              </a:ext>
-            </a:extLst>
-          </p:cNvPr>
-          <p:cNvSpPr>
-            <a:spLocks noGrp="1"/>
-          </p:cNvSpPr>
-          <p:nvPr>
-            <p:ph idx="1"/>
-          </p:nvPr>
-        </p:nvSpPr>
-        <p:spPr/>
-        <p:txBody>
-          <a:bodyPr/>
-          <a:lstStyle/>
-          <a:p>
-            <a:endParaRPr lang="en-US"/>
-          </a:p>
-        </p:txBody>
-      </p:sp>
-      <p:pic>
-        <p:nvPicPr>
-          <p:cNvPr id="4" name="Picture 3" descr="How to Visualize PyTorch Neural Networks - GeeksforGeeks">
-            <a:extLst>
-              <a:ext uri="{FF2B5EF4-FFF2-40B4-BE49-F238E27FC236}">
-                <a16:creationId xmlns:a16="http://schemas.microsoft.com/office/drawing/2014/main" id="{69F95D74-80AA-967A-9F23-DDAF5F02F356}"/>
-              </a:ext>
-            </a:extLst>
-          </p:cNvPr>
-          <p:cNvPicPr>
-            <a:picLocks noChangeAspect="1"/>
-          </p:cNvPicPr>
-          <p:nvPr/>
-        </p:nvPicPr>
-        <p:blipFill>
-          <a:blip r:embed="rId2"/>
-          <a:stretch>
-            <a:fillRect/>
-          </a:stretch>
-        </p:blipFill>
-        <p:spPr>
-          <a:xfrm>
-            <a:off x="950494" y="18847"/>
-            <a:ext cx="3962400" cy="6845300"/>
-          </a:xfrm>
-          <a:prstGeom prst="rect">
-            <a:avLst/>
-          </a:prstGeom>
-        </p:spPr>
-      </p:pic>
-      <p:pic>
-        <p:nvPicPr>
-          <p:cNvPr id="5" name="Picture 4" descr="Computational graph example in TensorFlow (Source: Tensorflow Graph Guide)">
-            <a:extLst>
-              <a:ext uri="{FF2B5EF4-FFF2-40B4-BE49-F238E27FC236}">
-                <a16:creationId xmlns:a16="http://schemas.microsoft.com/office/drawing/2014/main" id="{926226D3-A3FD-E231-F571-CEE0A6DEBB4C}"/>
-              </a:ext>
-            </a:extLst>
-          </p:cNvPr>
-          <p:cNvPicPr>
-            <a:picLocks noChangeAspect="1"/>
-          </p:cNvPicPr>
-          <p:nvPr/>
-        </p:nvPicPr>
-        <p:blipFill>
-          <a:blip r:embed="rId3"/>
-          <a:stretch>
-            <a:fillRect/>
-          </a:stretch>
-        </p:blipFill>
-        <p:spPr>
-          <a:xfrm>
-            <a:off x="6705600" y="25216"/>
-            <a:ext cx="3846095" cy="6837502"/>
-          </a:xfrm>
-          <a:prstGeom prst="rect">
-            <a:avLst/>
-          </a:prstGeom>
-        </p:spPr>
-      </p:pic>
-    </p:spTree>
-    <p:extLst>
-      <p:ext uri="{BB962C8B-B14F-4D97-AF65-F5344CB8AC3E}">
-        <p14:creationId xmlns:p14="http://schemas.microsoft.com/office/powerpoint/2010/main" val="2895205234"/>
       </p:ext>
     </p:extLst>
   </p:cSld>
